--- a/DOC/Elevaton Pitch Septiembre.pptx
+++ b/DOC/Elevaton Pitch Septiembre.pptx
@@ -5,36 +5,35 @@
     <p:sldMasterId id="2147483659" r:id="rId1"/>
   </p:sldMasterIdLst>
   <p:notesMasterIdLst>
-    <p:notesMasterId r:id="rId12"/>
+    <p:notesMasterId r:id="rId11"/>
   </p:notesMasterIdLst>
   <p:sldIdLst>
     <p:sldId id="256" r:id="rId2"/>
     <p:sldId id="257" r:id="rId3"/>
     <p:sldId id="272" r:id="rId4"/>
     <p:sldId id="259" r:id="rId5"/>
-    <p:sldId id="262" r:id="rId6"/>
-    <p:sldId id="276" r:id="rId7"/>
-    <p:sldId id="278" r:id="rId8"/>
-    <p:sldId id="263" r:id="rId9"/>
-    <p:sldId id="273" r:id="rId10"/>
-    <p:sldId id="274" r:id="rId11"/>
+    <p:sldId id="276" r:id="rId6"/>
+    <p:sldId id="278" r:id="rId7"/>
+    <p:sldId id="263" r:id="rId8"/>
+    <p:sldId id="273" r:id="rId9"/>
+    <p:sldId id="274" r:id="rId10"/>
   </p:sldIdLst>
   <p:sldSz cx="18288000" cy="10287000"/>
   <p:notesSz cx="6858000" cy="9144000"/>
   <p:embeddedFontLst>
     <p:embeddedFont>
       <p:font typeface="Calibri" panose="020F0502020204030204" pitchFamily="34" charset="0"/>
-      <p:regular r:id="rId13"/>
-      <p:bold r:id="rId14"/>
-      <p:italic r:id="rId15"/>
-      <p:boldItalic r:id="rId16"/>
+      <p:regular r:id="rId12"/>
+      <p:bold r:id="rId13"/>
+      <p:italic r:id="rId14"/>
+      <p:boldItalic r:id="rId15"/>
     </p:embeddedFont>
     <p:embeddedFont>
-      <p:font typeface="Poppins" panose="020B0604020202020204" charset="0"/>
-      <p:regular r:id="rId17"/>
-      <p:bold r:id="rId18"/>
-      <p:italic r:id="rId19"/>
-      <p:boldItalic r:id="rId20"/>
+      <p:font typeface="Poppins" panose="020B0502040204020203" pitchFamily="2" charset="0"/>
+      <p:regular r:id="rId16"/>
+      <p:bold r:id="rId17"/>
+      <p:italic r:id="rId18"/>
+      <p:boldItalic r:id="rId19"/>
     </p:embeddedFont>
   </p:embeddedFontLst>
   <p:defaultTextStyle>
@@ -840,115 +839,6 @@
 </p:notes>
 </file>
 
-<file path=ppt/notesSlides/notesSlide10.xml><?xml version="1.0" encoding="utf-8"?>
-<p:notes xmlns:a="http://schemas.openxmlformats.org/drawingml/2006/main" xmlns:r="http://schemas.openxmlformats.org/officeDocument/2006/relationships" xmlns:p="http://schemas.openxmlformats.org/presentationml/2006/main" showMasterSp="0" showMasterPhAnim="0">
-  <p:cSld>
-    <p:spTree>
-      <p:nvGrpSpPr>
-        <p:cNvPr id="1" name="Shape 214"/>
-        <p:cNvGrpSpPr/>
-        <p:nvPr/>
-      </p:nvGrpSpPr>
-      <p:grpSpPr>
-        <a:xfrm>
-          <a:off x="0" y="0"/>
-          <a:ext cx="0" cy="0"/>
-          <a:chOff x="0" y="0"/>
-          <a:chExt cx="0" cy="0"/>
-        </a:xfrm>
-      </p:grpSpPr>
-      <p:sp>
-        <p:nvSpPr>
-          <p:cNvPr id="215" name="Google Shape;215;p13:notes"/>
-          <p:cNvSpPr txBox="1">
-            <a:spLocks noGrp="1"/>
-          </p:cNvSpPr>
-          <p:nvPr>
-            <p:ph type="body" idx="1"/>
-          </p:nvPr>
-        </p:nvSpPr>
-        <p:spPr>
-          <a:xfrm>
-            <a:off x="685800" y="4343400"/>
-            <a:ext cx="5486400" cy="4114800"/>
-          </a:xfrm>
-          <a:prstGeom prst="rect">
-            <a:avLst/>
-          </a:prstGeom>
-        </p:spPr>
-        <p:txBody>
-          <a:bodyPr spcFirstLastPara="1" wrap="square" lIns="91425" tIns="91425" rIns="91425" bIns="91425" anchor="t" anchorCtr="0">
-            <a:noAutofit/>
-          </a:bodyPr>
-          <a:lstStyle/>
-          <a:p>
-            <a:pPr marL="0" lvl="0" indent="0" algn="l" rtl="0">
-              <a:spcBef>
-                <a:spcPts val="0"/>
-              </a:spcBef>
-              <a:spcAft>
-                <a:spcPts val="0"/>
-              </a:spcAft>
-              <a:buNone/>
-            </a:pPr>
-            <a:endParaRPr/>
-          </a:p>
-        </p:txBody>
-      </p:sp>
-      <p:sp>
-        <p:nvSpPr>
-          <p:cNvPr id="216" name="Google Shape;216;p13:notes"/>
-          <p:cNvSpPr>
-            <a:spLocks noGrp="1" noRot="1" noChangeAspect="1"/>
-          </p:cNvSpPr>
-          <p:nvPr>
-            <p:ph type="sldImg" idx="2"/>
-          </p:nvPr>
-        </p:nvSpPr>
-        <p:spPr>
-          <a:xfrm>
-            <a:off x="381000" y="685800"/>
-            <a:ext cx="6096000" cy="3429000"/>
-          </a:xfrm>
-          <a:custGeom>
-            <a:avLst/>
-            <a:gdLst/>
-            <a:ahLst/>
-            <a:cxnLst/>
-            <a:rect l="l" t="t" r="r" b="b"/>
-            <a:pathLst>
-              <a:path w="120000" h="120000" extrusionOk="0">
-                <a:moveTo>
-                  <a:pt x="0" y="0"/>
-                </a:moveTo>
-                <a:lnTo>
-                  <a:pt x="120000" y="0"/>
-                </a:lnTo>
-                <a:lnTo>
-                  <a:pt x="120000" y="120000"/>
-                </a:lnTo>
-                <a:lnTo>
-                  <a:pt x="0" y="120000"/>
-                </a:lnTo>
-                <a:close/>
-              </a:path>
-            </a:pathLst>
-          </a:custGeom>
-        </p:spPr>
-      </p:sp>
-    </p:spTree>
-    <p:extLst>
-      <p:ext uri="{BB962C8B-B14F-4D97-AF65-F5344CB8AC3E}">
-        <p14:creationId xmlns:p14="http://schemas.microsoft.com/office/powerpoint/2010/main" val="933941784"/>
-      </p:ext>
-    </p:extLst>
-  </p:cSld>
-  <p:clrMapOvr>
-    <a:masterClrMapping/>
-  </p:clrMapOvr>
-</p:notes>
-</file>
-
 <file path=ppt/notesSlides/notesSlide2.xml><?xml version="1.0" encoding="utf-8"?>
 <p:notes xmlns:a="http://schemas.openxmlformats.org/drawingml/2006/main" xmlns:r="http://schemas.openxmlformats.org/officeDocument/2006/relationships" xmlns:p="http://schemas.openxmlformats.org/presentationml/2006/main" showMasterSp="0" showMasterPhAnim="0">
   <p:cSld>
@@ -1375,7 +1265,7 @@
     </p:spTree>
     <p:extLst>
       <p:ext uri="{BB962C8B-B14F-4D97-AF65-F5344CB8AC3E}">
-        <p14:creationId xmlns:p14="http://schemas.microsoft.com/office/powerpoint/2010/main" val="744504237"/>
+        <p14:creationId xmlns:p14="http://schemas.microsoft.com/office/powerpoint/2010/main" val="2793363355"/>
       </p:ext>
     </p:extLst>
   </p:cSld>
@@ -1386,115 +1276,6 @@
 </file>
 
 <file path=ppt/notesSlides/notesSlide6.xml><?xml version="1.0" encoding="utf-8"?>
-<p:notes xmlns:a="http://schemas.openxmlformats.org/drawingml/2006/main" xmlns:r="http://schemas.openxmlformats.org/officeDocument/2006/relationships" xmlns:p="http://schemas.openxmlformats.org/presentationml/2006/main" showMasterSp="0" showMasterPhAnim="0">
-  <p:cSld>
-    <p:spTree>
-      <p:nvGrpSpPr>
-        <p:cNvPr id="1" name="Shape 146"/>
-        <p:cNvGrpSpPr/>
-        <p:nvPr/>
-      </p:nvGrpSpPr>
-      <p:grpSpPr>
-        <a:xfrm>
-          <a:off x="0" y="0"/>
-          <a:ext cx="0" cy="0"/>
-          <a:chOff x="0" y="0"/>
-          <a:chExt cx="0" cy="0"/>
-        </a:xfrm>
-      </p:grpSpPr>
-      <p:sp>
-        <p:nvSpPr>
-          <p:cNvPr id="147" name="Google Shape;147;p7:notes"/>
-          <p:cNvSpPr txBox="1">
-            <a:spLocks noGrp="1"/>
-          </p:cNvSpPr>
-          <p:nvPr>
-            <p:ph type="body" idx="1"/>
-          </p:nvPr>
-        </p:nvSpPr>
-        <p:spPr>
-          <a:xfrm>
-            <a:off x="685800" y="4343400"/>
-            <a:ext cx="5486400" cy="4114800"/>
-          </a:xfrm>
-          <a:prstGeom prst="rect">
-            <a:avLst/>
-          </a:prstGeom>
-        </p:spPr>
-        <p:txBody>
-          <a:bodyPr spcFirstLastPara="1" wrap="square" lIns="91425" tIns="91425" rIns="91425" bIns="91425" anchor="t" anchorCtr="0">
-            <a:noAutofit/>
-          </a:bodyPr>
-          <a:lstStyle/>
-          <a:p>
-            <a:pPr marL="0" lvl="0" indent="0" algn="l" rtl="0">
-              <a:spcBef>
-                <a:spcPts val="0"/>
-              </a:spcBef>
-              <a:spcAft>
-                <a:spcPts val="0"/>
-              </a:spcAft>
-              <a:buNone/>
-            </a:pPr>
-            <a:endParaRPr/>
-          </a:p>
-        </p:txBody>
-      </p:sp>
-      <p:sp>
-        <p:nvSpPr>
-          <p:cNvPr id="148" name="Google Shape;148;p7:notes"/>
-          <p:cNvSpPr>
-            <a:spLocks noGrp="1" noRot="1" noChangeAspect="1"/>
-          </p:cNvSpPr>
-          <p:nvPr>
-            <p:ph type="sldImg" idx="2"/>
-          </p:nvPr>
-        </p:nvSpPr>
-        <p:spPr>
-          <a:xfrm>
-            <a:off x="381000" y="685800"/>
-            <a:ext cx="6096000" cy="3429000"/>
-          </a:xfrm>
-          <a:custGeom>
-            <a:avLst/>
-            <a:gdLst/>
-            <a:ahLst/>
-            <a:cxnLst/>
-            <a:rect l="l" t="t" r="r" b="b"/>
-            <a:pathLst>
-              <a:path w="120000" h="120000" extrusionOk="0">
-                <a:moveTo>
-                  <a:pt x="0" y="0"/>
-                </a:moveTo>
-                <a:lnTo>
-                  <a:pt x="120000" y="0"/>
-                </a:lnTo>
-                <a:lnTo>
-                  <a:pt x="120000" y="120000"/>
-                </a:lnTo>
-                <a:lnTo>
-                  <a:pt x="0" y="120000"/>
-                </a:lnTo>
-                <a:close/>
-              </a:path>
-            </a:pathLst>
-          </a:custGeom>
-        </p:spPr>
-      </p:sp>
-    </p:spTree>
-    <p:extLst>
-      <p:ext uri="{BB962C8B-B14F-4D97-AF65-F5344CB8AC3E}">
-        <p14:creationId xmlns:p14="http://schemas.microsoft.com/office/powerpoint/2010/main" val="2793363355"/>
-      </p:ext>
-    </p:extLst>
-  </p:cSld>
-  <p:clrMapOvr>
-    <a:masterClrMapping/>
-  </p:clrMapOvr>
-</p:notes>
-</file>
-
-<file path=ppt/notesSlides/notesSlide7.xml><?xml version="1.0" encoding="utf-8"?>
 <p:notes xmlns:a="http://schemas.openxmlformats.org/drawingml/2006/main" xmlns:r="http://schemas.openxmlformats.org/officeDocument/2006/relationships" xmlns:p="http://schemas.openxmlformats.org/presentationml/2006/main" showMasterSp="0" showMasterPhAnim="0">
   <p:cSld>
     <p:spTree>
@@ -1603,7 +1384,7 @@
 </p:notes>
 </file>
 
-<file path=ppt/notesSlides/notesSlide8.xml><?xml version="1.0" encoding="utf-8"?>
+<file path=ppt/notesSlides/notesSlide7.xml><?xml version="1.0" encoding="utf-8"?>
 <p:notes xmlns:a="http://schemas.openxmlformats.org/drawingml/2006/main" xmlns:r="http://schemas.openxmlformats.org/officeDocument/2006/relationships" xmlns:p="http://schemas.openxmlformats.org/presentationml/2006/main" showMasterSp="0" showMasterPhAnim="0">
   <p:cSld>
     <p:spTree>
@@ -1712,7 +1493,7 @@
 </p:notes>
 </file>
 
-<file path=ppt/notesSlides/notesSlide9.xml><?xml version="1.0" encoding="utf-8"?>
+<file path=ppt/notesSlides/notesSlide8.xml><?xml version="1.0" encoding="utf-8"?>
 <p:notes xmlns:a="http://schemas.openxmlformats.org/drawingml/2006/main" xmlns:r="http://schemas.openxmlformats.org/officeDocument/2006/relationships" xmlns:p="http://schemas.openxmlformats.org/presentationml/2006/main" showMasterSp="0" showMasterPhAnim="0">
   <p:cSld>
     <p:spTree>
@@ -1812,6 +1593,115 @@
     <p:extLst>
       <p:ext uri="{BB962C8B-B14F-4D97-AF65-F5344CB8AC3E}">
         <p14:creationId xmlns:p14="http://schemas.microsoft.com/office/powerpoint/2010/main" val="616603495"/>
+      </p:ext>
+    </p:extLst>
+  </p:cSld>
+  <p:clrMapOvr>
+    <a:masterClrMapping/>
+  </p:clrMapOvr>
+</p:notes>
+</file>
+
+<file path=ppt/notesSlides/notesSlide9.xml><?xml version="1.0" encoding="utf-8"?>
+<p:notes xmlns:a="http://schemas.openxmlformats.org/drawingml/2006/main" xmlns:r="http://schemas.openxmlformats.org/officeDocument/2006/relationships" xmlns:p="http://schemas.openxmlformats.org/presentationml/2006/main" showMasterSp="0" showMasterPhAnim="0">
+  <p:cSld>
+    <p:spTree>
+      <p:nvGrpSpPr>
+        <p:cNvPr id="1" name="Shape 214"/>
+        <p:cNvGrpSpPr/>
+        <p:nvPr/>
+      </p:nvGrpSpPr>
+      <p:grpSpPr>
+        <a:xfrm>
+          <a:off x="0" y="0"/>
+          <a:ext cx="0" cy="0"/>
+          <a:chOff x="0" y="0"/>
+          <a:chExt cx="0" cy="0"/>
+        </a:xfrm>
+      </p:grpSpPr>
+      <p:sp>
+        <p:nvSpPr>
+          <p:cNvPr id="215" name="Google Shape;215;p13:notes"/>
+          <p:cNvSpPr txBox="1">
+            <a:spLocks noGrp="1"/>
+          </p:cNvSpPr>
+          <p:nvPr>
+            <p:ph type="body" idx="1"/>
+          </p:nvPr>
+        </p:nvSpPr>
+        <p:spPr>
+          <a:xfrm>
+            <a:off x="685800" y="4343400"/>
+            <a:ext cx="5486400" cy="4114800"/>
+          </a:xfrm>
+          <a:prstGeom prst="rect">
+            <a:avLst/>
+          </a:prstGeom>
+        </p:spPr>
+        <p:txBody>
+          <a:bodyPr spcFirstLastPara="1" wrap="square" lIns="91425" tIns="91425" rIns="91425" bIns="91425" anchor="t" anchorCtr="0">
+            <a:noAutofit/>
+          </a:bodyPr>
+          <a:lstStyle/>
+          <a:p>
+            <a:pPr marL="0" lvl="0" indent="0" algn="l" rtl="0">
+              <a:spcBef>
+                <a:spcPts val="0"/>
+              </a:spcBef>
+              <a:spcAft>
+                <a:spcPts val="0"/>
+              </a:spcAft>
+              <a:buNone/>
+            </a:pPr>
+            <a:endParaRPr/>
+          </a:p>
+        </p:txBody>
+      </p:sp>
+      <p:sp>
+        <p:nvSpPr>
+          <p:cNvPr id="216" name="Google Shape;216;p13:notes"/>
+          <p:cNvSpPr>
+            <a:spLocks noGrp="1" noRot="1" noChangeAspect="1"/>
+          </p:cNvSpPr>
+          <p:nvPr>
+            <p:ph type="sldImg" idx="2"/>
+          </p:nvPr>
+        </p:nvSpPr>
+        <p:spPr>
+          <a:xfrm>
+            <a:off x="381000" y="685800"/>
+            <a:ext cx="6096000" cy="3429000"/>
+          </a:xfrm>
+          <a:custGeom>
+            <a:avLst/>
+            <a:gdLst/>
+            <a:ahLst/>
+            <a:cxnLst/>
+            <a:rect l="l" t="t" r="r" b="b"/>
+            <a:pathLst>
+              <a:path w="120000" h="120000" extrusionOk="0">
+                <a:moveTo>
+                  <a:pt x="0" y="0"/>
+                </a:moveTo>
+                <a:lnTo>
+                  <a:pt x="120000" y="0"/>
+                </a:lnTo>
+                <a:lnTo>
+                  <a:pt x="120000" y="120000"/>
+                </a:lnTo>
+                <a:lnTo>
+                  <a:pt x="0" y="120000"/>
+                </a:lnTo>
+                <a:close/>
+              </a:path>
+            </a:pathLst>
+          </a:custGeom>
+        </p:spPr>
+      </p:sp>
+    </p:spTree>
+    <p:extLst>
+      <p:ext uri="{BB962C8B-B14F-4D97-AF65-F5344CB8AC3E}">
+        <p14:creationId xmlns:p14="http://schemas.microsoft.com/office/powerpoint/2010/main" val="933941784"/>
       </p:ext>
     </p:extLst>
   </p:cSld>
@@ -7689,228 +7579,6 @@
 </p:sld>
 </file>
 
-<file path=ppt/slides/slide10.xml><?xml version="1.0" encoding="utf-8"?>
-<p:sld xmlns:a="http://schemas.openxmlformats.org/drawingml/2006/main" xmlns:r="http://schemas.openxmlformats.org/officeDocument/2006/relationships" xmlns:p="http://schemas.openxmlformats.org/presentationml/2006/main">
-  <p:cSld>
-    <p:spTree>
-      <p:nvGrpSpPr>
-        <p:cNvPr id="1" name="Shape 217"/>
-        <p:cNvGrpSpPr/>
-        <p:nvPr/>
-      </p:nvGrpSpPr>
-      <p:grpSpPr>
-        <a:xfrm>
-          <a:off x="0" y="0"/>
-          <a:ext cx="0" cy="0"/>
-          <a:chOff x="0" y="0"/>
-          <a:chExt cx="0" cy="0"/>
-        </a:xfrm>
-      </p:grpSpPr>
-      <p:sp>
-        <p:nvSpPr>
-          <p:cNvPr id="218" name="Google Shape;218;p25"/>
-          <p:cNvSpPr/>
-          <p:nvPr/>
-        </p:nvSpPr>
-        <p:spPr>
-          <a:xfrm>
-            <a:off x="0" y="-103451"/>
-            <a:ext cx="8529633" cy="10493903"/>
-          </a:xfrm>
-          <a:prstGeom prst="rect">
-            <a:avLst/>
-          </a:prstGeom>
-          <a:gradFill>
-            <a:gsLst>
-              <a:gs pos="0">
-                <a:srgbClr val="14C5C3"/>
-              </a:gs>
-              <a:gs pos="100000">
-                <a:srgbClr val="4E7AD9"/>
-              </a:gs>
-            </a:gsLst>
-            <a:lin ang="2700000" scaled="0"/>
-          </a:gradFill>
-          <a:ln>
-            <a:noFill/>
-          </a:ln>
-        </p:spPr>
-        <p:txBody>
-          <a:bodyPr spcFirstLastPara="1" wrap="square" lIns="91425" tIns="91425" rIns="91425" bIns="91425" anchor="ctr" anchorCtr="0">
-            <a:noAutofit/>
-          </a:bodyPr>
-          <a:lstStyle/>
-          <a:p>
-            <a:pPr marL="0" lvl="0" indent="0" algn="l" rtl="0">
-              <a:spcBef>
-                <a:spcPts val="0"/>
-              </a:spcBef>
-              <a:spcAft>
-                <a:spcPts val="0"/>
-              </a:spcAft>
-              <a:buNone/>
-            </a:pPr>
-            <a:endParaRPr/>
-          </a:p>
-        </p:txBody>
-      </p:sp>
-      <p:sp>
-        <p:nvSpPr>
-          <p:cNvPr id="221" name="Google Shape;221;p25"/>
-          <p:cNvSpPr txBox="1"/>
-          <p:nvPr/>
-        </p:nvSpPr>
-        <p:spPr>
-          <a:xfrm>
-            <a:off x="8749553" y="1884979"/>
-            <a:ext cx="9538447" cy="3570208"/>
-          </a:xfrm>
-          <a:prstGeom prst="rect">
-            <a:avLst/>
-          </a:prstGeom>
-          <a:noFill/>
-          <a:ln>
-            <a:noFill/>
-          </a:ln>
-        </p:spPr>
-        <p:txBody>
-          <a:bodyPr spcFirstLastPara="1" wrap="square" lIns="0" tIns="0" rIns="0" bIns="0" anchor="t" anchorCtr="0">
-            <a:spAutoFit/>
-          </a:bodyPr>
-          <a:lstStyle/>
-          <a:p>
-            <a:r>
-              <a:rPr lang="es-ES" sz="4800" dirty="0"/>
-              <a:t>Si todo esto que te he dicho te parece interesante te invito que seas parte de esta investigación</a:t>
-            </a:r>
-          </a:p>
-          <a:p>
-            <a:endParaRPr lang="es-ES" sz="2800" dirty="0"/>
-          </a:p>
-          <a:p>
-            <a:r>
-              <a:rPr lang="es-ES" sz="6000" dirty="0" err="1">
-                <a:solidFill>
-                  <a:srgbClr val="0070C0"/>
-                </a:solidFill>
-              </a:rPr>
-              <a:t>MoreCoasts</a:t>
-            </a:r>
-            <a:r>
-              <a:rPr lang="es-ES" sz="6000">
-                <a:solidFill>
-                  <a:srgbClr val="0070C0"/>
-                </a:solidFill>
-              </a:rPr>
-              <a:t> cuida </a:t>
-            </a:r>
-            <a:r>
-              <a:rPr lang="es-ES" sz="6000" dirty="0">
-                <a:solidFill>
-                  <a:srgbClr val="0070C0"/>
-                </a:solidFill>
-              </a:rPr>
-              <a:t>tu playa</a:t>
-            </a:r>
-          </a:p>
-        </p:txBody>
-      </p:sp>
-      <p:pic>
-        <p:nvPicPr>
-          <p:cNvPr id="6" name="Imagen 5"/>
-          <p:cNvPicPr>
-            <a:picLocks noChangeAspect="1"/>
-          </p:cNvPicPr>
-          <p:nvPr/>
-        </p:nvPicPr>
-        <p:blipFill>
-          <a:blip r:embed="rId3" cstate="print">
-            <a:extLst>
-              <a:ext uri="{28A0092B-C50C-407E-A947-70E740481C1C}">
-                <a14:useLocalDpi xmlns:a14="http://schemas.microsoft.com/office/drawing/2010/main" val="0"/>
-              </a:ext>
-            </a:extLst>
-          </a:blip>
-          <a:stretch>
-            <a:fillRect/>
-          </a:stretch>
-        </p:blipFill>
-        <p:spPr>
-          <a:xfrm>
-            <a:off x="914400" y="4207475"/>
-            <a:ext cx="1834307" cy="1872050"/>
-          </a:xfrm>
-          <a:prstGeom prst="rect">
-            <a:avLst/>
-          </a:prstGeom>
-        </p:spPr>
-      </p:pic>
-      <p:sp>
-        <p:nvSpPr>
-          <p:cNvPr id="7" name="Google Shape;88;p13"/>
-          <p:cNvSpPr txBox="1"/>
-          <p:nvPr/>
-        </p:nvSpPr>
-        <p:spPr>
-          <a:xfrm>
-            <a:off x="-2320422" y="4681835"/>
-            <a:ext cx="9712800" cy="923330"/>
-          </a:xfrm>
-          <a:prstGeom prst="rect">
-            <a:avLst/>
-          </a:prstGeom>
-          <a:noFill/>
-          <a:ln>
-            <a:noFill/>
-          </a:ln>
-        </p:spPr>
-        <p:txBody>
-          <a:bodyPr spcFirstLastPara="1" wrap="square" lIns="0" tIns="0" rIns="0" bIns="0" anchor="t" anchorCtr="0">
-            <a:spAutoFit/>
-          </a:bodyPr>
-          <a:lstStyle/>
-          <a:p>
-            <a:pPr marL="0" marR="0" lvl="0" indent="0" algn="r" rtl="0">
-              <a:lnSpc>
-                <a:spcPct val="100000"/>
-              </a:lnSpc>
-              <a:spcBef>
-                <a:spcPts val="0"/>
-              </a:spcBef>
-              <a:spcAft>
-                <a:spcPts val="0"/>
-              </a:spcAft>
-              <a:buNone/>
-            </a:pPr>
-            <a:r>
-              <a:rPr lang="es-ES" sz="6000" b="1" i="0" u="none" strike="noStrike" cap="none" dirty="0" err="1">
-                <a:solidFill>
-                  <a:srgbClr val="FFFFFF"/>
-                </a:solidFill>
-                <a:latin typeface="Poppins"/>
-                <a:ea typeface="Poppins"/>
-                <a:cs typeface="Poppins"/>
-                <a:sym typeface="Poppins"/>
-              </a:rPr>
-              <a:t>MoreCoast</a:t>
-            </a:r>
-            <a:endParaRPr sz="800" dirty="0"/>
-          </a:p>
-        </p:txBody>
-      </p:sp>
-    </p:spTree>
-    <p:extLst>
-      <p:ext uri="{BB962C8B-B14F-4D97-AF65-F5344CB8AC3E}">
-        <p14:creationId xmlns:p14="http://schemas.microsoft.com/office/powerpoint/2010/main" val="3689913601"/>
-      </p:ext>
-    </p:extLst>
-  </p:cSld>
-  <p:clrMapOvr>
-    <a:masterClrMapping/>
-  </p:clrMapOvr>
-</p:sld>
-</file>
-
 <file path=ppt/slides/slide2.xml><?xml version="1.0" encoding="utf-8"?>
 <p:sld xmlns:a="http://schemas.openxmlformats.org/drawingml/2006/main" xmlns:r="http://schemas.openxmlformats.org/officeDocument/2006/relationships" xmlns:p="http://schemas.openxmlformats.org/presentationml/2006/main">
   <p:cSld>
@@ -8695,7 +8363,7 @@
         </p:nvSpPr>
         <p:spPr>
           <a:xfrm>
-            <a:off x="10617674" y="1028700"/>
+            <a:off x="5463783" y="0"/>
             <a:ext cx="7670326" cy="2424691"/>
           </a:xfrm>
           <a:prstGeom prst="rect">
@@ -8743,8 +8411,8 @@
         </p:nvSpPr>
         <p:spPr>
           <a:xfrm>
-            <a:off x="11499833" y="1633034"/>
-            <a:ext cx="5906009" cy="1354089"/>
+            <a:off x="5904862" y="535300"/>
+            <a:ext cx="6788168" cy="1354089"/>
           </a:xfrm>
           <a:prstGeom prst="rect">
             <a:avLst/>
@@ -8773,7 +8441,7 @@
               <a:buNone/>
             </a:pPr>
             <a:r>
-              <a:rPr lang="en-US" sz="7999" b="1" i="0" u="none" strike="noStrike" cap="none" dirty="0">
+              <a:rPr lang="en-US" sz="7999" b="1" i="0" u="none" strike="noStrike" cap="none" dirty="0" err="1">
                 <a:solidFill>
                   <a:srgbClr val="FFFFFF"/>
                 </a:solidFill>
@@ -8782,7 +8450,7 @@
                 <a:cs typeface="Poppins"/>
                 <a:sym typeface="Poppins"/>
               </a:rPr>
-              <a:t>Solución</a:t>
+              <a:t>Resultados</a:t>
             </a:r>
             <a:endParaRPr dirty="0"/>
           </a:p>
@@ -8796,8 +8464,8 @@
         </p:nvSpPr>
         <p:spPr>
           <a:xfrm>
-            <a:off x="10861530" y="3901935"/>
-            <a:ext cx="7182614" cy="4431983"/>
+            <a:off x="1243227" y="2420624"/>
+            <a:ext cx="16712263" cy="2462213"/>
           </a:xfrm>
           <a:prstGeom prst="rect">
             <a:avLst/>
@@ -8813,47 +8481,62 @@
           </a:bodyPr>
           <a:lstStyle/>
           <a:p>
+            <a:pPr marL="571500" indent="-571500">
+              <a:buFontTx/>
+              <a:buChar char="-"/>
+            </a:pPr>
             <a:r>
-              <a:rPr lang="es-ES" sz="4800" dirty="0"/>
-              <a:t>Para ello hemos desarrollado una aplicación de escritorio que permite calcular, almacenar y buscar datos de forma efectiva. </a:t>
+              <a:rPr lang="es-ES" sz="4000" dirty="0"/>
+              <a:t>Modelación de las interfaces y presentación al cliente</a:t>
             </a:r>
+          </a:p>
+          <a:p>
+            <a:pPr marL="685800" indent="-685800">
+              <a:buFontTx/>
+              <a:buChar char="-"/>
+            </a:pPr>
+            <a:r>
+              <a:rPr lang="es-ES" sz="4000" dirty="0"/>
+              <a:t>Desarrollo del </a:t>
+            </a:r>
+            <a:r>
+              <a:rPr lang="es-ES" sz="4000" dirty="0" err="1"/>
+              <a:t>backend</a:t>
+            </a:r>
+            <a:r>
+              <a:rPr lang="es-ES" sz="4000" dirty="0"/>
+              <a:t> y su compatibilidad con la plantilla</a:t>
+            </a:r>
+          </a:p>
+          <a:p>
+            <a:pPr marL="685800" indent="-685800">
+              <a:buFontTx/>
+              <a:buChar char="-"/>
+            </a:pPr>
+            <a:r>
+              <a:rPr lang="es-ES" sz="4000" dirty="0"/>
+              <a:t>Dominio de la plantilla y sus componentes</a:t>
+            </a:r>
+          </a:p>
+          <a:p>
+            <a:pPr marL="685800" indent="-685800">
+              <a:buFontTx/>
+              <a:buChar char="-"/>
+            </a:pPr>
+            <a:r>
+              <a:rPr lang="es-ES" sz="4000" dirty="0"/>
+              <a:t>Se a desarrollado la historia de usuario a un 50% </a:t>
+            </a:r>
+            <a:endParaRPr lang="es-ES" sz="4800" dirty="0"/>
           </a:p>
         </p:txBody>
       </p:sp>
-      <p:pic>
-        <p:nvPicPr>
-          <p:cNvPr id="11" name="Imagen 10"/>
-          <p:cNvPicPr/>
-          <p:nvPr/>
-        </p:nvPicPr>
-        <p:blipFill>
-          <a:blip r:embed="rId3" cstate="print">
-            <a:extLst>
-              <a:ext uri="{28A0092B-C50C-407E-A947-70E740481C1C}">
-                <a14:useLocalDpi xmlns:a14="http://schemas.microsoft.com/office/drawing/2010/main" val="0"/>
-              </a:ext>
-            </a:extLst>
-          </a:blip>
-          <a:srcRect/>
-          <a:stretch>
-            <a:fillRect/>
-          </a:stretch>
-        </p:blipFill>
-        <p:spPr bwMode="auto">
-          <a:xfrm>
-            <a:off x="143436" y="1633034"/>
-            <a:ext cx="10273553" cy="6560412"/>
-          </a:xfrm>
-          <a:prstGeom prst="rect">
-            <a:avLst/>
-          </a:prstGeom>
-          <a:noFill/>
-          <a:ln>
-            <a:noFill/>
-          </a:ln>
-        </p:spPr>
-      </p:pic>
     </p:spTree>
+    <p:extLst>
+      <p:ext uri="{BB962C8B-B14F-4D97-AF65-F5344CB8AC3E}">
+        <p14:creationId xmlns:p14="http://schemas.microsoft.com/office/powerpoint/2010/main" val="1544977281"/>
+      </p:ext>
+    </p:extLst>
   </p:cSld>
   <p:clrMapOvr>
     <a:masterClrMapping/>
@@ -8934,276 +8617,6 @@
         </p:nvSpPr>
         <p:spPr>
           <a:xfrm>
-            <a:off x="5463783" y="0"/>
-            <a:ext cx="7670326" cy="2424691"/>
-          </a:xfrm>
-          <a:prstGeom prst="rect">
-            <a:avLst/>
-          </a:prstGeom>
-          <a:gradFill>
-            <a:gsLst>
-              <a:gs pos="0">
-                <a:srgbClr val="14C5C3"/>
-              </a:gs>
-              <a:gs pos="100000">
-                <a:srgbClr val="4E7AD9"/>
-              </a:gs>
-            </a:gsLst>
-            <a:lin ang="2700000" scaled="0"/>
-          </a:gradFill>
-          <a:ln>
-            <a:noFill/>
-          </a:ln>
-        </p:spPr>
-        <p:txBody>
-          <a:bodyPr spcFirstLastPara="1" wrap="square" lIns="91425" tIns="91425" rIns="91425" bIns="91425" anchor="ctr" anchorCtr="0">
-            <a:noAutofit/>
-          </a:bodyPr>
-          <a:lstStyle/>
-          <a:p>
-            <a:pPr marL="0" lvl="0" indent="0" algn="l" rtl="0">
-              <a:spcBef>
-                <a:spcPts val="0"/>
-              </a:spcBef>
-              <a:spcAft>
-                <a:spcPts val="0"/>
-              </a:spcAft>
-              <a:buNone/>
-            </a:pPr>
-            <a:endParaRPr/>
-          </a:p>
-        </p:txBody>
-      </p:sp>
-      <p:sp>
-        <p:nvSpPr>
-          <p:cNvPr id="152" name="Google Shape;152;p19"/>
-          <p:cNvSpPr txBox="1"/>
-          <p:nvPr/>
-        </p:nvSpPr>
-        <p:spPr>
-          <a:xfrm>
-            <a:off x="5904862" y="535300"/>
-            <a:ext cx="6788168" cy="1354089"/>
-          </a:xfrm>
-          <a:prstGeom prst="rect">
-            <a:avLst/>
-          </a:prstGeom>
-          <a:noFill/>
-          <a:ln>
-            <a:noFill/>
-          </a:ln>
-        </p:spPr>
-        <p:txBody>
-          <a:bodyPr spcFirstLastPara="1" wrap="square" lIns="0" tIns="0" rIns="0" bIns="0" anchor="t" anchorCtr="0">
-            <a:spAutoFit/>
-          </a:bodyPr>
-          <a:lstStyle/>
-          <a:p>
-            <a:pPr marL="0" marR="0" lvl="0" indent="0" algn="ctr" rtl="0">
-              <a:lnSpc>
-                <a:spcPct val="110001"/>
-              </a:lnSpc>
-              <a:spcBef>
-                <a:spcPts val="0"/>
-              </a:spcBef>
-              <a:spcAft>
-                <a:spcPts val="0"/>
-              </a:spcAft>
-              <a:buNone/>
-            </a:pPr>
-            <a:r>
-              <a:rPr lang="en-US" sz="7999" b="1" i="0" u="none" strike="noStrike" cap="none" dirty="0" err="1">
-                <a:solidFill>
-                  <a:srgbClr val="FFFFFF"/>
-                </a:solidFill>
-                <a:latin typeface="Poppins"/>
-                <a:ea typeface="Poppins"/>
-                <a:cs typeface="Poppins"/>
-                <a:sym typeface="Poppins"/>
-              </a:rPr>
-              <a:t>Resultados</a:t>
-            </a:r>
-            <a:endParaRPr dirty="0"/>
-          </a:p>
-        </p:txBody>
-      </p:sp>
-      <p:sp>
-        <p:nvSpPr>
-          <p:cNvPr id="153" name="Google Shape;153;p19"/>
-          <p:cNvSpPr txBox="1"/>
-          <p:nvPr/>
-        </p:nvSpPr>
-        <p:spPr>
-          <a:xfrm>
-            <a:off x="1243227" y="2420624"/>
-            <a:ext cx="16712263" cy="8125301"/>
-          </a:xfrm>
-          <a:prstGeom prst="rect">
-            <a:avLst/>
-          </a:prstGeom>
-          <a:noFill/>
-          <a:ln>
-            <a:noFill/>
-          </a:ln>
-        </p:spPr>
-        <p:txBody>
-          <a:bodyPr spcFirstLastPara="1" wrap="square" lIns="0" tIns="0" rIns="0" bIns="0" anchor="t" anchorCtr="0">
-            <a:spAutoFit/>
-          </a:bodyPr>
-          <a:lstStyle/>
-          <a:p>
-            <a:r>
-              <a:rPr lang="es-ES" sz="4000" dirty="0"/>
-              <a:t>-Desarrollo de la tesis desde la introducción hasta el capítulo 1. Venciendo el estado del arte, herramientas y lenguajes, metodología empleada y arquitectura de microservicio.</a:t>
-            </a:r>
-          </a:p>
-          <a:p>
-            <a:pPr marL="685800" indent="-685800">
-              <a:buFontTx/>
-              <a:buChar char="-"/>
-            </a:pPr>
-            <a:r>
-              <a:rPr lang="es-ES" sz="4000" dirty="0"/>
-              <a:t>En cuanto a la aplicación web he aprendido a usar los </a:t>
-            </a:r>
-            <a:r>
-              <a:rPr lang="es-ES" sz="4000" dirty="0" err="1"/>
-              <a:t>useState</a:t>
-            </a:r>
-            <a:r>
-              <a:rPr lang="es-ES" sz="4000" dirty="0"/>
-              <a:t> para obtener los datos de los inputs.</a:t>
-            </a:r>
-          </a:p>
-          <a:p>
-            <a:pPr marL="685800" indent="-685800">
-              <a:buFontTx/>
-              <a:buChar char="-"/>
-            </a:pPr>
-            <a:r>
-              <a:rPr lang="es-ES" sz="4000" dirty="0"/>
-              <a:t>Desarrolle las consultas de crear, eliminar editar en la base datos comprobando por consola que compilaba y se visualizan los cambios en Mongo Compass</a:t>
-            </a:r>
-          </a:p>
-          <a:p>
-            <a:pPr marL="685800" indent="-685800">
-              <a:buFontTx/>
-              <a:buChar char="-"/>
-            </a:pPr>
-            <a:r>
-              <a:rPr lang="es-ES" sz="4000" dirty="0"/>
-              <a:t>Desarrolle los prototipos de interfaces</a:t>
-            </a:r>
-          </a:p>
-          <a:p>
-            <a:pPr marL="685800" indent="-685800">
-              <a:buFontTx/>
-              <a:buChar char="-"/>
-            </a:pPr>
-            <a:r>
-              <a:rPr lang="es-ES" sz="4000" dirty="0"/>
-              <a:t>Inicie la codificación de una de las historias de usuario(Cálculo), los datos entrados pueden ser calculados y se muestra con </a:t>
-            </a:r>
-            <a:r>
-              <a:rPr lang="es-ES" sz="4000" dirty="0" err="1"/>
-              <a:t>alert</a:t>
-            </a:r>
-            <a:r>
-              <a:rPr lang="es-ES" sz="4000" dirty="0"/>
-              <a:t> (Inicialmente)</a:t>
-            </a:r>
-          </a:p>
-          <a:p>
-            <a:endParaRPr lang="es-ES" sz="4800" dirty="0"/>
-          </a:p>
-        </p:txBody>
-      </p:sp>
-    </p:spTree>
-    <p:extLst>
-      <p:ext uri="{BB962C8B-B14F-4D97-AF65-F5344CB8AC3E}">
-        <p14:creationId xmlns:p14="http://schemas.microsoft.com/office/powerpoint/2010/main" val="1544977281"/>
-      </p:ext>
-    </p:extLst>
-  </p:cSld>
-  <p:clrMapOvr>
-    <a:masterClrMapping/>
-  </p:clrMapOvr>
-</p:sld>
-</file>
-
-<file path=ppt/slides/slide7.xml><?xml version="1.0" encoding="utf-8"?>
-<p:sld xmlns:a="http://schemas.openxmlformats.org/drawingml/2006/main" xmlns:r="http://schemas.openxmlformats.org/officeDocument/2006/relationships" xmlns:p="http://schemas.openxmlformats.org/presentationml/2006/main">
-  <p:cSld>
-    <p:spTree>
-      <p:nvGrpSpPr>
-        <p:cNvPr id="1" name="Shape 149"/>
-        <p:cNvGrpSpPr/>
-        <p:nvPr/>
-      </p:nvGrpSpPr>
-      <p:grpSpPr>
-        <a:xfrm>
-          <a:off x="0" y="0"/>
-          <a:ext cx="0" cy="0"/>
-          <a:chOff x="0" y="0"/>
-          <a:chExt cx="0" cy="0"/>
-        </a:xfrm>
-      </p:grpSpPr>
-      <p:sp>
-        <p:nvSpPr>
-          <p:cNvPr id="150" name="Google Shape;150;p19"/>
-          <p:cNvSpPr/>
-          <p:nvPr/>
-        </p:nvSpPr>
-        <p:spPr>
-          <a:xfrm>
-            <a:off x="0" y="0"/>
-            <a:ext cx="1028700" cy="10287000"/>
-          </a:xfrm>
-          <a:prstGeom prst="rect">
-            <a:avLst/>
-          </a:prstGeom>
-          <a:gradFill>
-            <a:gsLst>
-              <a:gs pos="0">
-                <a:srgbClr val="14C5C3"/>
-              </a:gs>
-              <a:gs pos="100000">
-                <a:srgbClr val="4E7AD9"/>
-              </a:gs>
-            </a:gsLst>
-            <a:lin ang="2700000" scaled="0"/>
-          </a:gradFill>
-          <a:ln>
-            <a:noFill/>
-          </a:ln>
-        </p:spPr>
-        <p:txBody>
-          <a:bodyPr spcFirstLastPara="1" wrap="square" lIns="91425" tIns="91425" rIns="91425" bIns="91425" anchor="ctr" anchorCtr="0">
-            <a:noAutofit/>
-          </a:bodyPr>
-          <a:lstStyle/>
-          <a:p>
-            <a:pPr marL="0" lvl="0" indent="0" algn="l" rtl="0">
-              <a:spcBef>
-                <a:spcPts val="0"/>
-              </a:spcBef>
-              <a:spcAft>
-                <a:spcPts val="0"/>
-              </a:spcAft>
-              <a:buNone/>
-            </a:pPr>
-            <a:endParaRPr/>
-          </a:p>
-        </p:txBody>
-      </p:sp>
-      <p:sp>
-        <p:nvSpPr>
-          <p:cNvPr id="151" name="Google Shape;151;p19"/>
-          <p:cNvSpPr/>
-          <p:nvPr/>
-        </p:nvSpPr>
-        <p:spPr>
-          <a:xfrm>
             <a:off x="2057400" y="0"/>
             <a:ext cx="15524018" cy="2424691"/>
           </a:xfrm>
@@ -9252,7 +8665,7 @@
         </p:nvSpPr>
         <p:spPr>
           <a:xfrm>
-            <a:off x="2524991" y="533268"/>
+            <a:off x="2524991" y="535300"/>
             <a:ext cx="14588836" cy="1354089"/>
           </a:xfrm>
           <a:prstGeom prst="rect">
@@ -9269,30 +8682,11 @@
           </a:bodyPr>
           <a:lstStyle/>
           <a:p>
-            <a:pPr marL="0" marR="0" lvl="0" indent="0" algn="ctr" rtl="0">
+            <a:pPr lvl="0" algn="ctr">
               <a:lnSpc>
                 <a:spcPct val="110001"/>
               </a:lnSpc>
-              <a:spcBef>
-                <a:spcPts val="0"/>
-              </a:spcBef>
-              <a:spcAft>
-                <a:spcPts val="0"/>
-              </a:spcAft>
-              <a:buNone/>
             </a:pPr>
-            <a:r>
-              <a:rPr lang="en-US" sz="7999" b="1" i="0" u="none" strike="noStrike" cap="none" dirty="0" err="1">
-                <a:solidFill>
-                  <a:srgbClr val="FFFFFF"/>
-                </a:solidFill>
-                <a:latin typeface="Poppins"/>
-                <a:ea typeface="Poppins"/>
-                <a:cs typeface="Poppins"/>
-                <a:sym typeface="Poppins"/>
-              </a:rPr>
-              <a:t>Problemas</a:t>
-            </a:r>
             <a:r>
               <a:rPr lang="en-US" sz="7999" b="1" i="0" u="none" strike="noStrike" cap="none" dirty="0">
                 <a:solidFill>
@@ -9303,7 +8697,7 @@
                 <a:cs typeface="Poppins"/>
                 <a:sym typeface="Poppins"/>
               </a:rPr>
-              <a:t> y </a:t>
+              <a:t>Plan de </a:t>
             </a:r>
             <a:r>
               <a:rPr lang="en-US" sz="7999" b="1" i="0" u="none" strike="noStrike" cap="none" dirty="0" err="1">
@@ -9315,18 +8709,18 @@
                 <a:cs typeface="Poppins"/>
                 <a:sym typeface="Poppins"/>
               </a:rPr>
-              <a:t>Dificultades</a:t>
+              <a:t>Tareas</a:t>
             </a:r>
-            <a:endParaRPr dirty="0"/>
+            <a:endParaRPr lang="en-US" dirty="0"/>
           </a:p>
         </p:txBody>
       </p:sp>
       <p:sp>
         <p:nvSpPr>
-          <p:cNvPr id="6" name="CuadroTexto 5">
+          <p:cNvPr id="7" name="CuadroTexto 6">
             <a:extLst>
               <a:ext uri="{FF2B5EF4-FFF2-40B4-BE49-F238E27FC236}">
-                <a16:creationId xmlns:a16="http://schemas.microsoft.com/office/drawing/2014/main" id="{E5EC443C-5EB2-4D88-8DEB-673A9F86EDE2}"/>
+                <a16:creationId xmlns:a16="http://schemas.microsoft.com/office/drawing/2014/main" id="{C1159779-AFDD-4671-88BD-A628DC900C30}"/>
               </a:ext>
             </a:extLst>
           </p:cNvPr>
@@ -9335,8 +8729,8 @@
         </p:nvSpPr>
         <p:spPr>
           <a:xfrm>
-            <a:off x="1028700" y="2420625"/>
-            <a:ext cx="17259299" cy="8710077"/>
+            <a:off x="1205345" y="2635121"/>
+            <a:ext cx="16376073" cy="3785652"/>
           </a:xfrm>
           <a:prstGeom prst="rect">
             <a:avLst/>
@@ -9351,15 +8745,7 @@
           <a:p>
             <a:r>
               <a:rPr lang="es-ES" sz="4000" dirty="0"/>
-              <a:t>- </a:t>
-            </a:r>
-            <a:r>
-              <a:rPr lang="es-ES" sz="4000" dirty="0" err="1"/>
-              <a:t>React</a:t>
-            </a:r>
-            <a:r>
-              <a:rPr lang="es-ES" sz="4000" dirty="0"/>
-              <a:t> tiene una Curva de Aprendizaje Alto</a:t>
+              <a:t>Orden de las Acciones y Prioridades:</a:t>
             </a:r>
           </a:p>
           <a:p>
@@ -9369,67 +8755,52 @@
             </a:pPr>
             <a:r>
               <a:rPr lang="es-ES" sz="4000" dirty="0"/>
-              <a:t>Necesito saber los roles de como se comporta el flujo de trabajo:</a:t>
+              <a:t>Desarrollar la Historia De Usuario: Calculo</a:t>
             </a:r>
           </a:p>
           <a:p>
             <a:pPr marL="571500" indent="-571500">
-              <a:buFont typeface="Wingdings" panose="05000000000000000000" pitchFamily="2" charset="2"/>
-              <a:buChar char="Ø"/>
+              <a:buFontTx/>
+              <a:buChar char="-"/>
             </a:pPr>
             <a:r>
               <a:rPr lang="es-ES" sz="4000" dirty="0"/>
-              <a:t>Quién hace los cálculos</a:t>
+              <a:t>Desarrollar la Historia de Usuario: Usuarios</a:t>
             </a:r>
           </a:p>
           <a:p>
             <a:pPr marL="571500" indent="-571500">
-              <a:buFont typeface="Wingdings" panose="05000000000000000000" pitchFamily="2" charset="2"/>
-              <a:buChar char="Ø"/>
+              <a:buFontTx/>
+              <a:buChar char="-"/>
             </a:pPr>
             <a:r>
               <a:rPr lang="es-ES" sz="4000" dirty="0"/>
-              <a:t>Quién controla los cálculos o el trabajo realizado</a:t>
+              <a:t>Desarrollar la Historia de Usuario: Inicio y las Trazas del Sistema</a:t>
             </a:r>
           </a:p>
           <a:p>
             <a:pPr marL="571500" indent="-571500">
-              <a:buFont typeface="Wingdings" panose="05000000000000000000" pitchFamily="2" charset="2"/>
-              <a:buChar char="Ø"/>
+              <a:buFontTx/>
+              <a:buChar char="-"/>
             </a:pPr>
             <a:r>
               <a:rPr lang="es-ES" sz="4000" dirty="0"/>
-              <a:t>Cómo se recogen los datos en el terreno</a:t>
+              <a:t>Desarrollar la </a:t>
+            </a:r>
+            <a:r>
+              <a:rPr lang="es-ES" sz="4000" dirty="0" err="1"/>
+              <a:t>Busqueda</a:t>
+            </a:r>
+            <a:r>
+              <a:rPr lang="es-ES" sz="4000" dirty="0"/>
+              <a:t> Avanzada y las Salvas</a:t>
             </a:r>
           </a:p>
           <a:p>
-            <a:r>
-              <a:rPr lang="es-ES" sz="4000" dirty="0"/>
-              <a:t>-Cómo son los modelos donde se recogen los cálculos</a:t>
-            </a:r>
-          </a:p>
-          <a:p>
-            <a:r>
-              <a:rPr lang="es-ES" sz="4000" dirty="0"/>
-              <a:t>-No me queda claro aún como se refleja en la base de datos las alturas y los ángulos</a:t>
-            </a:r>
-          </a:p>
-          <a:p>
-            <a:r>
-              <a:rPr lang="es-ES" sz="4000" dirty="0"/>
-              <a:t>-Necesito más detalles de como se realiza el proceso de cálculo de transporte de los  sedimentos (Descripción del negocio)</a:t>
-            </a:r>
-          </a:p>
-          <a:p>
-            <a:endParaRPr lang="es-ES" sz="4000" dirty="0"/>
-          </a:p>
-          <a:p>
-            <a:r>
-              <a:rPr lang="es-ES" sz="4000" dirty="0"/>
-              <a:t>-NO TENGO COMPUTADORA PERSONAL DEPENDO DE OTRAS PERSONAS </a:t>
-            </a:r>
-          </a:p>
-          <a:p>
+            <a:pPr marL="571500" indent="-571500">
+              <a:buFontTx/>
+              <a:buChar char="-"/>
+            </a:pPr>
             <a:endParaRPr lang="es-ES" sz="4000" dirty="0"/>
           </a:p>
         </p:txBody>
@@ -9447,7 +8818,7 @@
 </p:sld>
 </file>
 
-<file path=ppt/slides/slide8.xml><?xml version="1.0" encoding="utf-8"?>
+<file path=ppt/slides/slide7.xml><?xml version="1.0" encoding="utf-8"?>
 <p:sld xmlns:a="http://schemas.openxmlformats.org/drawingml/2006/main" xmlns:r="http://schemas.openxmlformats.org/officeDocument/2006/relationships" xmlns:p="http://schemas.openxmlformats.org/presentationml/2006/main">
   <p:cSld>
     <p:spTree>
@@ -9746,7 +9117,7 @@
 </p:sld>
 </file>
 
-<file path=ppt/slides/slide9.xml><?xml version="1.0" encoding="utf-8"?>
+<file path=ppt/slides/slide8.xml><?xml version="1.0" encoding="utf-8"?>
 <p:sld xmlns:a="http://schemas.openxmlformats.org/drawingml/2006/main" xmlns:r="http://schemas.openxmlformats.org/officeDocument/2006/relationships" xmlns:p="http://schemas.openxmlformats.org/presentationml/2006/main">
   <p:cSld>
     <p:spTree>
@@ -9987,6 +9358,228 @@
     <p:extLst>
       <p:ext uri="{BB962C8B-B14F-4D97-AF65-F5344CB8AC3E}">
         <p14:creationId xmlns:p14="http://schemas.microsoft.com/office/powerpoint/2010/main" val="220410271"/>
+      </p:ext>
+    </p:extLst>
+  </p:cSld>
+  <p:clrMapOvr>
+    <a:masterClrMapping/>
+  </p:clrMapOvr>
+</p:sld>
+</file>
+
+<file path=ppt/slides/slide9.xml><?xml version="1.0" encoding="utf-8"?>
+<p:sld xmlns:a="http://schemas.openxmlformats.org/drawingml/2006/main" xmlns:r="http://schemas.openxmlformats.org/officeDocument/2006/relationships" xmlns:p="http://schemas.openxmlformats.org/presentationml/2006/main">
+  <p:cSld>
+    <p:spTree>
+      <p:nvGrpSpPr>
+        <p:cNvPr id="1" name="Shape 217"/>
+        <p:cNvGrpSpPr/>
+        <p:nvPr/>
+      </p:nvGrpSpPr>
+      <p:grpSpPr>
+        <a:xfrm>
+          <a:off x="0" y="0"/>
+          <a:ext cx="0" cy="0"/>
+          <a:chOff x="0" y="0"/>
+          <a:chExt cx="0" cy="0"/>
+        </a:xfrm>
+      </p:grpSpPr>
+      <p:sp>
+        <p:nvSpPr>
+          <p:cNvPr id="218" name="Google Shape;218;p25"/>
+          <p:cNvSpPr/>
+          <p:nvPr/>
+        </p:nvSpPr>
+        <p:spPr>
+          <a:xfrm>
+            <a:off x="0" y="-103451"/>
+            <a:ext cx="8529633" cy="10493903"/>
+          </a:xfrm>
+          <a:prstGeom prst="rect">
+            <a:avLst/>
+          </a:prstGeom>
+          <a:gradFill>
+            <a:gsLst>
+              <a:gs pos="0">
+                <a:srgbClr val="14C5C3"/>
+              </a:gs>
+              <a:gs pos="100000">
+                <a:srgbClr val="4E7AD9"/>
+              </a:gs>
+            </a:gsLst>
+            <a:lin ang="2700000" scaled="0"/>
+          </a:gradFill>
+          <a:ln>
+            <a:noFill/>
+          </a:ln>
+        </p:spPr>
+        <p:txBody>
+          <a:bodyPr spcFirstLastPara="1" wrap="square" lIns="91425" tIns="91425" rIns="91425" bIns="91425" anchor="ctr" anchorCtr="0">
+            <a:noAutofit/>
+          </a:bodyPr>
+          <a:lstStyle/>
+          <a:p>
+            <a:pPr marL="0" lvl="0" indent="0" algn="l" rtl="0">
+              <a:spcBef>
+                <a:spcPts val="0"/>
+              </a:spcBef>
+              <a:spcAft>
+                <a:spcPts val="0"/>
+              </a:spcAft>
+              <a:buNone/>
+            </a:pPr>
+            <a:endParaRPr/>
+          </a:p>
+        </p:txBody>
+      </p:sp>
+      <p:sp>
+        <p:nvSpPr>
+          <p:cNvPr id="221" name="Google Shape;221;p25"/>
+          <p:cNvSpPr txBox="1"/>
+          <p:nvPr/>
+        </p:nvSpPr>
+        <p:spPr>
+          <a:xfrm>
+            <a:off x="8749553" y="1884979"/>
+            <a:ext cx="9538447" cy="3570208"/>
+          </a:xfrm>
+          <a:prstGeom prst="rect">
+            <a:avLst/>
+          </a:prstGeom>
+          <a:noFill/>
+          <a:ln>
+            <a:noFill/>
+          </a:ln>
+        </p:spPr>
+        <p:txBody>
+          <a:bodyPr spcFirstLastPara="1" wrap="square" lIns="0" tIns="0" rIns="0" bIns="0" anchor="t" anchorCtr="0">
+            <a:spAutoFit/>
+          </a:bodyPr>
+          <a:lstStyle/>
+          <a:p>
+            <a:r>
+              <a:rPr lang="es-ES" sz="4800" dirty="0"/>
+              <a:t>Si todo esto que te he dicho te parece interesante te invito que seas parte de esta investigación</a:t>
+            </a:r>
+          </a:p>
+          <a:p>
+            <a:endParaRPr lang="es-ES" sz="2800" dirty="0"/>
+          </a:p>
+          <a:p>
+            <a:r>
+              <a:rPr lang="es-ES" sz="6000" dirty="0" err="1">
+                <a:solidFill>
+                  <a:srgbClr val="0070C0"/>
+                </a:solidFill>
+              </a:rPr>
+              <a:t>MoreCoasts</a:t>
+            </a:r>
+            <a:r>
+              <a:rPr lang="es-ES" sz="6000">
+                <a:solidFill>
+                  <a:srgbClr val="0070C0"/>
+                </a:solidFill>
+              </a:rPr>
+              <a:t> cuida </a:t>
+            </a:r>
+            <a:r>
+              <a:rPr lang="es-ES" sz="6000" dirty="0">
+                <a:solidFill>
+                  <a:srgbClr val="0070C0"/>
+                </a:solidFill>
+              </a:rPr>
+              <a:t>tu playa</a:t>
+            </a:r>
+          </a:p>
+        </p:txBody>
+      </p:sp>
+      <p:pic>
+        <p:nvPicPr>
+          <p:cNvPr id="6" name="Imagen 5"/>
+          <p:cNvPicPr>
+            <a:picLocks noChangeAspect="1"/>
+          </p:cNvPicPr>
+          <p:nvPr/>
+        </p:nvPicPr>
+        <p:blipFill>
+          <a:blip r:embed="rId3" cstate="print">
+            <a:extLst>
+              <a:ext uri="{28A0092B-C50C-407E-A947-70E740481C1C}">
+                <a14:useLocalDpi xmlns:a14="http://schemas.microsoft.com/office/drawing/2010/main" val="0"/>
+              </a:ext>
+            </a:extLst>
+          </a:blip>
+          <a:stretch>
+            <a:fillRect/>
+          </a:stretch>
+        </p:blipFill>
+        <p:spPr>
+          <a:xfrm>
+            <a:off x="914400" y="4207475"/>
+            <a:ext cx="1834307" cy="1872050"/>
+          </a:xfrm>
+          <a:prstGeom prst="rect">
+            <a:avLst/>
+          </a:prstGeom>
+        </p:spPr>
+      </p:pic>
+      <p:sp>
+        <p:nvSpPr>
+          <p:cNvPr id="7" name="Google Shape;88;p13"/>
+          <p:cNvSpPr txBox="1"/>
+          <p:nvPr/>
+        </p:nvSpPr>
+        <p:spPr>
+          <a:xfrm>
+            <a:off x="-2320422" y="4681835"/>
+            <a:ext cx="9712800" cy="923330"/>
+          </a:xfrm>
+          <a:prstGeom prst="rect">
+            <a:avLst/>
+          </a:prstGeom>
+          <a:noFill/>
+          <a:ln>
+            <a:noFill/>
+          </a:ln>
+        </p:spPr>
+        <p:txBody>
+          <a:bodyPr spcFirstLastPara="1" wrap="square" lIns="0" tIns="0" rIns="0" bIns="0" anchor="t" anchorCtr="0">
+            <a:spAutoFit/>
+          </a:bodyPr>
+          <a:lstStyle/>
+          <a:p>
+            <a:pPr marL="0" marR="0" lvl="0" indent="0" algn="r" rtl="0">
+              <a:lnSpc>
+                <a:spcPct val="100000"/>
+              </a:lnSpc>
+              <a:spcBef>
+                <a:spcPts val="0"/>
+              </a:spcBef>
+              <a:spcAft>
+                <a:spcPts val="0"/>
+              </a:spcAft>
+              <a:buNone/>
+            </a:pPr>
+            <a:r>
+              <a:rPr lang="es-ES" sz="6000" b="1" i="0" u="none" strike="noStrike" cap="none" dirty="0" err="1">
+                <a:solidFill>
+                  <a:srgbClr val="FFFFFF"/>
+                </a:solidFill>
+                <a:latin typeface="Poppins"/>
+                <a:ea typeface="Poppins"/>
+                <a:cs typeface="Poppins"/>
+                <a:sym typeface="Poppins"/>
+              </a:rPr>
+              <a:t>MoreCoast</a:t>
+            </a:r>
+            <a:endParaRPr sz="800" dirty="0"/>
+          </a:p>
+        </p:txBody>
+      </p:sp>
+    </p:spTree>
+    <p:extLst>
+      <p:ext uri="{BB962C8B-B14F-4D97-AF65-F5344CB8AC3E}">
+        <p14:creationId xmlns:p14="http://schemas.microsoft.com/office/powerpoint/2010/main" val="3689913601"/>
       </p:ext>
     </p:extLst>
   </p:cSld>

--- a/DOC/Elevaton Pitch Septiembre.pptx
+++ b/DOC/Elevaton Pitch Septiembre.pptx
@@ -5,35 +5,40 @@
     <p:sldMasterId id="2147483659" r:id="rId1"/>
   </p:sldMasterIdLst>
   <p:notesMasterIdLst>
-    <p:notesMasterId r:id="rId11"/>
+    <p:notesMasterId r:id="rId9"/>
   </p:notesMasterIdLst>
   <p:sldIdLst>
     <p:sldId id="256" r:id="rId2"/>
-    <p:sldId id="257" r:id="rId3"/>
-    <p:sldId id="272" r:id="rId4"/>
-    <p:sldId id="259" r:id="rId5"/>
-    <p:sldId id="276" r:id="rId6"/>
-    <p:sldId id="278" r:id="rId7"/>
-    <p:sldId id="263" r:id="rId8"/>
-    <p:sldId id="273" r:id="rId9"/>
-    <p:sldId id="274" r:id="rId10"/>
+    <p:sldId id="276" r:id="rId3"/>
+    <p:sldId id="277" r:id="rId4"/>
+    <p:sldId id="278" r:id="rId5"/>
+    <p:sldId id="280" r:id="rId6"/>
+    <p:sldId id="281" r:id="rId7"/>
+    <p:sldId id="274" r:id="rId8"/>
   </p:sldIdLst>
   <p:sldSz cx="18288000" cy="10287000"/>
   <p:notesSz cx="6858000" cy="9144000"/>
   <p:embeddedFontLst>
     <p:embeddedFont>
       <p:font typeface="Calibri" panose="020F0502020204030204" pitchFamily="34" charset="0"/>
-      <p:regular r:id="rId12"/>
-      <p:bold r:id="rId13"/>
-      <p:italic r:id="rId14"/>
-      <p:boldItalic r:id="rId15"/>
+      <p:regular r:id="rId10"/>
+      <p:bold r:id="rId11"/>
+      <p:italic r:id="rId12"/>
+      <p:boldItalic r:id="rId13"/>
+    </p:embeddedFont>
+    <p:embeddedFont>
+      <p:font typeface="Consolas" panose="020B0609020204030204" pitchFamily="49" charset="0"/>
+      <p:regular r:id="rId14"/>
+      <p:bold r:id="rId15"/>
+      <p:italic r:id="rId16"/>
+      <p:boldItalic r:id="rId17"/>
     </p:embeddedFont>
     <p:embeddedFont>
       <p:font typeface="Poppins" panose="020B0502040204020203" pitchFamily="2" charset="0"/>
-      <p:regular r:id="rId16"/>
-      <p:bold r:id="rId17"/>
-      <p:italic r:id="rId18"/>
-      <p:boldItalic r:id="rId19"/>
+      <p:regular r:id="rId18"/>
+      <p:bold r:id="rId19"/>
+      <p:italic r:id="rId20"/>
+      <p:boldItalic r:id="rId21"/>
     </p:embeddedFont>
   </p:embeddedFontLst>
   <p:defaultTextStyle>
@@ -844,333 +849,6 @@
   <p:cSld>
     <p:spTree>
       <p:nvGrpSpPr>
-        <p:cNvPr id="1" name="Shape 90"/>
-        <p:cNvGrpSpPr/>
-        <p:nvPr/>
-      </p:nvGrpSpPr>
-      <p:grpSpPr>
-        <a:xfrm>
-          <a:off x="0" y="0"/>
-          <a:ext cx="0" cy="0"/>
-          <a:chOff x="0" y="0"/>
-          <a:chExt cx="0" cy="0"/>
-        </a:xfrm>
-      </p:grpSpPr>
-      <p:sp>
-        <p:nvSpPr>
-          <p:cNvPr id="91" name="Google Shape;91;p2:notes"/>
-          <p:cNvSpPr txBox="1">
-            <a:spLocks noGrp="1"/>
-          </p:cNvSpPr>
-          <p:nvPr>
-            <p:ph type="body" idx="1"/>
-          </p:nvPr>
-        </p:nvSpPr>
-        <p:spPr>
-          <a:xfrm>
-            <a:off x="685800" y="4343400"/>
-            <a:ext cx="5486400" cy="4114800"/>
-          </a:xfrm>
-          <a:prstGeom prst="rect">
-            <a:avLst/>
-          </a:prstGeom>
-        </p:spPr>
-        <p:txBody>
-          <a:bodyPr spcFirstLastPara="1" wrap="square" lIns="91425" tIns="91425" rIns="91425" bIns="91425" anchor="t" anchorCtr="0">
-            <a:noAutofit/>
-          </a:bodyPr>
-          <a:lstStyle/>
-          <a:p>
-            <a:pPr marL="0" lvl="0" indent="0" algn="l" rtl="0">
-              <a:spcBef>
-                <a:spcPts val="0"/>
-              </a:spcBef>
-              <a:spcAft>
-                <a:spcPts val="0"/>
-              </a:spcAft>
-              <a:buNone/>
-            </a:pPr>
-            <a:endParaRPr/>
-          </a:p>
-        </p:txBody>
-      </p:sp>
-      <p:sp>
-        <p:nvSpPr>
-          <p:cNvPr id="92" name="Google Shape;92;p2:notes"/>
-          <p:cNvSpPr>
-            <a:spLocks noGrp="1" noRot="1" noChangeAspect="1"/>
-          </p:cNvSpPr>
-          <p:nvPr>
-            <p:ph type="sldImg" idx="2"/>
-          </p:nvPr>
-        </p:nvSpPr>
-        <p:spPr>
-          <a:xfrm>
-            <a:off x="381000" y="685800"/>
-            <a:ext cx="6096000" cy="3429000"/>
-          </a:xfrm>
-          <a:custGeom>
-            <a:avLst/>
-            <a:gdLst/>
-            <a:ahLst/>
-            <a:cxnLst/>
-            <a:rect l="l" t="t" r="r" b="b"/>
-            <a:pathLst>
-              <a:path w="120000" h="120000" extrusionOk="0">
-                <a:moveTo>
-                  <a:pt x="0" y="0"/>
-                </a:moveTo>
-                <a:lnTo>
-                  <a:pt x="120000" y="0"/>
-                </a:lnTo>
-                <a:lnTo>
-                  <a:pt x="120000" y="120000"/>
-                </a:lnTo>
-                <a:lnTo>
-                  <a:pt x="0" y="120000"/>
-                </a:lnTo>
-                <a:close/>
-              </a:path>
-            </a:pathLst>
-          </a:custGeom>
-        </p:spPr>
-      </p:sp>
-    </p:spTree>
-    <p:extLst>
-      <p:ext uri="{BB962C8B-B14F-4D97-AF65-F5344CB8AC3E}">
-        <p14:creationId xmlns:p14="http://schemas.microsoft.com/office/powerpoint/2010/main" val="1030664500"/>
-      </p:ext>
-    </p:extLst>
-  </p:cSld>
-  <p:clrMapOvr>
-    <a:masterClrMapping/>
-  </p:clrMapOvr>
-</p:notes>
-</file>
-
-<file path=ppt/notesSlides/notesSlide3.xml><?xml version="1.0" encoding="utf-8"?>
-<p:notes xmlns:a="http://schemas.openxmlformats.org/drawingml/2006/main" xmlns:r="http://schemas.openxmlformats.org/officeDocument/2006/relationships" xmlns:p="http://schemas.openxmlformats.org/presentationml/2006/main" showMasterSp="0" showMasterPhAnim="0">
-  <p:cSld>
-    <p:spTree>
-      <p:nvGrpSpPr>
-        <p:cNvPr id="1" name="Shape 90"/>
-        <p:cNvGrpSpPr/>
-        <p:nvPr/>
-      </p:nvGrpSpPr>
-      <p:grpSpPr>
-        <a:xfrm>
-          <a:off x="0" y="0"/>
-          <a:ext cx="0" cy="0"/>
-          <a:chOff x="0" y="0"/>
-          <a:chExt cx="0" cy="0"/>
-        </a:xfrm>
-      </p:grpSpPr>
-      <p:sp>
-        <p:nvSpPr>
-          <p:cNvPr id="91" name="Google Shape;91;p2:notes"/>
-          <p:cNvSpPr txBox="1">
-            <a:spLocks noGrp="1"/>
-          </p:cNvSpPr>
-          <p:nvPr>
-            <p:ph type="body" idx="1"/>
-          </p:nvPr>
-        </p:nvSpPr>
-        <p:spPr>
-          <a:xfrm>
-            <a:off x="685800" y="4343400"/>
-            <a:ext cx="5486400" cy="4114800"/>
-          </a:xfrm>
-          <a:prstGeom prst="rect">
-            <a:avLst/>
-          </a:prstGeom>
-        </p:spPr>
-        <p:txBody>
-          <a:bodyPr spcFirstLastPara="1" wrap="square" lIns="91425" tIns="91425" rIns="91425" bIns="91425" anchor="t" anchorCtr="0">
-            <a:noAutofit/>
-          </a:bodyPr>
-          <a:lstStyle/>
-          <a:p>
-            <a:pPr marL="0" lvl="0" indent="0" algn="l" rtl="0">
-              <a:spcBef>
-                <a:spcPts val="0"/>
-              </a:spcBef>
-              <a:spcAft>
-                <a:spcPts val="0"/>
-              </a:spcAft>
-              <a:buNone/>
-            </a:pPr>
-            <a:endParaRPr/>
-          </a:p>
-        </p:txBody>
-      </p:sp>
-      <p:sp>
-        <p:nvSpPr>
-          <p:cNvPr id="92" name="Google Shape;92;p2:notes"/>
-          <p:cNvSpPr>
-            <a:spLocks noGrp="1" noRot="1" noChangeAspect="1"/>
-          </p:cNvSpPr>
-          <p:nvPr>
-            <p:ph type="sldImg" idx="2"/>
-          </p:nvPr>
-        </p:nvSpPr>
-        <p:spPr>
-          <a:xfrm>
-            <a:off x="381000" y="685800"/>
-            <a:ext cx="6096000" cy="3429000"/>
-          </a:xfrm>
-          <a:custGeom>
-            <a:avLst/>
-            <a:gdLst/>
-            <a:ahLst/>
-            <a:cxnLst/>
-            <a:rect l="l" t="t" r="r" b="b"/>
-            <a:pathLst>
-              <a:path w="120000" h="120000" extrusionOk="0">
-                <a:moveTo>
-                  <a:pt x="0" y="0"/>
-                </a:moveTo>
-                <a:lnTo>
-                  <a:pt x="120000" y="0"/>
-                </a:lnTo>
-                <a:lnTo>
-                  <a:pt x="120000" y="120000"/>
-                </a:lnTo>
-                <a:lnTo>
-                  <a:pt x="0" y="120000"/>
-                </a:lnTo>
-                <a:close/>
-              </a:path>
-            </a:pathLst>
-          </a:custGeom>
-        </p:spPr>
-      </p:sp>
-    </p:spTree>
-    <p:extLst>
-      <p:ext uri="{BB962C8B-B14F-4D97-AF65-F5344CB8AC3E}">
-        <p14:creationId xmlns:p14="http://schemas.microsoft.com/office/powerpoint/2010/main" val="1739760783"/>
-      </p:ext>
-    </p:extLst>
-  </p:cSld>
-  <p:clrMapOvr>
-    <a:masterClrMapping/>
-  </p:clrMapOvr>
-</p:notes>
-</file>
-
-<file path=ppt/notesSlides/notesSlide4.xml><?xml version="1.0" encoding="utf-8"?>
-<p:notes xmlns:a="http://schemas.openxmlformats.org/drawingml/2006/main" xmlns:r="http://schemas.openxmlformats.org/officeDocument/2006/relationships" xmlns:p="http://schemas.openxmlformats.org/presentationml/2006/main" showMasterSp="0" showMasterPhAnim="0">
-  <p:cSld>
-    <p:spTree>
-      <p:nvGrpSpPr>
-        <p:cNvPr id="1" name="Shape 110"/>
-        <p:cNvGrpSpPr/>
-        <p:nvPr/>
-      </p:nvGrpSpPr>
-      <p:grpSpPr>
-        <a:xfrm>
-          <a:off x="0" y="0"/>
-          <a:ext cx="0" cy="0"/>
-          <a:chOff x="0" y="0"/>
-          <a:chExt cx="0" cy="0"/>
-        </a:xfrm>
-      </p:grpSpPr>
-      <p:sp>
-        <p:nvSpPr>
-          <p:cNvPr id="111" name="Google Shape;111;p4:notes"/>
-          <p:cNvSpPr txBox="1">
-            <a:spLocks noGrp="1"/>
-          </p:cNvSpPr>
-          <p:nvPr>
-            <p:ph type="body" idx="1"/>
-          </p:nvPr>
-        </p:nvSpPr>
-        <p:spPr>
-          <a:xfrm>
-            <a:off x="685800" y="4343400"/>
-            <a:ext cx="5486400" cy="4114800"/>
-          </a:xfrm>
-          <a:prstGeom prst="rect">
-            <a:avLst/>
-          </a:prstGeom>
-        </p:spPr>
-        <p:txBody>
-          <a:bodyPr spcFirstLastPara="1" wrap="square" lIns="91425" tIns="91425" rIns="91425" bIns="91425" anchor="t" anchorCtr="0">
-            <a:noAutofit/>
-          </a:bodyPr>
-          <a:lstStyle/>
-          <a:p>
-            <a:pPr marL="0" lvl="0" indent="0" algn="l" rtl="0">
-              <a:spcBef>
-                <a:spcPts val="0"/>
-              </a:spcBef>
-              <a:spcAft>
-                <a:spcPts val="0"/>
-              </a:spcAft>
-              <a:buNone/>
-            </a:pPr>
-            <a:endParaRPr/>
-          </a:p>
-        </p:txBody>
-      </p:sp>
-      <p:sp>
-        <p:nvSpPr>
-          <p:cNvPr id="112" name="Google Shape;112;p4:notes"/>
-          <p:cNvSpPr>
-            <a:spLocks noGrp="1" noRot="1" noChangeAspect="1"/>
-          </p:cNvSpPr>
-          <p:nvPr>
-            <p:ph type="sldImg" idx="2"/>
-          </p:nvPr>
-        </p:nvSpPr>
-        <p:spPr>
-          <a:xfrm>
-            <a:off x="381000" y="685800"/>
-            <a:ext cx="6096000" cy="3429000"/>
-          </a:xfrm>
-          <a:custGeom>
-            <a:avLst/>
-            <a:gdLst/>
-            <a:ahLst/>
-            <a:cxnLst/>
-            <a:rect l="l" t="t" r="r" b="b"/>
-            <a:pathLst>
-              <a:path w="120000" h="120000" extrusionOk="0">
-                <a:moveTo>
-                  <a:pt x="0" y="0"/>
-                </a:moveTo>
-                <a:lnTo>
-                  <a:pt x="120000" y="0"/>
-                </a:lnTo>
-                <a:lnTo>
-                  <a:pt x="120000" y="120000"/>
-                </a:lnTo>
-                <a:lnTo>
-                  <a:pt x="0" y="120000"/>
-                </a:lnTo>
-                <a:close/>
-              </a:path>
-            </a:pathLst>
-          </a:custGeom>
-        </p:spPr>
-      </p:sp>
-    </p:spTree>
-    <p:extLst>
-      <p:ext uri="{BB962C8B-B14F-4D97-AF65-F5344CB8AC3E}">
-        <p14:creationId xmlns:p14="http://schemas.microsoft.com/office/powerpoint/2010/main" val="1293419172"/>
-      </p:ext>
-    </p:extLst>
-  </p:cSld>
-  <p:clrMapOvr>
-    <a:masterClrMapping/>
-  </p:clrMapOvr>
-</p:notes>
-</file>
-
-<file path=ppt/notesSlides/notesSlide5.xml><?xml version="1.0" encoding="utf-8"?>
-<p:notes xmlns:a="http://schemas.openxmlformats.org/drawingml/2006/main" xmlns:r="http://schemas.openxmlformats.org/officeDocument/2006/relationships" xmlns:p="http://schemas.openxmlformats.org/presentationml/2006/main" showMasterSp="0" showMasterPhAnim="0">
-  <p:cSld>
-    <p:spTree>
-      <p:nvGrpSpPr>
         <p:cNvPr id="1" name="Shape 146"/>
         <p:cNvGrpSpPr/>
         <p:nvPr/>
@@ -1275,7 +953,7 @@
 </p:notes>
 </file>
 
-<file path=ppt/notesSlides/notesSlide6.xml><?xml version="1.0" encoding="utf-8"?>
+<file path=ppt/notesSlides/notesSlide3.xml><?xml version="1.0" encoding="utf-8"?>
 <p:notes xmlns:a="http://schemas.openxmlformats.org/drawingml/2006/main" xmlns:r="http://schemas.openxmlformats.org/officeDocument/2006/relationships" xmlns:p="http://schemas.openxmlformats.org/presentationml/2006/main" showMasterSp="0" showMasterPhAnim="0">
   <p:cSld>
     <p:spTree>
@@ -1374,7 +1052,7 @@
     </p:spTree>
     <p:extLst>
       <p:ext uri="{BB962C8B-B14F-4D97-AF65-F5344CB8AC3E}">
-        <p14:creationId xmlns:p14="http://schemas.microsoft.com/office/powerpoint/2010/main" val="1075617860"/>
+        <p14:creationId xmlns:p14="http://schemas.microsoft.com/office/powerpoint/2010/main" val="4068162294"/>
       </p:ext>
     </p:extLst>
   </p:cSld>
@@ -1384,12 +1062,12 @@
 </p:notes>
 </file>
 
-<file path=ppt/notesSlides/notesSlide7.xml><?xml version="1.0" encoding="utf-8"?>
+<file path=ppt/notesSlides/notesSlide4.xml><?xml version="1.0" encoding="utf-8"?>
 <p:notes xmlns:a="http://schemas.openxmlformats.org/drawingml/2006/main" xmlns:r="http://schemas.openxmlformats.org/officeDocument/2006/relationships" xmlns:p="http://schemas.openxmlformats.org/presentationml/2006/main" showMasterSp="0" showMasterPhAnim="0">
   <p:cSld>
     <p:spTree>
       <p:nvGrpSpPr>
-        <p:cNvPr id="1" name="Shape 159"/>
+        <p:cNvPr id="1" name="Shape 146"/>
         <p:cNvGrpSpPr/>
         <p:nvPr/>
       </p:nvGrpSpPr>
@@ -1403,7 +1081,7 @@
       </p:grpSpPr>
       <p:sp>
         <p:nvSpPr>
-          <p:cNvPr id="160" name="Google Shape;160;p8:notes"/>
+          <p:cNvPr id="147" name="Google Shape;147;p7:notes"/>
           <p:cNvSpPr txBox="1">
             <a:spLocks noGrp="1"/>
           </p:cNvSpPr>
@@ -1441,7 +1119,7 @@
       </p:sp>
       <p:sp>
         <p:nvSpPr>
-          <p:cNvPr id="161" name="Google Shape;161;p8:notes"/>
+          <p:cNvPr id="148" name="Google Shape;148;p7:notes"/>
           <p:cNvSpPr>
             <a:spLocks noGrp="1" noRot="1" noChangeAspect="1"/>
           </p:cNvSpPr>
@@ -1483,7 +1161,7 @@
     </p:spTree>
     <p:extLst>
       <p:ext uri="{BB962C8B-B14F-4D97-AF65-F5344CB8AC3E}">
-        <p14:creationId xmlns:p14="http://schemas.microsoft.com/office/powerpoint/2010/main" val="2162443325"/>
+        <p14:creationId xmlns:p14="http://schemas.microsoft.com/office/powerpoint/2010/main" val="535865853"/>
       </p:ext>
     </p:extLst>
   </p:cSld>
@@ -1493,12 +1171,12 @@
 </p:notes>
 </file>
 
-<file path=ppt/notesSlides/notesSlide8.xml><?xml version="1.0" encoding="utf-8"?>
+<file path=ppt/notesSlides/notesSlide5.xml><?xml version="1.0" encoding="utf-8"?>
 <p:notes xmlns:a="http://schemas.openxmlformats.org/drawingml/2006/main" xmlns:r="http://schemas.openxmlformats.org/officeDocument/2006/relationships" xmlns:p="http://schemas.openxmlformats.org/presentationml/2006/main" showMasterSp="0" showMasterPhAnim="0">
   <p:cSld>
     <p:spTree>
       <p:nvGrpSpPr>
-        <p:cNvPr id="1" name="Shape 159"/>
+        <p:cNvPr id="1" name="Shape 146"/>
         <p:cNvGrpSpPr/>
         <p:nvPr/>
       </p:nvGrpSpPr>
@@ -1512,7 +1190,7 @@
       </p:grpSpPr>
       <p:sp>
         <p:nvSpPr>
-          <p:cNvPr id="160" name="Google Shape;160;p8:notes"/>
+          <p:cNvPr id="147" name="Google Shape;147;p7:notes"/>
           <p:cNvSpPr txBox="1">
             <a:spLocks noGrp="1"/>
           </p:cNvSpPr>
@@ -1550,7 +1228,7 @@
       </p:sp>
       <p:sp>
         <p:nvSpPr>
-          <p:cNvPr id="161" name="Google Shape;161;p8:notes"/>
+          <p:cNvPr id="148" name="Google Shape;148;p7:notes"/>
           <p:cNvSpPr>
             <a:spLocks noGrp="1" noRot="1" noChangeAspect="1"/>
           </p:cNvSpPr>
@@ -1592,7 +1270,7 @@
     </p:spTree>
     <p:extLst>
       <p:ext uri="{BB962C8B-B14F-4D97-AF65-F5344CB8AC3E}">
-        <p14:creationId xmlns:p14="http://schemas.microsoft.com/office/powerpoint/2010/main" val="616603495"/>
+        <p14:creationId xmlns:p14="http://schemas.microsoft.com/office/powerpoint/2010/main" val="2205543152"/>
       </p:ext>
     </p:extLst>
   </p:cSld>
@@ -1602,7 +1280,116 @@
 </p:notes>
 </file>
 
-<file path=ppt/notesSlides/notesSlide9.xml><?xml version="1.0" encoding="utf-8"?>
+<file path=ppt/notesSlides/notesSlide6.xml><?xml version="1.0" encoding="utf-8"?>
+<p:notes xmlns:a="http://schemas.openxmlformats.org/drawingml/2006/main" xmlns:r="http://schemas.openxmlformats.org/officeDocument/2006/relationships" xmlns:p="http://schemas.openxmlformats.org/presentationml/2006/main" showMasterSp="0" showMasterPhAnim="0">
+  <p:cSld>
+    <p:spTree>
+      <p:nvGrpSpPr>
+        <p:cNvPr id="1" name="Shape 146"/>
+        <p:cNvGrpSpPr/>
+        <p:nvPr/>
+      </p:nvGrpSpPr>
+      <p:grpSpPr>
+        <a:xfrm>
+          <a:off x="0" y="0"/>
+          <a:ext cx="0" cy="0"/>
+          <a:chOff x="0" y="0"/>
+          <a:chExt cx="0" cy="0"/>
+        </a:xfrm>
+      </p:grpSpPr>
+      <p:sp>
+        <p:nvSpPr>
+          <p:cNvPr id="147" name="Google Shape;147;p7:notes"/>
+          <p:cNvSpPr txBox="1">
+            <a:spLocks noGrp="1"/>
+          </p:cNvSpPr>
+          <p:nvPr>
+            <p:ph type="body" idx="1"/>
+          </p:nvPr>
+        </p:nvSpPr>
+        <p:spPr>
+          <a:xfrm>
+            <a:off x="685800" y="4343400"/>
+            <a:ext cx="5486400" cy="4114800"/>
+          </a:xfrm>
+          <a:prstGeom prst="rect">
+            <a:avLst/>
+          </a:prstGeom>
+        </p:spPr>
+        <p:txBody>
+          <a:bodyPr spcFirstLastPara="1" wrap="square" lIns="91425" tIns="91425" rIns="91425" bIns="91425" anchor="t" anchorCtr="0">
+            <a:noAutofit/>
+          </a:bodyPr>
+          <a:lstStyle/>
+          <a:p>
+            <a:pPr marL="0" lvl="0" indent="0" algn="l" rtl="0">
+              <a:spcBef>
+                <a:spcPts val="0"/>
+              </a:spcBef>
+              <a:spcAft>
+                <a:spcPts val="0"/>
+              </a:spcAft>
+              <a:buNone/>
+            </a:pPr>
+            <a:endParaRPr/>
+          </a:p>
+        </p:txBody>
+      </p:sp>
+      <p:sp>
+        <p:nvSpPr>
+          <p:cNvPr id="148" name="Google Shape;148;p7:notes"/>
+          <p:cNvSpPr>
+            <a:spLocks noGrp="1" noRot="1" noChangeAspect="1"/>
+          </p:cNvSpPr>
+          <p:nvPr>
+            <p:ph type="sldImg" idx="2"/>
+          </p:nvPr>
+        </p:nvSpPr>
+        <p:spPr>
+          <a:xfrm>
+            <a:off x="381000" y="685800"/>
+            <a:ext cx="6096000" cy="3429000"/>
+          </a:xfrm>
+          <a:custGeom>
+            <a:avLst/>
+            <a:gdLst/>
+            <a:ahLst/>
+            <a:cxnLst/>
+            <a:rect l="l" t="t" r="r" b="b"/>
+            <a:pathLst>
+              <a:path w="120000" h="120000" extrusionOk="0">
+                <a:moveTo>
+                  <a:pt x="0" y="0"/>
+                </a:moveTo>
+                <a:lnTo>
+                  <a:pt x="120000" y="0"/>
+                </a:lnTo>
+                <a:lnTo>
+                  <a:pt x="120000" y="120000"/>
+                </a:lnTo>
+                <a:lnTo>
+                  <a:pt x="0" y="120000"/>
+                </a:lnTo>
+                <a:close/>
+              </a:path>
+            </a:pathLst>
+          </a:custGeom>
+        </p:spPr>
+      </p:sp>
+    </p:spTree>
+    <p:extLst>
+      <p:ext uri="{BB962C8B-B14F-4D97-AF65-F5344CB8AC3E}">
+        <p14:creationId xmlns:p14="http://schemas.microsoft.com/office/powerpoint/2010/main" val="3090990303"/>
+      </p:ext>
+    </p:extLst>
+  </p:cSld>
+  <p:clrMapOvr>
+    <a:masterClrMapping/>
+  </p:clrMapOvr>
+</p:notes>
+</file>
+
+<file path=ppt/notesSlides/notesSlide7.xml><?xml version="1.0" encoding="utf-8"?>
 <p:notes xmlns:a="http://schemas.openxmlformats.org/drawingml/2006/main" xmlns:r="http://schemas.openxmlformats.org/officeDocument/2006/relationships" xmlns:p="http://schemas.openxmlformats.org/presentationml/2006/main" showMasterSp="0" showMasterPhAnim="0">
   <p:cSld>
     <p:spTree>
@@ -2113,2123 +1900,6 @@
 </file>
 
 <file path=ppt/slideLayouts/slideLayout2.xml><?xml version="1.0" encoding="utf-8"?>
-<p:sldLayout xmlns:a="http://schemas.openxmlformats.org/drawingml/2006/main" xmlns:r="http://schemas.openxmlformats.org/officeDocument/2006/relationships" xmlns:p="http://schemas.openxmlformats.org/presentationml/2006/main" matchingName="Title Only" type="titleOnly">
-  <p:cSld name="TITLE_ONLY">
-    <p:spTree>
-      <p:nvGrpSpPr>
-        <p:cNvPr id="1" name="Shape 49"/>
-        <p:cNvGrpSpPr/>
-        <p:nvPr/>
-      </p:nvGrpSpPr>
-      <p:grpSpPr>
-        <a:xfrm>
-          <a:off x="0" y="0"/>
-          <a:ext cx="0" cy="0"/>
-          <a:chOff x="0" y="0"/>
-          <a:chExt cx="0" cy="0"/>
-        </a:xfrm>
-      </p:grpSpPr>
-      <p:sp>
-        <p:nvSpPr>
-          <p:cNvPr id="50" name="Google Shape;50;p8"/>
-          <p:cNvSpPr txBox="1">
-            <a:spLocks noGrp="1"/>
-          </p:cNvSpPr>
-          <p:nvPr>
-            <p:ph type="title"/>
-          </p:nvPr>
-        </p:nvSpPr>
-        <p:spPr>
-          <a:xfrm>
-            <a:off x="457200" y="274638"/>
-            <a:ext cx="8229600" cy="1143000"/>
-          </a:xfrm>
-          <a:prstGeom prst="rect">
-            <a:avLst/>
-          </a:prstGeom>
-          <a:noFill/>
-          <a:ln>
-            <a:noFill/>
-          </a:ln>
-        </p:spPr>
-        <p:txBody>
-          <a:bodyPr spcFirstLastPara="1" wrap="square" lIns="91425" tIns="45700" rIns="91425" bIns="45700" anchor="ctr" anchorCtr="0">
-            <a:normAutofit/>
-          </a:bodyPr>
-          <a:lstStyle>
-            <a:lvl1pPr lvl="0" algn="ctr">
-              <a:spcBef>
-                <a:spcPts val="0"/>
-              </a:spcBef>
-              <a:spcAft>
-                <a:spcPts val="0"/>
-              </a:spcAft>
-              <a:buClr>
-                <a:schemeClr val="dk1"/>
-              </a:buClr>
-              <a:buSzPts val="1800"/>
-              <a:buNone/>
-              <a:defRPr/>
-            </a:lvl1pPr>
-            <a:lvl2pPr lvl="1">
-              <a:spcBef>
-                <a:spcPts val="0"/>
-              </a:spcBef>
-              <a:spcAft>
-                <a:spcPts val="0"/>
-              </a:spcAft>
-              <a:buSzPts val="1400"/>
-              <a:buNone/>
-              <a:defRPr/>
-            </a:lvl2pPr>
-            <a:lvl3pPr lvl="2">
-              <a:spcBef>
-                <a:spcPts val="0"/>
-              </a:spcBef>
-              <a:spcAft>
-                <a:spcPts val="0"/>
-              </a:spcAft>
-              <a:buSzPts val="1400"/>
-              <a:buNone/>
-              <a:defRPr/>
-            </a:lvl3pPr>
-            <a:lvl4pPr lvl="3">
-              <a:spcBef>
-                <a:spcPts val="0"/>
-              </a:spcBef>
-              <a:spcAft>
-                <a:spcPts val="0"/>
-              </a:spcAft>
-              <a:buSzPts val="1400"/>
-              <a:buNone/>
-              <a:defRPr/>
-            </a:lvl4pPr>
-            <a:lvl5pPr lvl="4">
-              <a:spcBef>
-                <a:spcPts val="0"/>
-              </a:spcBef>
-              <a:spcAft>
-                <a:spcPts val="0"/>
-              </a:spcAft>
-              <a:buSzPts val="1400"/>
-              <a:buNone/>
-              <a:defRPr/>
-            </a:lvl5pPr>
-            <a:lvl6pPr lvl="5">
-              <a:spcBef>
-                <a:spcPts val="0"/>
-              </a:spcBef>
-              <a:spcAft>
-                <a:spcPts val="0"/>
-              </a:spcAft>
-              <a:buSzPts val="1400"/>
-              <a:buNone/>
-              <a:defRPr/>
-            </a:lvl6pPr>
-            <a:lvl7pPr lvl="6">
-              <a:spcBef>
-                <a:spcPts val="0"/>
-              </a:spcBef>
-              <a:spcAft>
-                <a:spcPts val="0"/>
-              </a:spcAft>
-              <a:buSzPts val="1400"/>
-              <a:buNone/>
-              <a:defRPr/>
-            </a:lvl7pPr>
-            <a:lvl8pPr lvl="7">
-              <a:spcBef>
-                <a:spcPts val="0"/>
-              </a:spcBef>
-              <a:spcAft>
-                <a:spcPts val="0"/>
-              </a:spcAft>
-              <a:buSzPts val="1400"/>
-              <a:buNone/>
-              <a:defRPr/>
-            </a:lvl8pPr>
-            <a:lvl9pPr lvl="8">
-              <a:spcBef>
-                <a:spcPts val="0"/>
-              </a:spcBef>
-              <a:spcAft>
-                <a:spcPts val="0"/>
-              </a:spcAft>
-              <a:buSzPts val="1400"/>
-              <a:buNone/>
-              <a:defRPr/>
-            </a:lvl9pPr>
-          </a:lstStyle>
-          <a:p>
-            <a:endParaRPr/>
-          </a:p>
-        </p:txBody>
-      </p:sp>
-      <p:sp>
-        <p:nvSpPr>
-          <p:cNvPr id="51" name="Google Shape;51;p8"/>
-          <p:cNvSpPr txBox="1">
-            <a:spLocks noGrp="1"/>
-          </p:cNvSpPr>
-          <p:nvPr>
-            <p:ph type="dt" idx="10"/>
-          </p:nvPr>
-        </p:nvSpPr>
-        <p:spPr>
-          <a:xfrm>
-            <a:off x="457200" y="6356350"/>
-            <a:ext cx="2133600" cy="365125"/>
-          </a:xfrm>
-          <a:prstGeom prst="rect">
-            <a:avLst/>
-          </a:prstGeom>
-          <a:noFill/>
-          <a:ln>
-            <a:noFill/>
-          </a:ln>
-        </p:spPr>
-        <p:txBody>
-          <a:bodyPr spcFirstLastPara="1" wrap="square" lIns="91425" tIns="45700" rIns="91425" bIns="45700" anchor="ctr" anchorCtr="0">
-            <a:noAutofit/>
-          </a:bodyPr>
-          <a:lstStyle>
-            <a:lvl1pPr lvl="0" algn="l">
-              <a:spcBef>
-                <a:spcPts val="0"/>
-              </a:spcBef>
-              <a:spcAft>
-                <a:spcPts val="0"/>
-              </a:spcAft>
-              <a:buSzPts val="1400"/>
-              <a:buNone/>
-              <a:defRPr/>
-            </a:lvl1pPr>
-            <a:lvl2pPr lvl="1" algn="l">
-              <a:spcBef>
-                <a:spcPts val="0"/>
-              </a:spcBef>
-              <a:spcAft>
-                <a:spcPts val="0"/>
-              </a:spcAft>
-              <a:buSzPts val="1400"/>
-              <a:buNone/>
-              <a:defRPr/>
-            </a:lvl2pPr>
-            <a:lvl3pPr lvl="2" algn="l">
-              <a:spcBef>
-                <a:spcPts val="0"/>
-              </a:spcBef>
-              <a:spcAft>
-                <a:spcPts val="0"/>
-              </a:spcAft>
-              <a:buSzPts val="1400"/>
-              <a:buNone/>
-              <a:defRPr/>
-            </a:lvl3pPr>
-            <a:lvl4pPr lvl="3" algn="l">
-              <a:spcBef>
-                <a:spcPts val="0"/>
-              </a:spcBef>
-              <a:spcAft>
-                <a:spcPts val="0"/>
-              </a:spcAft>
-              <a:buSzPts val="1400"/>
-              <a:buNone/>
-              <a:defRPr/>
-            </a:lvl4pPr>
-            <a:lvl5pPr lvl="4" algn="l">
-              <a:spcBef>
-                <a:spcPts val="0"/>
-              </a:spcBef>
-              <a:spcAft>
-                <a:spcPts val="0"/>
-              </a:spcAft>
-              <a:buSzPts val="1400"/>
-              <a:buNone/>
-              <a:defRPr/>
-            </a:lvl5pPr>
-            <a:lvl6pPr lvl="5" algn="l">
-              <a:spcBef>
-                <a:spcPts val="0"/>
-              </a:spcBef>
-              <a:spcAft>
-                <a:spcPts val="0"/>
-              </a:spcAft>
-              <a:buSzPts val="1400"/>
-              <a:buNone/>
-              <a:defRPr/>
-            </a:lvl6pPr>
-            <a:lvl7pPr lvl="6" algn="l">
-              <a:spcBef>
-                <a:spcPts val="0"/>
-              </a:spcBef>
-              <a:spcAft>
-                <a:spcPts val="0"/>
-              </a:spcAft>
-              <a:buSzPts val="1400"/>
-              <a:buNone/>
-              <a:defRPr/>
-            </a:lvl7pPr>
-            <a:lvl8pPr lvl="7" algn="l">
-              <a:spcBef>
-                <a:spcPts val="0"/>
-              </a:spcBef>
-              <a:spcAft>
-                <a:spcPts val="0"/>
-              </a:spcAft>
-              <a:buSzPts val="1400"/>
-              <a:buNone/>
-              <a:defRPr/>
-            </a:lvl8pPr>
-            <a:lvl9pPr lvl="8" algn="l">
-              <a:spcBef>
-                <a:spcPts val="0"/>
-              </a:spcBef>
-              <a:spcAft>
-                <a:spcPts val="0"/>
-              </a:spcAft>
-              <a:buSzPts val="1400"/>
-              <a:buNone/>
-              <a:defRPr/>
-            </a:lvl9pPr>
-          </a:lstStyle>
-          <a:p>
-            <a:endParaRPr/>
-          </a:p>
-        </p:txBody>
-      </p:sp>
-      <p:sp>
-        <p:nvSpPr>
-          <p:cNvPr id="52" name="Google Shape;52;p8"/>
-          <p:cNvSpPr txBox="1">
-            <a:spLocks noGrp="1"/>
-          </p:cNvSpPr>
-          <p:nvPr>
-            <p:ph type="ftr" idx="11"/>
-          </p:nvPr>
-        </p:nvSpPr>
-        <p:spPr>
-          <a:xfrm>
-            <a:off x="3124200" y="6356350"/>
-            <a:ext cx="2895600" cy="365125"/>
-          </a:xfrm>
-          <a:prstGeom prst="rect">
-            <a:avLst/>
-          </a:prstGeom>
-          <a:noFill/>
-          <a:ln>
-            <a:noFill/>
-          </a:ln>
-        </p:spPr>
-        <p:txBody>
-          <a:bodyPr spcFirstLastPara="1" wrap="square" lIns="91425" tIns="45700" rIns="91425" bIns="45700" anchor="ctr" anchorCtr="0">
-            <a:noAutofit/>
-          </a:bodyPr>
-          <a:lstStyle>
-            <a:lvl1pPr lvl="0" algn="ctr">
-              <a:spcBef>
-                <a:spcPts val="0"/>
-              </a:spcBef>
-              <a:spcAft>
-                <a:spcPts val="0"/>
-              </a:spcAft>
-              <a:buSzPts val="1400"/>
-              <a:buNone/>
-              <a:defRPr/>
-            </a:lvl1pPr>
-            <a:lvl2pPr lvl="1" algn="l">
-              <a:spcBef>
-                <a:spcPts val="0"/>
-              </a:spcBef>
-              <a:spcAft>
-                <a:spcPts val="0"/>
-              </a:spcAft>
-              <a:buSzPts val="1400"/>
-              <a:buNone/>
-              <a:defRPr/>
-            </a:lvl2pPr>
-            <a:lvl3pPr lvl="2" algn="l">
-              <a:spcBef>
-                <a:spcPts val="0"/>
-              </a:spcBef>
-              <a:spcAft>
-                <a:spcPts val="0"/>
-              </a:spcAft>
-              <a:buSzPts val="1400"/>
-              <a:buNone/>
-              <a:defRPr/>
-            </a:lvl3pPr>
-            <a:lvl4pPr lvl="3" algn="l">
-              <a:spcBef>
-                <a:spcPts val="0"/>
-              </a:spcBef>
-              <a:spcAft>
-                <a:spcPts val="0"/>
-              </a:spcAft>
-              <a:buSzPts val="1400"/>
-              <a:buNone/>
-              <a:defRPr/>
-            </a:lvl4pPr>
-            <a:lvl5pPr lvl="4" algn="l">
-              <a:spcBef>
-                <a:spcPts val="0"/>
-              </a:spcBef>
-              <a:spcAft>
-                <a:spcPts val="0"/>
-              </a:spcAft>
-              <a:buSzPts val="1400"/>
-              <a:buNone/>
-              <a:defRPr/>
-            </a:lvl5pPr>
-            <a:lvl6pPr lvl="5" algn="l">
-              <a:spcBef>
-                <a:spcPts val="0"/>
-              </a:spcBef>
-              <a:spcAft>
-                <a:spcPts val="0"/>
-              </a:spcAft>
-              <a:buSzPts val="1400"/>
-              <a:buNone/>
-              <a:defRPr/>
-            </a:lvl6pPr>
-            <a:lvl7pPr lvl="6" algn="l">
-              <a:spcBef>
-                <a:spcPts val="0"/>
-              </a:spcBef>
-              <a:spcAft>
-                <a:spcPts val="0"/>
-              </a:spcAft>
-              <a:buSzPts val="1400"/>
-              <a:buNone/>
-              <a:defRPr/>
-            </a:lvl7pPr>
-            <a:lvl8pPr lvl="7" algn="l">
-              <a:spcBef>
-                <a:spcPts val="0"/>
-              </a:spcBef>
-              <a:spcAft>
-                <a:spcPts val="0"/>
-              </a:spcAft>
-              <a:buSzPts val="1400"/>
-              <a:buNone/>
-              <a:defRPr/>
-            </a:lvl8pPr>
-            <a:lvl9pPr lvl="8" algn="l">
-              <a:spcBef>
-                <a:spcPts val="0"/>
-              </a:spcBef>
-              <a:spcAft>
-                <a:spcPts val="0"/>
-              </a:spcAft>
-              <a:buSzPts val="1400"/>
-              <a:buNone/>
-              <a:defRPr/>
-            </a:lvl9pPr>
-          </a:lstStyle>
-          <a:p>
-            <a:endParaRPr/>
-          </a:p>
-        </p:txBody>
-      </p:sp>
-      <p:sp>
-        <p:nvSpPr>
-          <p:cNvPr id="53" name="Google Shape;53;p8"/>
-          <p:cNvSpPr txBox="1">
-            <a:spLocks noGrp="1"/>
-          </p:cNvSpPr>
-          <p:nvPr>
-            <p:ph type="sldNum" idx="12"/>
-          </p:nvPr>
-        </p:nvSpPr>
-        <p:spPr>
-          <a:xfrm>
-            <a:off x="6553200" y="6356350"/>
-            <a:ext cx="2133600" cy="365125"/>
-          </a:xfrm>
-          <a:prstGeom prst="rect">
-            <a:avLst/>
-          </a:prstGeom>
-          <a:noFill/>
-          <a:ln>
-            <a:noFill/>
-          </a:ln>
-        </p:spPr>
-        <p:txBody>
-          <a:bodyPr spcFirstLastPara="1" wrap="square" lIns="91425" tIns="45700" rIns="91425" bIns="45700" anchor="ctr" anchorCtr="0">
-            <a:noAutofit/>
-          </a:bodyPr>
-          <a:lstStyle>
-            <a:lvl1pPr marL="0" lvl="0" indent="0" algn="r">
-              <a:spcBef>
-                <a:spcPts val="0"/>
-              </a:spcBef>
-              <a:buNone/>
-              <a:defRPr/>
-            </a:lvl1pPr>
-            <a:lvl2pPr marL="0" lvl="1" indent="0" algn="r">
-              <a:spcBef>
-                <a:spcPts val="0"/>
-              </a:spcBef>
-              <a:buNone/>
-              <a:defRPr/>
-            </a:lvl2pPr>
-            <a:lvl3pPr marL="0" lvl="2" indent="0" algn="r">
-              <a:spcBef>
-                <a:spcPts val="0"/>
-              </a:spcBef>
-              <a:buNone/>
-              <a:defRPr/>
-            </a:lvl3pPr>
-            <a:lvl4pPr marL="0" lvl="3" indent="0" algn="r">
-              <a:spcBef>
-                <a:spcPts val="0"/>
-              </a:spcBef>
-              <a:buNone/>
-              <a:defRPr/>
-            </a:lvl4pPr>
-            <a:lvl5pPr marL="0" lvl="4" indent="0" algn="r">
-              <a:spcBef>
-                <a:spcPts val="0"/>
-              </a:spcBef>
-              <a:buNone/>
-              <a:defRPr/>
-            </a:lvl5pPr>
-            <a:lvl6pPr marL="0" lvl="5" indent="0" algn="r">
-              <a:spcBef>
-                <a:spcPts val="0"/>
-              </a:spcBef>
-              <a:buNone/>
-              <a:defRPr/>
-            </a:lvl6pPr>
-            <a:lvl7pPr marL="0" lvl="6" indent="0" algn="r">
-              <a:spcBef>
-                <a:spcPts val="0"/>
-              </a:spcBef>
-              <a:buNone/>
-              <a:defRPr/>
-            </a:lvl7pPr>
-            <a:lvl8pPr marL="0" lvl="7" indent="0" algn="r">
-              <a:spcBef>
-                <a:spcPts val="0"/>
-              </a:spcBef>
-              <a:buNone/>
-              <a:defRPr/>
-            </a:lvl8pPr>
-            <a:lvl9pPr marL="0" lvl="8" indent="0" algn="r">
-              <a:spcBef>
-                <a:spcPts val="0"/>
-              </a:spcBef>
-              <a:buNone/>
-              <a:defRPr/>
-            </a:lvl9pPr>
-          </a:lstStyle>
-          <a:p>
-            <a:pPr marL="0" lvl="0" indent="0" algn="r" rtl="0">
-              <a:spcBef>
-                <a:spcPts val="0"/>
-              </a:spcBef>
-              <a:spcAft>
-                <a:spcPts val="0"/>
-              </a:spcAft>
-              <a:buNone/>
-            </a:pPr>
-            <a:fld id="{00000000-1234-1234-1234-123412341234}" type="slidenum">
-              <a:rPr lang="en-US"/>
-              <a:t>‹Nº›</a:t>
-            </a:fld>
-            <a:endParaRPr/>
-          </a:p>
-        </p:txBody>
-      </p:sp>
-    </p:spTree>
-  </p:cSld>
-  <p:clrMapOvr>
-    <a:masterClrMapping/>
-  </p:clrMapOvr>
-</p:sldLayout>
-</file>
-
-<file path=ppt/slideLayouts/slideLayout3.xml><?xml version="1.0" encoding="utf-8"?>
-<p:sldLayout xmlns:a="http://schemas.openxmlformats.org/drawingml/2006/main" xmlns:r="http://schemas.openxmlformats.org/officeDocument/2006/relationships" xmlns:p="http://schemas.openxmlformats.org/presentationml/2006/main" matchingName="Content with Caption" type="objTx">
-  <p:cSld name="OBJECT_WITH_CAPTION_TEXT">
-    <p:spTree>
-      <p:nvGrpSpPr>
-        <p:cNvPr id="1" name="Shape 54"/>
-        <p:cNvGrpSpPr/>
-        <p:nvPr/>
-      </p:nvGrpSpPr>
-      <p:grpSpPr>
-        <a:xfrm>
-          <a:off x="0" y="0"/>
-          <a:ext cx="0" cy="0"/>
-          <a:chOff x="0" y="0"/>
-          <a:chExt cx="0" cy="0"/>
-        </a:xfrm>
-      </p:grpSpPr>
-      <p:sp>
-        <p:nvSpPr>
-          <p:cNvPr id="55" name="Google Shape;55;p9"/>
-          <p:cNvSpPr txBox="1">
-            <a:spLocks noGrp="1"/>
-          </p:cNvSpPr>
-          <p:nvPr>
-            <p:ph type="title"/>
-          </p:nvPr>
-        </p:nvSpPr>
-        <p:spPr>
-          <a:xfrm>
-            <a:off x="457200" y="273050"/>
-            <a:ext cx="3008313" cy="1162050"/>
-          </a:xfrm>
-          <a:prstGeom prst="rect">
-            <a:avLst/>
-          </a:prstGeom>
-          <a:noFill/>
-          <a:ln>
-            <a:noFill/>
-          </a:ln>
-        </p:spPr>
-        <p:txBody>
-          <a:bodyPr spcFirstLastPara="1" wrap="square" lIns="91425" tIns="45700" rIns="91425" bIns="45700" anchor="b" anchorCtr="0">
-            <a:normAutofit/>
-          </a:bodyPr>
-          <a:lstStyle>
-            <a:lvl1pPr lvl="0" algn="l">
-              <a:spcBef>
-                <a:spcPts val="0"/>
-              </a:spcBef>
-              <a:spcAft>
-                <a:spcPts val="0"/>
-              </a:spcAft>
-              <a:buClr>
-                <a:schemeClr val="dk1"/>
-              </a:buClr>
-              <a:buSzPts val="2000"/>
-              <a:buFont typeface="Calibri"/>
-              <a:buNone/>
-              <a:defRPr sz="2000" b="1"/>
-            </a:lvl1pPr>
-            <a:lvl2pPr lvl="1">
-              <a:spcBef>
-                <a:spcPts val="0"/>
-              </a:spcBef>
-              <a:spcAft>
-                <a:spcPts val="0"/>
-              </a:spcAft>
-              <a:buSzPts val="1400"/>
-              <a:buNone/>
-              <a:defRPr/>
-            </a:lvl2pPr>
-            <a:lvl3pPr lvl="2">
-              <a:spcBef>
-                <a:spcPts val="0"/>
-              </a:spcBef>
-              <a:spcAft>
-                <a:spcPts val="0"/>
-              </a:spcAft>
-              <a:buSzPts val="1400"/>
-              <a:buNone/>
-              <a:defRPr/>
-            </a:lvl3pPr>
-            <a:lvl4pPr lvl="3">
-              <a:spcBef>
-                <a:spcPts val="0"/>
-              </a:spcBef>
-              <a:spcAft>
-                <a:spcPts val="0"/>
-              </a:spcAft>
-              <a:buSzPts val="1400"/>
-              <a:buNone/>
-              <a:defRPr/>
-            </a:lvl4pPr>
-            <a:lvl5pPr lvl="4">
-              <a:spcBef>
-                <a:spcPts val="0"/>
-              </a:spcBef>
-              <a:spcAft>
-                <a:spcPts val="0"/>
-              </a:spcAft>
-              <a:buSzPts val="1400"/>
-              <a:buNone/>
-              <a:defRPr/>
-            </a:lvl5pPr>
-            <a:lvl6pPr lvl="5">
-              <a:spcBef>
-                <a:spcPts val="0"/>
-              </a:spcBef>
-              <a:spcAft>
-                <a:spcPts val="0"/>
-              </a:spcAft>
-              <a:buSzPts val="1400"/>
-              <a:buNone/>
-              <a:defRPr/>
-            </a:lvl6pPr>
-            <a:lvl7pPr lvl="6">
-              <a:spcBef>
-                <a:spcPts val="0"/>
-              </a:spcBef>
-              <a:spcAft>
-                <a:spcPts val="0"/>
-              </a:spcAft>
-              <a:buSzPts val="1400"/>
-              <a:buNone/>
-              <a:defRPr/>
-            </a:lvl7pPr>
-            <a:lvl8pPr lvl="7">
-              <a:spcBef>
-                <a:spcPts val="0"/>
-              </a:spcBef>
-              <a:spcAft>
-                <a:spcPts val="0"/>
-              </a:spcAft>
-              <a:buSzPts val="1400"/>
-              <a:buNone/>
-              <a:defRPr/>
-            </a:lvl8pPr>
-            <a:lvl9pPr lvl="8">
-              <a:spcBef>
-                <a:spcPts val="0"/>
-              </a:spcBef>
-              <a:spcAft>
-                <a:spcPts val="0"/>
-              </a:spcAft>
-              <a:buSzPts val="1400"/>
-              <a:buNone/>
-              <a:defRPr/>
-            </a:lvl9pPr>
-          </a:lstStyle>
-          <a:p>
-            <a:endParaRPr/>
-          </a:p>
-        </p:txBody>
-      </p:sp>
-      <p:sp>
-        <p:nvSpPr>
-          <p:cNvPr id="56" name="Google Shape;56;p9"/>
-          <p:cNvSpPr txBox="1">
-            <a:spLocks noGrp="1"/>
-          </p:cNvSpPr>
-          <p:nvPr>
-            <p:ph type="body" idx="1"/>
-          </p:nvPr>
-        </p:nvSpPr>
-        <p:spPr>
-          <a:xfrm>
-            <a:off x="3575050" y="273050"/>
-            <a:ext cx="5111750" cy="5853113"/>
-          </a:xfrm>
-          <a:prstGeom prst="rect">
-            <a:avLst/>
-          </a:prstGeom>
-          <a:noFill/>
-          <a:ln>
-            <a:noFill/>
-          </a:ln>
-        </p:spPr>
-        <p:txBody>
-          <a:bodyPr spcFirstLastPara="1" wrap="square" lIns="91425" tIns="45700" rIns="91425" bIns="45700" anchor="t" anchorCtr="0">
-            <a:normAutofit/>
-          </a:bodyPr>
-          <a:lstStyle>
-            <a:lvl1pPr marL="457200" lvl="0" indent="-431800" algn="l">
-              <a:spcBef>
-                <a:spcPts val="640"/>
-              </a:spcBef>
-              <a:spcAft>
-                <a:spcPts val="0"/>
-              </a:spcAft>
-              <a:buClr>
-                <a:schemeClr val="dk1"/>
-              </a:buClr>
-              <a:buSzPts val="3200"/>
-              <a:buChar char="•"/>
-              <a:defRPr sz="3200"/>
-            </a:lvl1pPr>
-            <a:lvl2pPr marL="914400" lvl="1" indent="-406400" algn="l">
-              <a:spcBef>
-                <a:spcPts val="560"/>
-              </a:spcBef>
-              <a:spcAft>
-                <a:spcPts val="0"/>
-              </a:spcAft>
-              <a:buClr>
-                <a:schemeClr val="dk1"/>
-              </a:buClr>
-              <a:buSzPts val="2800"/>
-              <a:buChar char="–"/>
-              <a:defRPr sz="2800"/>
-            </a:lvl2pPr>
-            <a:lvl3pPr marL="1371600" lvl="2" indent="-381000" algn="l">
-              <a:spcBef>
-                <a:spcPts val="480"/>
-              </a:spcBef>
-              <a:spcAft>
-                <a:spcPts val="0"/>
-              </a:spcAft>
-              <a:buClr>
-                <a:schemeClr val="dk1"/>
-              </a:buClr>
-              <a:buSzPts val="2400"/>
-              <a:buChar char="•"/>
-              <a:defRPr sz="2400"/>
-            </a:lvl3pPr>
-            <a:lvl4pPr marL="1828800" lvl="3" indent="-355600" algn="l">
-              <a:spcBef>
-                <a:spcPts val="400"/>
-              </a:spcBef>
-              <a:spcAft>
-                <a:spcPts val="0"/>
-              </a:spcAft>
-              <a:buClr>
-                <a:schemeClr val="dk1"/>
-              </a:buClr>
-              <a:buSzPts val="2000"/>
-              <a:buChar char="–"/>
-              <a:defRPr sz="2000"/>
-            </a:lvl4pPr>
-            <a:lvl5pPr marL="2286000" lvl="4" indent="-355600" algn="l">
-              <a:spcBef>
-                <a:spcPts val="400"/>
-              </a:spcBef>
-              <a:spcAft>
-                <a:spcPts val="0"/>
-              </a:spcAft>
-              <a:buClr>
-                <a:schemeClr val="dk1"/>
-              </a:buClr>
-              <a:buSzPts val="2000"/>
-              <a:buChar char="»"/>
-              <a:defRPr sz="2000"/>
-            </a:lvl5pPr>
-            <a:lvl6pPr marL="2743200" lvl="5" indent="-355600" algn="l">
-              <a:spcBef>
-                <a:spcPts val="400"/>
-              </a:spcBef>
-              <a:spcAft>
-                <a:spcPts val="0"/>
-              </a:spcAft>
-              <a:buClr>
-                <a:schemeClr val="dk1"/>
-              </a:buClr>
-              <a:buSzPts val="2000"/>
-              <a:buChar char="•"/>
-              <a:defRPr sz="2000"/>
-            </a:lvl6pPr>
-            <a:lvl7pPr marL="3200400" lvl="6" indent="-355600" algn="l">
-              <a:spcBef>
-                <a:spcPts val="400"/>
-              </a:spcBef>
-              <a:spcAft>
-                <a:spcPts val="0"/>
-              </a:spcAft>
-              <a:buClr>
-                <a:schemeClr val="dk1"/>
-              </a:buClr>
-              <a:buSzPts val="2000"/>
-              <a:buChar char="•"/>
-              <a:defRPr sz="2000"/>
-            </a:lvl7pPr>
-            <a:lvl8pPr marL="3657600" lvl="7" indent="-355600" algn="l">
-              <a:spcBef>
-                <a:spcPts val="400"/>
-              </a:spcBef>
-              <a:spcAft>
-                <a:spcPts val="0"/>
-              </a:spcAft>
-              <a:buClr>
-                <a:schemeClr val="dk1"/>
-              </a:buClr>
-              <a:buSzPts val="2000"/>
-              <a:buChar char="•"/>
-              <a:defRPr sz="2000"/>
-            </a:lvl8pPr>
-            <a:lvl9pPr marL="4114800" lvl="8" indent="-355600" algn="l">
-              <a:spcBef>
-                <a:spcPts val="400"/>
-              </a:spcBef>
-              <a:spcAft>
-                <a:spcPts val="0"/>
-              </a:spcAft>
-              <a:buClr>
-                <a:schemeClr val="dk1"/>
-              </a:buClr>
-              <a:buSzPts val="2000"/>
-              <a:buChar char="•"/>
-              <a:defRPr sz="2000"/>
-            </a:lvl9pPr>
-          </a:lstStyle>
-          <a:p>
-            <a:endParaRPr/>
-          </a:p>
-        </p:txBody>
-      </p:sp>
-      <p:sp>
-        <p:nvSpPr>
-          <p:cNvPr id="57" name="Google Shape;57;p9"/>
-          <p:cNvSpPr txBox="1">
-            <a:spLocks noGrp="1"/>
-          </p:cNvSpPr>
-          <p:nvPr>
-            <p:ph type="body" idx="2"/>
-          </p:nvPr>
-        </p:nvSpPr>
-        <p:spPr>
-          <a:xfrm>
-            <a:off x="457200" y="1435100"/>
-            <a:ext cx="3008313" cy="4691063"/>
-          </a:xfrm>
-          <a:prstGeom prst="rect">
-            <a:avLst/>
-          </a:prstGeom>
-          <a:noFill/>
-          <a:ln>
-            <a:noFill/>
-          </a:ln>
-        </p:spPr>
-        <p:txBody>
-          <a:bodyPr spcFirstLastPara="1" wrap="square" lIns="91425" tIns="45700" rIns="91425" bIns="45700" anchor="t" anchorCtr="0">
-            <a:normAutofit/>
-          </a:bodyPr>
-          <a:lstStyle>
-            <a:lvl1pPr marL="457200" lvl="0" indent="-228600" algn="l">
-              <a:spcBef>
-                <a:spcPts val="280"/>
-              </a:spcBef>
-              <a:spcAft>
-                <a:spcPts val="0"/>
-              </a:spcAft>
-              <a:buClr>
-                <a:schemeClr val="dk1"/>
-              </a:buClr>
-              <a:buSzPts val="1400"/>
-              <a:buNone/>
-              <a:defRPr sz="1400"/>
-            </a:lvl1pPr>
-            <a:lvl2pPr marL="914400" lvl="1" indent="-228600" algn="l">
-              <a:spcBef>
-                <a:spcPts val="240"/>
-              </a:spcBef>
-              <a:spcAft>
-                <a:spcPts val="0"/>
-              </a:spcAft>
-              <a:buClr>
-                <a:schemeClr val="dk1"/>
-              </a:buClr>
-              <a:buSzPts val="1200"/>
-              <a:buNone/>
-              <a:defRPr sz="1200"/>
-            </a:lvl2pPr>
-            <a:lvl3pPr marL="1371600" lvl="2" indent="-228600" algn="l">
-              <a:spcBef>
-                <a:spcPts val="200"/>
-              </a:spcBef>
-              <a:spcAft>
-                <a:spcPts val="0"/>
-              </a:spcAft>
-              <a:buClr>
-                <a:schemeClr val="dk1"/>
-              </a:buClr>
-              <a:buSzPts val="1000"/>
-              <a:buNone/>
-              <a:defRPr sz="1000"/>
-            </a:lvl3pPr>
-            <a:lvl4pPr marL="1828800" lvl="3" indent="-228600" algn="l">
-              <a:spcBef>
-                <a:spcPts val="180"/>
-              </a:spcBef>
-              <a:spcAft>
-                <a:spcPts val="0"/>
-              </a:spcAft>
-              <a:buClr>
-                <a:schemeClr val="dk1"/>
-              </a:buClr>
-              <a:buSzPts val="900"/>
-              <a:buNone/>
-              <a:defRPr sz="900"/>
-            </a:lvl4pPr>
-            <a:lvl5pPr marL="2286000" lvl="4" indent="-228600" algn="l">
-              <a:spcBef>
-                <a:spcPts val="180"/>
-              </a:spcBef>
-              <a:spcAft>
-                <a:spcPts val="0"/>
-              </a:spcAft>
-              <a:buClr>
-                <a:schemeClr val="dk1"/>
-              </a:buClr>
-              <a:buSzPts val="900"/>
-              <a:buNone/>
-              <a:defRPr sz="900"/>
-            </a:lvl5pPr>
-            <a:lvl6pPr marL="2743200" lvl="5" indent="-228600" algn="l">
-              <a:spcBef>
-                <a:spcPts val="180"/>
-              </a:spcBef>
-              <a:spcAft>
-                <a:spcPts val="0"/>
-              </a:spcAft>
-              <a:buClr>
-                <a:schemeClr val="dk1"/>
-              </a:buClr>
-              <a:buSzPts val="900"/>
-              <a:buNone/>
-              <a:defRPr sz="900"/>
-            </a:lvl6pPr>
-            <a:lvl7pPr marL="3200400" lvl="6" indent="-228600" algn="l">
-              <a:spcBef>
-                <a:spcPts val="180"/>
-              </a:spcBef>
-              <a:spcAft>
-                <a:spcPts val="0"/>
-              </a:spcAft>
-              <a:buClr>
-                <a:schemeClr val="dk1"/>
-              </a:buClr>
-              <a:buSzPts val="900"/>
-              <a:buNone/>
-              <a:defRPr sz="900"/>
-            </a:lvl7pPr>
-            <a:lvl8pPr marL="3657600" lvl="7" indent="-228600" algn="l">
-              <a:spcBef>
-                <a:spcPts val="180"/>
-              </a:spcBef>
-              <a:spcAft>
-                <a:spcPts val="0"/>
-              </a:spcAft>
-              <a:buClr>
-                <a:schemeClr val="dk1"/>
-              </a:buClr>
-              <a:buSzPts val="900"/>
-              <a:buNone/>
-              <a:defRPr sz="900"/>
-            </a:lvl8pPr>
-            <a:lvl9pPr marL="4114800" lvl="8" indent="-228600" algn="l">
-              <a:spcBef>
-                <a:spcPts val="180"/>
-              </a:spcBef>
-              <a:spcAft>
-                <a:spcPts val="0"/>
-              </a:spcAft>
-              <a:buClr>
-                <a:schemeClr val="dk1"/>
-              </a:buClr>
-              <a:buSzPts val="900"/>
-              <a:buNone/>
-              <a:defRPr sz="900"/>
-            </a:lvl9pPr>
-          </a:lstStyle>
-          <a:p>
-            <a:endParaRPr/>
-          </a:p>
-        </p:txBody>
-      </p:sp>
-      <p:sp>
-        <p:nvSpPr>
-          <p:cNvPr id="58" name="Google Shape;58;p9"/>
-          <p:cNvSpPr txBox="1">
-            <a:spLocks noGrp="1"/>
-          </p:cNvSpPr>
-          <p:nvPr>
-            <p:ph type="dt" idx="10"/>
-          </p:nvPr>
-        </p:nvSpPr>
-        <p:spPr>
-          <a:xfrm>
-            <a:off x="457200" y="6356350"/>
-            <a:ext cx="2133600" cy="365125"/>
-          </a:xfrm>
-          <a:prstGeom prst="rect">
-            <a:avLst/>
-          </a:prstGeom>
-          <a:noFill/>
-          <a:ln>
-            <a:noFill/>
-          </a:ln>
-        </p:spPr>
-        <p:txBody>
-          <a:bodyPr spcFirstLastPara="1" wrap="square" lIns="91425" tIns="45700" rIns="91425" bIns="45700" anchor="ctr" anchorCtr="0">
-            <a:noAutofit/>
-          </a:bodyPr>
-          <a:lstStyle>
-            <a:lvl1pPr lvl="0" algn="l">
-              <a:spcBef>
-                <a:spcPts val="0"/>
-              </a:spcBef>
-              <a:spcAft>
-                <a:spcPts val="0"/>
-              </a:spcAft>
-              <a:buSzPts val="1400"/>
-              <a:buNone/>
-              <a:defRPr/>
-            </a:lvl1pPr>
-            <a:lvl2pPr lvl="1" algn="l">
-              <a:spcBef>
-                <a:spcPts val="0"/>
-              </a:spcBef>
-              <a:spcAft>
-                <a:spcPts val="0"/>
-              </a:spcAft>
-              <a:buSzPts val="1400"/>
-              <a:buNone/>
-              <a:defRPr/>
-            </a:lvl2pPr>
-            <a:lvl3pPr lvl="2" algn="l">
-              <a:spcBef>
-                <a:spcPts val="0"/>
-              </a:spcBef>
-              <a:spcAft>
-                <a:spcPts val="0"/>
-              </a:spcAft>
-              <a:buSzPts val="1400"/>
-              <a:buNone/>
-              <a:defRPr/>
-            </a:lvl3pPr>
-            <a:lvl4pPr lvl="3" algn="l">
-              <a:spcBef>
-                <a:spcPts val="0"/>
-              </a:spcBef>
-              <a:spcAft>
-                <a:spcPts val="0"/>
-              </a:spcAft>
-              <a:buSzPts val="1400"/>
-              <a:buNone/>
-              <a:defRPr/>
-            </a:lvl4pPr>
-            <a:lvl5pPr lvl="4" algn="l">
-              <a:spcBef>
-                <a:spcPts val="0"/>
-              </a:spcBef>
-              <a:spcAft>
-                <a:spcPts val="0"/>
-              </a:spcAft>
-              <a:buSzPts val="1400"/>
-              <a:buNone/>
-              <a:defRPr/>
-            </a:lvl5pPr>
-            <a:lvl6pPr lvl="5" algn="l">
-              <a:spcBef>
-                <a:spcPts val="0"/>
-              </a:spcBef>
-              <a:spcAft>
-                <a:spcPts val="0"/>
-              </a:spcAft>
-              <a:buSzPts val="1400"/>
-              <a:buNone/>
-              <a:defRPr/>
-            </a:lvl6pPr>
-            <a:lvl7pPr lvl="6" algn="l">
-              <a:spcBef>
-                <a:spcPts val="0"/>
-              </a:spcBef>
-              <a:spcAft>
-                <a:spcPts val="0"/>
-              </a:spcAft>
-              <a:buSzPts val="1400"/>
-              <a:buNone/>
-              <a:defRPr/>
-            </a:lvl7pPr>
-            <a:lvl8pPr lvl="7" algn="l">
-              <a:spcBef>
-                <a:spcPts val="0"/>
-              </a:spcBef>
-              <a:spcAft>
-                <a:spcPts val="0"/>
-              </a:spcAft>
-              <a:buSzPts val="1400"/>
-              <a:buNone/>
-              <a:defRPr/>
-            </a:lvl8pPr>
-            <a:lvl9pPr lvl="8" algn="l">
-              <a:spcBef>
-                <a:spcPts val="0"/>
-              </a:spcBef>
-              <a:spcAft>
-                <a:spcPts val="0"/>
-              </a:spcAft>
-              <a:buSzPts val="1400"/>
-              <a:buNone/>
-              <a:defRPr/>
-            </a:lvl9pPr>
-          </a:lstStyle>
-          <a:p>
-            <a:endParaRPr/>
-          </a:p>
-        </p:txBody>
-      </p:sp>
-      <p:sp>
-        <p:nvSpPr>
-          <p:cNvPr id="59" name="Google Shape;59;p9"/>
-          <p:cNvSpPr txBox="1">
-            <a:spLocks noGrp="1"/>
-          </p:cNvSpPr>
-          <p:nvPr>
-            <p:ph type="ftr" idx="11"/>
-          </p:nvPr>
-        </p:nvSpPr>
-        <p:spPr>
-          <a:xfrm>
-            <a:off x="3124200" y="6356350"/>
-            <a:ext cx="2895600" cy="365125"/>
-          </a:xfrm>
-          <a:prstGeom prst="rect">
-            <a:avLst/>
-          </a:prstGeom>
-          <a:noFill/>
-          <a:ln>
-            <a:noFill/>
-          </a:ln>
-        </p:spPr>
-        <p:txBody>
-          <a:bodyPr spcFirstLastPara="1" wrap="square" lIns="91425" tIns="45700" rIns="91425" bIns="45700" anchor="ctr" anchorCtr="0">
-            <a:noAutofit/>
-          </a:bodyPr>
-          <a:lstStyle>
-            <a:lvl1pPr lvl="0" algn="ctr">
-              <a:spcBef>
-                <a:spcPts val="0"/>
-              </a:spcBef>
-              <a:spcAft>
-                <a:spcPts val="0"/>
-              </a:spcAft>
-              <a:buSzPts val="1400"/>
-              <a:buNone/>
-              <a:defRPr/>
-            </a:lvl1pPr>
-            <a:lvl2pPr lvl="1" algn="l">
-              <a:spcBef>
-                <a:spcPts val="0"/>
-              </a:spcBef>
-              <a:spcAft>
-                <a:spcPts val="0"/>
-              </a:spcAft>
-              <a:buSzPts val="1400"/>
-              <a:buNone/>
-              <a:defRPr/>
-            </a:lvl2pPr>
-            <a:lvl3pPr lvl="2" algn="l">
-              <a:spcBef>
-                <a:spcPts val="0"/>
-              </a:spcBef>
-              <a:spcAft>
-                <a:spcPts val="0"/>
-              </a:spcAft>
-              <a:buSzPts val="1400"/>
-              <a:buNone/>
-              <a:defRPr/>
-            </a:lvl3pPr>
-            <a:lvl4pPr lvl="3" algn="l">
-              <a:spcBef>
-                <a:spcPts val="0"/>
-              </a:spcBef>
-              <a:spcAft>
-                <a:spcPts val="0"/>
-              </a:spcAft>
-              <a:buSzPts val="1400"/>
-              <a:buNone/>
-              <a:defRPr/>
-            </a:lvl4pPr>
-            <a:lvl5pPr lvl="4" algn="l">
-              <a:spcBef>
-                <a:spcPts val="0"/>
-              </a:spcBef>
-              <a:spcAft>
-                <a:spcPts val="0"/>
-              </a:spcAft>
-              <a:buSzPts val="1400"/>
-              <a:buNone/>
-              <a:defRPr/>
-            </a:lvl5pPr>
-            <a:lvl6pPr lvl="5" algn="l">
-              <a:spcBef>
-                <a:spcPts val="0"/>
-              </a:spcBef>
-              <a:spcAft>
-                <a:spcPts val="0"/>
-              </a:spcAft>
-              <a:buSzPts val="1400"/>
-              <a:buNone/>
-              <a:defRPr/>
-            </a:lvl6pPr>
-            <a:lvl7pPr lvl="6" algn="l">
-              <a:spcBef>
-                <a:spcPts val="0"/>
-              </a:spcBef>
-              <a:spcAft>
-                <a:spcPts val="0"/>
-              </a:spcAft>
-              <a:buSzPts val="1400"/>
-              <a:buNone/>
-              <a:defRPr/>
-            </a:lvl7pPr>
-            <a:lvl8pPr lvl="7" algn="l">
-              <a:spcBef>
-                <a:spcPts val="0"/>
-              </a:spcBef>
-              <a:spcAft>
-                <a:spcPts val="0"/>
-              </a:spcAft>
-              <a:buSzPts val="1400"/>
-              <a:buNone/>
-              <a:defRPr/>
-            </a:lvl8pPr>
-            <a:lvl9pPr lvl="8" algn="l">
-              <a:spcBef>
-                <a:spcPts val="0"/>
-              </a:spcBef>
-              <a:spcAft>
-                <a:spcPts val="0"/>
-              </a:spcAft>
-              <a:buSzPts val="1400"/>
-              <a:buNone/>
-              <a:defRPr/>
-            </a:lvl9pPr>
-          </a:lstStyle>
-          <a:p>
-            <a:endParaRPr/>
-          </a:p>
-        </p:txBody>
-      </p:sp>
-      <p:sp>
-        <p:nvSpPr>
-          <p:cNvPr id="60" name="Google Shape;60;p9"/>
-          <p:cNvSpPr txBox="1">
-            <a:spLocks noGrp="1"/>
-          </p:cNvSpPr>
-          <p:nvPr>
-            <p:ph type="sldNum" idx="12"/>
-          </p:nvPr>
-        </p:nvSpPr>
-        <p:spPr>
-          <a:xfrm>
-            <a:off x="6553200" y="6356350"/>
-            <a:ext cx="2133600" cy="365125"/>
-          </a:xfrm>
-          <a:prstGeom prst="rect">
-            <a:avLst/>
-          </a:prstGeom>
-          <a:noFill/>
-          <a:ln>
-            <a:noFill/>
-          </a:ln>
-        </p:spPr>
-        <p:txBody>
-          <a:bodyPr spcFirstLastPara="1" wrap="square" lIns="91425" tIns="45700" rIns="91425" bIns="45700" anchor="ctr" anchorCtr="0">
-            <a:noAutofit/>
-          </a:bodyPr>
-          <a:lstStyle>
-            <a:lvl1pPr marL="0" lvl="0" indent="0" algn="r">
-              <a:spcBef>
-                <a:spcPts val="0"/>
-              </a:spcBef>
-              <a:buNone/>
-              <a:defRPr/>
-            </a:lvl1pPr>
-            <a:lvl2pPr marL="0" lvl="1" indent="0" algn="r">
-              <a:spcBef>
-                <a:spcPts val="0"/>
-              </a:spcBef>
-              <a:buNone/>
-              <a:defRPr/>
-            </a:lvl2pPr>
-            <a:lvl3pPr marL="0" lvl="2" indent="0" algn="r">
-              <a:spcBef>
-                <a:spcPts val="0"/>
-              </a:spcBef>
-              <a:buNone/>
-              <a:defRPr/>
-            </a:lvl3pPr>
-            <a:lvl4pPr marL="0" lvl="3" indent="0" algn="r">
-              <a:spcBef>
-                <a:spcPts val="0"/>
-              </a:spcBef>
-              <a:buNone/>
-              <a:defRPr/>
-            </a:lvl4pPr>
-            <a:lvl5pPr marL="0" lvl="4" indent="0" algn="r">
-              <a:spcBef>
-                <a:spcPts val="0"/>
-              </a:spcBef>
-              <a:buNone/>
-              <a:defRPr/>
-            </a:lvl5pPr>
-            <a:lvl6pPr marL="0" lvl="5" indent="0" algn="r">
-              <a:spcBef>
-                <a:spcPts val="0"/>
-              </a:spcBef>
-              <a:buNone/>
-              <a:defRPr/>
-            </a:lvl6pPr>
-            <a:lvl7pPr marL="0" lvl="6" indent="0" algn="r">
-              <a:spcBef>
-                <a:spcPts val="0"/>
-              </a:spcBef>
-              <a:buNone/>
-              <a:defRPr/>
-            </a:lvl7pPr>
-            <a:lvl8pPr marL="0" lvl="7" indent="0" algn="r">
-              <a:spcBef>
-                <a:spcPts val="0"/>
-              </a:spcBef>
-              <a:buNone/>
-              <a:defRPr/>
-            </a:lvl8pPr>
-            <a:lvl9pPr marL="0" lvl="8" indent="0" algn="r">
-              <a:spcBef>
-                <a:spcPts val="0"/>
-              </a:spcBef>
-              <a:buNone/>
-              <a:defRPr/>
-            </a:lvl9pPr>
-          </a:lstStyle>
-          <a:p>
-            <a:pPr marL="0" lvl="0" indent="0" algn="r" rtl="0">
-              <a:spcBef>
-                <a:spcPts val="0"/>
-              </a:spcBef>
-              <a:spcAft>
-                <a:spcPts val="0"/>
-              </a:spcAft>
-              <a:buNone/>
-            </a:pPr>
-            <a:fld id="{00000000-1234-1234-1234-123412341234}" type="slidenum">
-              <a:rPr lang="en-US"/>
-              <a:t>‹Nº›</a:t>
-            </a:fld>
-            <a:endParaRPr/>
-          </a:p>
-        </p:txBody>
-      </p:sp>
-    </p:spTree>
-  </p:cSld>
-  <p:clrMapOvr>
-    <a:masterClrMapping/>
-  </p:clrMapOvr>
-</p:sldLayout>
-</file>
-
-<file path=ppt/slideLayouts/slideLayout4.xml><?xml version="1.0" encoding="utf-8"?>
-<p:sldLayout xmlns:a="http://schemas.openxmlformats.org/drawingml/2006/main" xmlns:r="http://schemas.openxmlformats.org/officeDocument/2006/relationships" xmlns:p="http://schemas.openxmlformats.org/presentationml/2006/main" matchingName="Picture with Caption" type="picTx">
-  <p:cSld name="PICTURE_WITH_CAPTION_TEXT">
-    <p:spTree>
-      <p:nvGrpSpPr>
-        <p:cNvPr id="1" name="Shape 61"/>
-        <p:cNvGrpSpPr/>
-        <p:nvPr/>
-      </p:nvGrpSpPr>
-      <p:grpSpPr>
-        <a:xfrm>
-          <a:off x="0" y="0"/>
-          <a:ext cx="0" cy="0"/>
-          <a:chOff x="0" y="0"/>
-          <a:chExt cx="0" cy="0"/>
-        </a:xfrm>
-      </p:grpSpPr>
-      <p:sp>
-        <p:nvSpPr>
-          <p:cNvPr id="62" name="Google Shape;62;p10"/>
-          <p:cNvSpPr txBox="1">
-            <a:spLocks noGrp="1"/>
-          </p:cNvSpPr>
-          <p:nvPr>
-            <p:ph type="title"/>
-          </p:nvPr>
-        </p:nvSpPr>
-        <p:spPr>
-          <a:xfrm>
-            <a:off x="1792288" y="4800600"/>
-            <a:ext cx="5486400" cy="566738"/>
-          </a:xfrm>
-          <a:prstGeom prst="rect">
-            <a:avLst/>
-          </a:prstGeom>
-          <a:noFill/>
-          <a:ln>
-            <a:noFill/>
-          </a:ln>
-        </p:spPr>
-        <p:txBody>
-          <a:bodyPr spcFirstLastPara="1" wrap="square" lIns="91425" tIns="45700" rIns="91425" bIns="45700" anchor="b" anchorCtr="0">
-            <a:normAutofit/>
-          </a:bodyPr>
-          <a:lstStyle>
-            <a:lvl1pPr lvl="0" algn="l">
-              <a:spcBef>
-                <a:spcPts val="0"/>
-              </a:spcBef>
-              <a:spcAft>
-                <a:spcPts val="0"/>
-              </a:spcAft>
-              <a:buClr>
-                <a:schemeClr val="dk1"/>
-              </a:buClr>
-              <a:buSzPts val="2000"/>
-              <a:buFont typeface="Calibri"/>
-              <a:buNone/>
-              <a:defRPr sz="2000" b="1"/>
-            </a:lvl1pPr>
-            <a:lvl2pPr lvl="1">
-              <a:spcBef>
-                <a:spcPts val="0"/>
-              </a:spcBef>
-              <a:spcAft>
-                <a:spcPts val="0"/>
-              </a:spcAft>
-              <a:buSzPts val="1400"/>
-              <a:buNone/>
-              <a:defRPr/>
-            </a:lvl2pPr>
-            <a:lvl3pPr lvl="2">
-              <a:spcBef>
-                <a:spcPts val="0"/>
-              </a:spcBef>
-              <a:spcAft>
-                <a:spcPts val="0"/>
-              </a:spcAft>
-              <a:buSzPts val="1400"/>
-              <a:buNone/>
-              <a:defRPr/>
-            </a:lvl3pPr>
-            <a:lvl4pPr lvl="3">
-              <a:spcBef>
-                <a:spcPts val="0"/>
-              </a:spcBef>
-              <a:spcAft>
-                <a:spcPts val="0"/>
-              </a:spcAft>
-              <a:buSzPts val="1400"/>
-              <a:buNone/>
-              <a:defRPr/>
-            </a:lvl4pPr>
-            <a:lvl5pPr lvl="4">
-              <a:spcBef>
-                <a:spcPts val="0"/>
-              </a:spcBef>
-              <a:spcAft>
-                <a:spcPts val="0"/>
-              </a:spcAft>
-              <a:buSzPts val="1400"/>
-              <a:buNone/>
-              <a:defRPr/>
-            </a:lvl5pPr>
-            <a:lvl6pPr lvl="5">
-              <a:spcBef>
-                <a:spcPts val="0"/>
-              </a:spcBef>
-              <a:spcAft>
-                <a:spcPts val="0"/>
-              </a:spcAft>
-              <a:buSzPts val="1400"/>
-              <a:buNone/>
-              <a:defRPr/>
-            </a:lvl6pPr>
-            <a:lvl7pPr lvl="6">
-              <a:spcBef>
-                <a:spcPts val="0"/>
-              </a:spcBef>
-              <a:spcAft>
-                <a:spcPts val="0"/>
-              </a:spcAft>
-              <a:buSzPts val="1400"/>
-              <a:buNone/>
-              <a:defRPr/>
-            </a:lvl7pPr>
-            <a:lvl8pPr lvl="7">
-              <a:spcBef>
-                <a:spcPts val="0"/>
-              </a:spcBef>
-              <a:spcAft>
-                <a:spcPts val="0"/>
-              </a:spcAft>
-              <a:buSzPts val="1400"/>
-              <a:buNone/>
-              <a:defRPr/>
-            </a:lvl8pPr>
-            <a:lvl9pPr lvl="8">
-              <a:spcBef>
-                <a:spcPts val="0"/>
-              </a:spcBef>
-              <a:spcAft>
-                <a:spcPts val="0"/>
-              </a:spcAft>
-              <a:buSzPts val="1400"/>
-              <a:buNone/>
-              <a:defRPr/>
-            </a:lvl9pPr>
-          </a:lstStyle>
-          <a:p>
-            <a:endParaRPr/>
-          </a:p>
-        </p:txBody>
-      </p:sp>
-      <p:sp>
-        <p:nvSpPr>
-          <p:cNvPr id="63" name="Google Shape;63;p10"/>
-          <p:cNvSpPr>
-            <a:spLocks noGrp="1"/>
-          </p:cNvSpPr>
-          <p:nvPr>
-            <p:ph type="pic" idx="2"/>
-          </p:nvPr>
-        </p:nvSpPr>
-        <p:spPr>
-          <a:xfrm>
-            <a:off x="1792288" y="612775"/>
-            <a:ext cx="5486400" cy="4114800"/>
-          </a:xfrm>
-          <a:prstGeom prst="rect">
-            <a:avLst/>
-          </a:prstGeom>
-          <a:noFill/>
-          <a:ln>
-            <a:noFill/>
-          </a:ln>
-        </p:spPr>
-      </p:sp>
-      <p:sp>
-        <p:nvSpPr>
-          <p:cNvPr id="64" name="Google Shape;64;p10"/>
-          <p:cNvSpPr txBox="1">
-            <a:spLocks noGrp="1"/>
-          </p:cNvSpPr>
-          <p:nvPr>
-            <p:ph type="body" idx="1"/>
-          </p:nvPr>
-        </p:nvSpPr>
-        <p:spPr>
-          <a:xfrm>
-            <a:off x="1792288" y="5367338"/>
-            <a:ext cx="5486400" cy="804862"/>
-          </a:xfrm>
-          <a:prstGeom prst="rect">
-            <a:avLst/>
-          </a:prstGeom>
-          <a:noFill/>
-          <a:ln>
-            <a:noFill/>
-          </a:ln>
-        </p:spPr>
-        <p:txBody>
-          <a:bodyPr spcFirstLastPara="1" wrap="square" lIns="91425" tIns="45700" rIns="91425" bIns="45700" anchor="t" anchorCtr="0">
-            <a:normAutofit/>
-          </a:bodyPr>
-          <a:lstStyle>
-            <a:lvl1pPr marL="457200" lvl="0" indent="-228600" algn="l">
-              <a:spcBef>
-                <a:spcPts val="280"/>
-              </a:spcBef>
-              <a:spcAft>
-                <a:spcPts val="0"/>
-              </a:spcAft>
-              <a:buClr>
-                <a:schemeClr val="dk1"/>
-              </a:buClr>
-              <a:buSzPts val="1400"/>
-              <a:buNone/>
-              <a:defRPr sz="1400"/>
-            </a:lvl1pPr>
-            <a:lvl2pPr marL="914400" lvl="1" indent="-228600" algn="l">
-              <a:spcBef>
-                <a:spcPts val="240"/>
-              </a:spcBef>
-              <a:spcAft>
-                <a:spcPts val="0"/>
-              </a:spcAft>
-              <a:buClr>
-                <a:schemeClr val="dk1"/>
-              </a:buClr>
-              <a:buSzPts val="1200"/>
-              <a:buNone/>
-              <a:defRPr sz="1200"/>
-            </a:lvl2pPr>
-            <a:lvl3pPr marL="1371600" lvl="2" indent="-228600" algn="l">
-              <a:spcBef>
-                <a:spcPts val="200"/>
-              </a:spcBef>
-              <a:spcAft>
-                <a:spcPts val="0"/>
-              </a:spcAft>
-              <a:buClr>
-                <a:schemeClr val="dk1"/>
-              </a:buClr>
-              <a:buSzPts val="1000"/>
-              <a:buNone/>
-              <a:defRPr sz="1000"/>
-            </a:lvl3pPr>
-            <a:lvl4pPr marL="1828800" lvl="3" indent="-228600" algn="l">
-              <a:spcBef>
-                <a:spcPts val="180"/>
-              </a:spcBef>
-              <a:spcAft>
-                <a:spcPts val="0"/>
-              </a:spcAft>
-              <a:buClr>
-                <a:schemeClr val="dk1"/>
-              </a:buClr>
-              <a:buSzPts val="900"/>
-              <a:buNone/>
-              <a:defRPr sz="900"/>
-            </a:lvl4pPr>
-            <a:lvl5pPr marL="2286000" lvl="4" indent="-228600" algn="l">
-              <a:spcBef>
-                <a:spcPts val="180"/>
-              </a:spcBef>
-              <a:spcAft>
-                <a:spcPts val="0"/>
-              </a:spcAft>
-              <a:buClr>
-                <a:schemeClr val="dk1"/>
-              </a:buClr>
-              <a:buSzPts val="900"/>
-              <a:buNone/>
-              <a:defRPr sz="900"/>
-            </a:lvl5pPr>
-            <a:lvl6pPr marL="2743200" lvl="5" indent="-228600" algn="l">
-              <a:spcBef>
-                <a:spcPts val="180"/>
-              </a:spcBef>
-              <a:spcAft>
-                <a:spcPts val="0"/>
-              </a:spcAft>
-              <a:buClr>
-                <a:schemeClr val="dk1"/>
-              </a:buClr>
-              <a:buSzPts val="900"/>
-              <a:buNone/>
-              <a:defRPr sz="900"/>
-            </a:lvl6pPr>
-            <a:lvl7pPr marL="3200400" lvl="6" indent="-228600" algn="l">
-              <a:spcBef>
-                <a:spcPts val="180"/>
-              </a:spcBef>
-              <a:spcAft>
-                <a:spcPts val="0"/>
-              </a:spcAft>
-              <a:buClr>
-                <a:schemeClr val="dk1"/>
-              </a:buClr>
-              <a:buSzPts val="900"/>
-              <a:buNone/>
-              <a:defRPr sz="900"/>
-            </a:lvl7pPr>
-            <a:lvl8pPr marL="3657600" lvl="7" indent="-228600" algn="l">
-              <a:spcBef>
-                <a:spcPts val="180"/>
-              </a:spcBef>
-              <a:spcAft>
-                <a:spcPts val="0"/>
-              </a:spcAft>
-              <a:buClr>
-                <a:schemeClr val="dk1"/>
-              </a:buClr>
-              <a:buSzPts val="900"/>
-              <a:buNone/>
-              <a:defRPr sz="900"/>
-            </a:lvl8pPr>
-            <a:lvl9pPr marL="4114800" lvl="8" indent="-228600" algn="l">
-              <a:spcBef>
-                <a:spcPts val="180"/>
-              </a:spcBef>
-              <a:spcAft>
-                <a:spcPts val="0"/>
-              </a:spcAft>
-              <a:buClr>
-                <a:schemeClr val="dk1"/>
-              </a:buClr>
-              <a:buSzPts val="900"/>
-              <a:buNone/>
-              <a:defRPr sz="900"/>
-            </a:lvl9pPr>
-          </a:lstStyle>
-          <a:p>
-            <a:endParaRPr/>
-          </a:p>
-        </p:txBody>
-      </p:sp>
-      <p:sp>
-        <p:nvSpPr>
-          <p:cNvPr id="65" name="Google Shape;65;p10"/>
-          <p:cNvSpPr txBox="1">
-            <a:spLocks noGrp="1"/>
-          </p:cNvSpPr>
-          <p:nvPr>
-            <p:ph type="dt" idx="10"/>
-          </p:nvPr>
-        </p:nvSpPr>
-        <p:spPr>
-          <a:xfrm>
-            <a:off x="457200" y="6356350"/>
-            <a:ext cx="2133600" cy="365125"/>
-          </a:xfrm>
-          <a:prstGeom prst="rect">
-            <a:avLst/>
-          </a:prstGeom>
-          <a:noFill/>
-          <a:ln>
-            <a:noFill/>
-          </a:ln>
-        </p:spPr>
-        <p:txBody>
-          <a:bodyPr spcFirstLastPara="1" wrap="square" lIns="91425" tIns="45700" rIns="91425" bIns="45700" anchor="ctr" anchorCtr="0">
-            <a:noAutofit/>
-          </a:bodyPr>
-          <a:lstStyle>
-            <a:lvl1pPr lvl="0" algn="l">
-              <a:spcBef>
-                <a:spcPts val="0"/>
-              </a:spcBef>
-              <a:spcAft>
-                <a:spcPts val="0"/>
-              </a:spcAft>
-              <a:buSzPts val="1400"/>
-              <a:buNone/>
-              <a:defRPr/>
-            </a:lvl1pPr>
-            <a:lvl2pPr lvl="1" algn="l">
-              <a:spcBef>
-                <a:spcPts val="0"/>
-              </a:spcBef>
-              <a:spcAft>
-                <a:spcPts val="0"/>
-              </a:spcAft>
-              <a:buSzPts val="1400"/>
-              <a:buNone/>
-              <a:defRPr/>
-            </a:lvl2pPr>
-            <a:lvl3pPr lvl="2" algn="l">
-              <a:spcBef>
-                <a:spcPts val="0"/>
-              </a:spcBef>
-              <a:spcAft>
-                <a:spcPts val="0"/>
-              </a:spcAft>
-              <a:buSzPts val="1400"/>
-              <a:buNone/>
-              <a:defRPr/>
-            </a:lvl3pPr>
-            <a:lvl4pPr lvl="3" algn="l">
-              <a:spcBef>
-                <a:spcPts val="0"/>
-              </a:spcBef>
-              <a:spcAft>
-                <a:spcPts val="0"/>
-              </a:spcAft>
-              <a:buSzPts val="1400"/>
-              <a:buNone/>
-              <a:defRPr/>
-            </a:lvl4pPr>
-            <a:lvl5pPr lvl="4" algn="l">
-              <a:spcBef>
-                <a:spcPts val="0"/>
-              </a:spcBef>
-              <a:spcAft>
-                <a:spcPts val="0"/>
-              </a:spcAft>
-              <a:buSzPts val="1400"/>
-              <a:buNone/>
-              <a:defRPr/>
-            </a:lvl5pPr>
-            <a:lvl6pPr lvl="5" algn="l">
-              <a:spcBef>
-                <a:spcPts val="0"/>
-              </a:spcBef>
-              <a:spcAft>
-                <a:spcPts val="0"/>
-              </a:spcAft>
-              <a:buSzPts val="1400"/>
-              <a:buNone/>
-              <a:defRPr/>
-            </a:lvl6pPr>
-            <a:lvl7pPr lvl="6" algn="l">
-              <a:spcBef>
-                <a:spcPts val="0"/>
-              </a:spcBef>
-              <a:spcAft>
-                <a:spcPts val="0"/>
-              </a:spcAft>
-              <a:buSzPts val="1400"/>
-              <a:buNone/>
-              <a:defRPr/>
-            </a:lvl7pPr>
-            <a:lvl8pPr lvl="7" algn="l">
-              <a:spcBef>
-                <a:spcPts val="0"/>
-              </a:spcBef>
-              <a:spcAft>
-                <a:spcPts val="0"/>
-              </a:spcAft>
-              <a:buSzPts val="1400"/>
-              <a:buNone/>
-              <a:defRPr/>
-            </a:lvl8pPr>
-            <a:lvl9pPr lvl="8" algn="l">
-              <a:spcBef>
-                <a:spcPts val="0"/>
-              </a:spcBef>
-              <a:spcAft>
-                <a:spcPts val="0"/>
-              </a:spcAft>
-              <a:buSzPts val="1400"/>
-              <a:buNone/>
-              <a:defRPr/>
-            </a:lvl9pPr>
-          </a:lstStyle>
-          <a:p>
-            <a:endParaRPr/>
-          </a:p>
-        </p:txBody>
-      </p:sp>
-      <p:sp>
-        <p:nvSpPr>
-          <p:cNvPr id="66" name="Google Shape;66;p10"/>
-          <p:cNvSpPr txBox="1">
-            <a:spLocks noGrp="1"/>
-          </p:cNvSpPr>
-          <p:nvPr>
-            <p:ph type="ftr" idx="11"/>
-          </p:nvPr>
-        </p:nvSpPr>
-        <p:spPr>
-          <a:xfrm>
-            <a:off x="3124200" y="6356350"/>
-            <a:ext cx="2895600" cy="365125"/>
-          </a:xfrm>
-          <a:prstGeom prst="rect">
-            <a:avLst/>
-          </a:prstGeom>
-          <a:noFill/>
-          <a:ln>
-            <a:noFill/>
-          </a:ln>
-        </p:spPr>
-        <p:txBody>
-          <a:bodyPr spcFirstLastPara="1" wrap="square" lIns="91425" tIns="45700" rIns="91425" bIns="45700" anchor="ctr" anchorCtr="0">
-            <a:noAutofit/>
-          </a:bodyPr>
-          <a:lstStyle>
-            <a:lvl1pPr lvl="0" algn="ctr">
-              <a:spcBef>
-                <a:spcPts val="0"/>
-              </a:spcBef>
-              <a:spcAft>
-                <a:spcPts val="0"/>
-              </a:spcAft>
-              <a:buSzPts val="1400"/>
-              <a:buNone/>
-              <a:defRPr/>
-            </a:lvl1pPr>
-            <a:lvl2pPr lvl="1" algn="l">
-              <a:spcBef>
-                <a:spcPts val="0"/>
-              </a:spcBef>
-              <a:spcAft>
-                <a:spcPts val="0"/>
-              </a:spcAft>
-              <a:buSzPts val="1400"/>
-              <a:buNone/>
-              <a:defRPr/>
-            </a:lvl2pPr>
-            <a:lvl3pPr lvl="2" algn="l">
-              <a:spcBef>
-                <a:spcPts val="0"/>
-              </a:spcBef>
-              <a:spcAft>
-                <a:spcPts val="0"/>
-              </a:spcAft>
-              <a:buSzPts val="1400"/>
-              <a:buNone/>
-              <a:defRPr/>
-            </a:lvl3pPr>
-            <a:lvl4pPr lvl="3" algn="l">
-              <a:spcBef>
-                <a:spcPts val="0"/>
-              </a:spcBef>
-              <a:spcAft>
-                <a:spcPts val="0"/>
-              </a:spcAft>
-              <a:buSzPts val="1400"/>
-              <a:buNone/>
-              <a:defRPr/>
-            </a:lvl4pPr>
-            <a:lvl5pPr lvl="4" algn="l">
-              <a:spcBef>
-                <a:spcPts val="0"/>
-              </a:spcBef>
-              <a:spcAft>
-                <a:spcPts val="0"/>
-              </a:spcAft>
-              <a:buSzPts val="1400"/>
-              <a:buNone/>
-              <a:defRPr/>
-            </a:lvl5pPr>
-            <a:lvl6pPr lvl="5" algn="l">
-              <a:spcBef>
-                <a:spcPts val="0"/>
-              </a:spcBef>
-              <a:spcAft>
-                <a:spcPts val="0"/>
-              </a:spcAft>
-              <a:buSzPts val="1400"/>
-              <a:buNone/>
-              <a:defRPr/>
-            </a:lvl6pPr>
-            <a:lvl7pPr lvl="6" algn="l">
-              <a:spcBef>
-                <a:spcPts val="0"/>
-              </a:spcBef>
-              <a:spcAft>
-                <a:spcPts val="0"/>
-              </a:spcAft>
-              <a:buSzPts val="1400"/>
-              <a:buNone/>
-              <a:defRPr/>
-            </a:lvl7pPr>
-            <a:lvl8pPr lvl="7" algn="l">
-              <a:spcBef>
-                <a:spcPts val="0"/>
-              </a:spcBef>
-              <a:spcAft>
-                <a:spcPts val="0"/>
-              </a:spcAft>
-              <a:buSzPts val="1400"/>
-              <a:buNone/>
-              <a:defRPr/>
-            </a:lvl8pPr>
-            <a:lvl9pPr lvl="8" algn="l">
-              <a:spcBef>
-                <a:spcPts val="0"/>
-              </a:spcBef>
-              <a:spcAft>
-                <a:spcPts val="0"/>
-              </a:spcAft>
-              <a:buSzPts val="1400"/>
-              <a:buNone/>
-              <a:defRPr/>
-            </a:lvl9pPr>
-          </a:lstStyle>
-          <a:p>
-            <a:endParaRPr/>
-          </a:p>
-        </p:txBody>
-      </p:sp>
-      <p:sp>
-        <p:nvSpPr>
-          <p:cNvPr id="67" name="Google Shape;67;p10"/>
-          <p:cNvSpPr txBox="1">
-            <a:spLocks noGrp="1"/>
-          </p:cNvSpPr>
-          <p:nvPr>
-            <p:ph type="sldNum" idx="12"/>
-          </p:nvPr>
-        </p:nvSpPr>
-        <p:spPr>
-          <a:xfrm>
-            <a:off x="6553200" y="6356350"/>
-            <a:ext cx="2133600" cy="365125"/>
-          </a:xfrm>
-          <a:prstGeom prst="rect">
-            <a:avLst/>
-          </a:prstGeom>
-          <a:noFill/>
-          <a:ln>
-            <a:noFill/>
-          </a:ln>
-        </p:spPr>
-        <p:txBody>
-          <a:bodyPr spcFirstLastPara="1" wrap="square" lIns="91425" tIns="45700" rIns="91425" bIns="45700" anchor="ctr" anchorCtr="0">
-            <a:noAutofit/>
-          </a:bodyPr>
-          <a:lstStyle>
-            <a:lvl1pPr marL="0" lvl="0" indent="0" algn="r">
-              <a:spcBef>
-                <a:spcPts val="0"/>
-              </a:spcBef>
-              <a:buNone/>
-              <a:defRPr/>
-            </a:lvl1pPr>
-            <a:lvl2pPr marL="0" lvl="1" indent="0" algn="r">
-              <a:spcBef>
-                <a:spcPts val="0"/>
-              </a:spcBef>
-              <a:buNone/>
-              <a:defRPr/>
-            </a:lvl2pPr>
-            <a:lvl3pPr marL="0" lvl="2" indent="0" algn="r">
-              <a:spcBef>
-                <a:spcPts val="0"/>
-              </a:spcBef>
-              <a:buNone/>
-              <a:defRPr/>
-            </a:lvl3pPr>
-            <a:lvl4pPr marL="0" lvl="3" indent="0" algn="r">
-              <a:spcBef>
-                <a:spcPts val="0"/>
-              </a:spcBef>
-              <a:buNone/>
-              <a:defRPr/>
-            </a:lvl4pPr>
-            <a:lvl5pPr marL="0" lvl="4" indent="0" algn="r">
-              <a:spcBef>
-                <a:spcPts val="0"/>
-              </a:spcBef>
-              <a:buNone/>
-              <a:defRPr/>
-            </a:lvl5pPr>
-            <a:lvl6pPr marL="0" lvl="5" indent="0" algn="r">
-              <a:spcBef>
-                <a:spcPts val="0"/>
-              </a:spcBef>
-              <a:buNone/>
-              <a:defRPr/>
-            </a:lvl6pPr>
-            <a:lvl7pPr marL="0" lvl="6" indent="0" algn="r">
-              <a:spcBef>
-                <a:spcPts val="0"/>
-              </a:spcBef>
-              <a:buNone/>
-              <a:defRPr/>
-            </a:lvl7pPr>
-            <a:lvl8pPr marL="0" lvl="7" indent="0" algn="r">
-              <a:spcBef>
-                <a:spcPts val="0"/>
-              </a:spcBef>
-              <a:buNone/>
-              <a:defRPr/>
-            </a:lvl8pPr>
-            <a:lvl9pPr marL="0" lvl="8" indent="0" algn="r">
-              <a:spcBef>
-                <a:spcPts val="0"/>
-              </a:spcBef>
-              <a:buNone/>
-              <a:defRPr/>
-            </a:lvl9pPr>
-          </a:lstStyle>
-          <a:p>
-            <a:pPr marL="0" lvl="0" indent="0" algn="r" rtl="0">
-              <a:spcBef>
-                <a:spcPts val="0"/>
-              </a:spcBef>
-              <a:spcAft>
-                <a:spcPts val="0"/>
-              </a:spcAft>
-              <a:buNone/>
-            </a:pPr>
-            <a:fld id="{00000000-1234-1234-1234-123412341234}" type="slidenum">
-              <a:rPr lang="en-US"/>
-              <a:t>‹Nº›</a:t>
-            </a:fld>
-            <a:endParaRPr/>
-          </a:p>
-        </p:txBody>
-      </p:sp>
-    </p:spTree>
-  </p:cSld>
-  <p:clrMapOvr>
-    <a:masterClrMapping/>
-  </p:clrMapOvr>
-</p:sldLayout>
-</file>
-
-<file path=ppt/slideLayouts/slideLayout5.xml><?xml version="1.0" encoding="utf-8"?>
 <p:sldLayout xmlns:a="http://schemas.openxmlformats.org/drawingml/2006/main" xmlns:r="http://schemas.openxmlformats.org/officeDocument/2006/relationships" xmlns:p="http://schemas.openxmlformats.org/presentationml/2006/main" matchingName="Title and Vertical Text" type="vertTx">
   <p:cSld name="VERTICAL_TEXT">
     <p:spTree>
@@ -4926,7 +2596,7 @@
 </p:sldLayout>
 </file>
 
-<file path=ppt/slideLayouts/slideLayout6.xml><?xml version="1.0" encoding="utf-8"?>
+<file path=ppt/slideLayouts/slideLayout3.xml><?xml version="1.0" encoding="utf-8"?>
 <p:sldLayout xmlns:a="http://schemas.openxmlformats.org/drawingml/2006/main" xmlns:r="http://schemas.openxmlformats.org/officeDocument/2006/relationships" xmlns:p="http://schemas.openxmlformats.org/presentationml/2006/main" matchingName="Vertical Title and Text" type="vertTitleAndTx">
   <p:cSld name="VERTICAL_TITLE_AND_VERTICAL_TEXT">
     <p:spTree>
@@ -6631,11 +4301,8 @@
   <p:clrMap bg1="lt1" tx1="dk1" bg2="dk2" tx2="lt2" accent1="accent1" accent2="accent2" accent3="accent3" accent4="accent4" accent5="accent5" accent6="accent6" hlink="hlink" folHlink="folHlink"/>
   <p:sldLayoutIdLst>
     <p:sldLayoutId id="2147483648" r:id="rId1"/>
-    <p:sldLayoutId id="2147483654" r:id="rId2"/>
-    <p:sldLayoutId id="2147483655" r:id="rId3"/>
-    <p:sldLayoutId id="2147483656" r:id="rId4"/>
-    <p:sldLayoutId id="2147483657" r:id="rId5"/>
-    <p:sldLayoutId id="2147483658" r:id="rId6"/>
+    <p:sldLayoutId id="2147483657" r:id="rId2"/>
+    <p:sldLayoutId id="2147483658" r:id="rId3"/>
   </p:sldLayoutIdLst>
   <p:hf sldNum="0" hdr="0" ftr="0" dt="0"/>
   <p:txStyles>
@@ -7584,7 +5251,7 @@
   <p:cSld>
     <p:spTree>
       <p:nvGrpSpPr>
-        <p:cNvPr id="1" name="Shape 93"/>
+        <p:cNvPr id="1" name="Shape 149"/>
         <p:cNvGrpSpPr/>
         <p:nvPr/>
       </p:nvGrpSpPr>
@@ -7598,14 +5265,14 @@
       </p:grpSpPr>
       <p:sp>
         <p:nvSpPr>
-          <p:cNvPr id="94" name="Google Shape;94;p14"/>
+          <p:cNvPr id="150" name="Google Shape;150;p19"/>
           <p:cNvSpPr/>
           <p:nvPr/>
         </p:nvSpPr>
         <p:spPr>
           <a:xfrm>
-            <a:off x="18002250" y="0"/>
-            <a:ext cx="285750" cy="10287000"/>
+            <a:off x="0" y="0"/>
+            <a:ext cx="1028700" cy="10287000"/>
           </a:xfrm>
           <a:prstGeom prst="rect">
             <a:avLst/>
@@ -7646,380 +5313,13 @@
       </p:sp>
       <p:sp>
         <p:nvSpPr>
-          <p:cNvPr id="96" name="Google Shape;96;p14"/>
-          <p:cNvSpPr txBox="1"/>
-          <p:nvPr/>
-        </p:nvSpPr>
-        <p:spPr>
-          <a:xfrm>
-            <a:off x="9309426" y="1931376"/>
-            <a:ext cx="7311139" cy="738664"/>
-          </a:xfrm>
-          <a:prstGeom prst="rect">
-            <a:avLst/>
-          </a:prstGeom>
-          <a:noFill/>
-          <a:ln>
-            <a:noFill/>
-          </a:ln>
-        </p:spPr>
-        <p:txBody>
-          <a:bodyPr spcFirstLastPara="1" wrap="square" lIns="0" tIns="0" rIns="0" bIns="0" anchor="t" anchorCtr="0">
-            <a:spAutoFit/>
-          </a:bodyPr>
-          <a:lstStyle/>
-          <a:p>
-            <a:r>
-              <a:rPr lang="es-ES" sz="4800" dirty="0"/>
-              <a:t>¿Te gusta ir a la playa ? </a:t>
-            </a:r>
-          </a:p>
-        </p:txBody>
-      </p:sp>
-      <p:pic>
-        <p:nvPicPr>
-          <p:cNvPr id="2" name="Imagen 1"/>
-          <p:cNvPicPr>
-            <a:picLocks noChangeAspect="1"/>
-          </p:cNvPicPr>
-          <p:nvPr/>
-        </p:nvPicPr>
-        <p:blipFill>
-          <a:blip r:embed="rId3">
-            <a:extLst>
-              <a:ext uri="{28A0092B-C50C-407E-A947-70E740481C1C}">
-                <a14:useLocalDpi xmlns:a14="http://schemas.microsoft.com/office/drawing/2010/main" val="0"/>
-              </a:ext>
-            </a:extLst>
-          </a:blip>
-          <a:stretch>
-            <a:fillRect/>
-          </a:stretch>
-        </p:blipFill>
-        <p:spPr>
-          <a:xfrm>
-            <a:off x="0" y="0"/>
-            <a:ext cx="8865221" cy="6108098"/>
-          </a:xfrm>
-          <a:prstGeom prst="rect">
-            <a:avLst/>
-          </a:prstGeom>
-        </p:spPr>
-      </p:pic>
-      <p:pic>
-        <p:nvPicPr>
-          <p:cNvPr id="3" name="Imagen 2"/>
-          <p:cNvPicPr>
-            <a:picLocks noChangeAspect="1"/>
-          </p:cNvPicPr>
-          <p:nvPr/>
-        </p:nvPicPr>
-        <p:blipFill>
-          <a:blip r:embed="rId4">
-            <a:extLst>
-              <a:ext uri="{28A0092B-C50C-407E-A947-70E740481C1C}">
-                <a14:useLocalDpi xmlns:a14="http://schemas.microsoft.com/office/drawing/2010/main" val="0"/>
-              </a:ext>
-            </a:extLst>
-          </a:blip>
-          <a:stretch>
-            <a:fillRect/>
-          </a:stretch>
-        </p:blipFill>
-        <p:spPr>
-          <a:xfrm>
-            <a:off x="8865221" y="4201596"/>
-            <a:ext cx="9137029" cy="6085404"/>
-          </a:xfrm>
-          <a:prstGeom prst="rect">
-            <a:avLst/>
-          </a:prstGeom>
-        </p:spPr>
-      </p:pic>
-      <p:sp>
-        <p:nvSpPr>
-          <p:cNvPr id="13" name="Google Shape;96;p14"/>
-          <p:cNvSpPr txBox="1"/>
-          <p:nvPr/>
-        </p:nvSpPr>
-        <p:spPr>
-          <a:xfrm>
-            <a:off x="847024" y="7244298"/>
-            <a:ext cx="7732447" cy="1477328"/>
-          </a:xfrm>
-          <a:prstGeom prst="rect">
-            <a:avLst/>
-          </a:prstGeom>
-          <a:noFill/>
-          <a:ln>
-            <a:noFill/>
-          </a:ln>
-        </p:spPr>
-        <p:txBody>
-          <a:bodyPr spcFirstLastPara="1" wrap="square" lIns="0" tIns="0" rIns="0" bIns="0" anchor="t" anchorCtr="0">
-            <a:spAutoFit/>
-          </a:bodyPr>
-          <a:lstStyle/>
-          <a:p>
-            <a:r>
-              <a:rPr lang="es-ES" sz="4800" dirty="0"/>
-              <a:t>¿Te gustaría ir a un hotel cerca de  la playa?</a:t>
-            </a:r>
-          </a:p>
-        </p:txBody>
-      </p:sp>
-    </p:spTree>
-  </p:cSld>
-  <p:clrMapOvr>
-    <a:masterClrMapping/>
-  </p:clrMapOvr>
-</p:sld>
-</file>
-
-<file path=ppt/slides/slide3.xml><?xml version="1.0" encoding="utf-8"?>
-<p:sld xmlns:a="http://schemas.openxmlformats.org/drawingml/2006/main" xmlns:r="http://schemas.openxmlformats.org/officeDocument/2006/relationships" xmlns:p="http://schemas.openxmlformats.org/presentationml/2006/main">
-  <p:cSld>
-    <p:spTree>
-      <p:nvGrpSpPr>
-        <p:cNvPr id="1" name="Shape 93"/>
-        <p:cNvGrpSpPr/>
-        <p:nvPr/>
-      </p:nvGrpSpPr>
-      <p:grpSpPr>
-        <a:xfrm>
-          <a:off x="0" y="0"/>
-          <a:ext cx="0" cy="0"/>
-          <a:chOff x="0" y="0"/>
-          <a:chExt cx="0" cy="0"/>
-        </a:xfrm>
-      </p:grpSpPr>
-      <p:sp>
-        <p:nvSpPr>
-          <p:cNvPr id="94" name="Google Shape;94;p14"/>
+          <p:cNvPr id="151" name="Google Shape;151;p19"/>
           <p:cNvSpPr/>
           <p:nvPr/>
         </p:nvSpPr>
         <p:spPr>
           <a:xfrm>
-            <a:off x="18002250" y="0"/>
-            <a:ext cx="285750" cy="10287000"/>
-          </a:xfrm>
-          <a:prstGeom prst="rect">
-            <a:avLst/>
-          </a:prstGeom>
-          <a:gradFill>
-            <a:gsLst>
-              <a:gs pos="0">
-                <a:srgbClr val="14C5C3"/>
-              </a:gs>
-              <a:gs pos="100000">
-                <a:srgbClr val="4E7AD9"/>
-              </a:gs>
-            </a:gsLst>
-            <a:lin ang="2700000" scaled="0"/>
-          </a:gradFill>
-          <a:ln>
-            <a:noFill/>
-          </a:ln>
-        </p:spPr>
-        <p:txBody>
-          <a:bodyPr spcFirstLastPara="1" wrap="square" lIns="91425" tIns="91425" rIns="91425" bIns="91425" anchor="ctr" anchorCtr="0">
-            <a:noAutofit/>
-          </a:bodyPr>
-          <a:lstStyle/>
-          <a:p>
-            <a:pPr marL="0" lvl="0" indent="0" algn="l" rtl="0">
-              <a:spcBef>
-                <a:spcPts val="0"/>
-              </a:spcBef>
-              <a:spcAft>
-                <a:spcPts val="0"/>
-              </a:spcAft>
-              <a:buNone/>
-            </a:pPr>
-            <a:endParaRPr/>
-          </a:p>
-        </p:txBody>
-      </p:sp>
-      <p:sp>
-        <p:nvSpPr>
-          <p:cNvPr id="96" name="Google Shape;96;p14"/>
-          <p:cNvSpPr txBox="1"/>
-          <p:nvPr/>
-        </p:nvSpPr>
-        <p:spPr>
-          <a:xfrm>
-            <a:off x="8964707" y="1116440"/>
-            <a:ext cx="14862345" cy="2031325"/>
-          </a:xfrm>
-          <a:prstGeom prst="rect">
-            <a:avLst/>
-          </a:prstGeom>
-          <a:noFill/>
-          <a:ln>
-            <a:noFill/>
-          </a:ln>
-        </p:spPr>
-        <p:txBody>
-          <a:bodyPr spcFirstLastPara="1" wrap="square" lIns="0" tIns="0" rIns="0" bIns="0" anchor="t" anchorCtr="0">
-            <a:spAutoFit/>
-          </a:bodyPr>
-          <a:lstStyle/>
-          <a:p>
-            <a:r>
-              <a:rPr lang="es-ES" sz="3600" dirty="0"/>
-              <a:t>Si </a:t>
-            </a:r>
-            <a:r>
-              <a:rPr lang="es-ES" sz="4400" dirty="0"/>
-              <a:t>vas a construir un hotel cerca de </a:t>
-            </a:r>
-          </a:p>
-          <a:p>
-            <a:r>
-              <a:rPr lang="es-ES" sz="4400" dirty="0"/>
-              <a:t>la playa es necesario conocer si </a:t>
-            </a:r>
-          </a:p>
-          <a:p>
-            <a:r>
-              <a:rPr lang="es-ES" sz="4400" dirty="0"/>
-              <a:t>será afectado por la erosión costera</a:t>
-            </a:r>
-          </a:p>
-        </p:txBody>
-      </p:sp>
-      <p:pic>
-        <p:nvPicPr>
-          <p:cNvPr id="4" name="Imagen 3"/>
-          <p:cNvPicPr>
-            <a:picLocks noChangeAspect="1"/>
-          </p:cNvPicPr>
-          <p:nvPr/>
-        </p:nvPicPr>
-        <p:blipFill>
-          <a:blip r:embed="rId3">
-            <a:extLst>
-              <a:ext uri="{28A0092B-C50C-407E-A947-70E740481C1C}">
-                <a14:useLocalDpi xmlns:a14="http://schemas.microsoft.com/office/drawing/2010/main" val="0"/>
-              </a:ext>
-            </a:extLst>
-          </a:blip>
-          <a:stretch>
-            <a:fillRect/>
-          </a:stretch>
-        </p:blipFill>
-        <p:spPr>
-          <a:xfrm>
-            <a:off x="0" y="1"/>
-            <a:ext cx="8821271" cy="5991726"/>
-          </a:xfrm>
-          <a:prstGeom prst="rect">
-            <a:avLst/>
-          </a:prstGeom>
-        </p:spPr>
-      </p:pic>
-      <p:pic>
-        <p:nvPicPr>
-          <p:cNvPr id="5" name="Imagen 4"/>
-          <p:cNvPicPr>
-            <a:picLocks noChangeAspect="1"/>
-          </p:cNvPicPr>
-          <p:nvPr/>
-        </p:nvPicPr>
-        <p:blipFill>
-          <a:blip r:embed="rId4">
-            <a:extLst>
-              <a:ext uri="{28A0092B-C50C-407E-A947-70E740481C1C}">
-                <a14:useLocalDpi xmlns:a14="http://schemas.microsoft.com/office/drawing/2010/main" val="0"/>
-              </a:ext>
-            </a:extLst>
-          </a:blip>
-          <a:stretch>
-            <a:fillRect/>
-          </a:stretch>
-        </p:blipFill>
-        <p:spPr>
-          <a:xfrm>
-            <a:off x="8964707" y="4264205"/>
-            <a:ext cx="9037544" cy="6022796"/>
-          </a:xfrm>
-          <a:prstGeom prst="rect">
-            <a:avLst/>
-          </a:prstGeom>
-        </p:spPr>
-      </p:pic>
-      <p:sp>
-        <p:nvSpPr>
-          <p:cNvPr id="10" name="Google Shape;96;p14"/>
-          <p:cNvSpPr txBox="1"/>
-          <p:nvPr/>
-        </p:nvSpPr>
-        <p:spPr>
-          <a:xfrm>
-            <a:off x="456641" y="6705600"/>
-            <a:ext cx="7835153" cy="2954655"/>
-          </a:xfrm>
-          <a:prstGeom prst="rect">
-            <a:avLst/>
-          </a:prstGeom>
-          <a:noFill/>
-          <a:ln>
-            <a:noFill/>
-          </a:ln>
-        </p:spPr>
-        <p:txBody>
-          <a:bodyPr spcFirstLastPara="1" wrap="square" lIns="0" tIns="0" rIns="0" bIns="0" anchor="t" anchorCtr="0">
-            <a:spAutoFit/>
-          </a:bodyPr>
-          <a:lstStyle/>
-          <a:p>
-            <a:r>
-              <a:rPr lang="es-ES" sz="4800" dirty="0"/>
-              <a:t>La erosión costera = la pérdida de la arena de las playas o la disminución de la línea de costa</a:t>
-            </a:r>
-          </a:p>
-        </p:txBody>
-      </p:sp>
-    </p:spTree>
-    <p:extLst>
-      <p:ext uri="{BB962C8B-B14F-4D97-AF65-F5344CB8AC3E}">
-        <p14:creationId xmlns:p14="http://schemas.microsoft.com/office/powerpoint/2010/main" val="309547371"/>
-      </p:ext>
-    </p:extLst>
-  </p:cSld>
-  <p:clrMapOvr>
-    <a:masterClrMapping/>
-  </p:clrMapOvr>
-</p:sld>
-</file>
-
-<file path=ppt/slides/slide4.xml><?xml version="1.0" encoding="utf-8"?>
-<p:sld xmlns:a="http://schemas.openxmlformats.org/drawingml/2006/main" xmlns:r="http://schemas.openxmlformats.org/officeDocument/2006/relationships" xmlns:p="http://schemas.openxmlformats.org/presentationml/2006/main">
-  <p:cSld>
-    <p:spTree>
-      <p:nvGrpSpPr>
-        <p:cNvPr id="1" name="Shape 113"/>
-        <p:cNvGrpSpPr/>
-        <p:nvPr/>
-      </p:nvGrpSpPr>
-      <p:grpSpPr>
-        <a:xfrm>
-          <a:off x="0" y="0"/>
-          <a:ext cx="0" cy="0"/>
-          <a:chOff x="0" y="0"/>
-          <a:chExt cx="0" cy="0"/>
-        </a:xfrm>
-      </p:grpSpPr>
-      <p:sp>
-        <p:nvSpPr>
-          <p:cNvPr id="10" name="Google Shape;151;p19"/>
-          <p:cNvSpPr/>
-          <p:nvPr/>
-        </p:nvSpPr>
-        <p:spPr>
-          <a:xfrm>
-            <a:off x="9852515" y="0"/>
+            <a:off x="5463783" y="0"/>
             <a:ext cx="7670326" cy="2424691"/>
           </a:xfrm>
           <a:prstGeom prst="rect">
@@ -8061,14 +5361,181 @@
       </p:sp>
       <p:sp>
         <p:nvSpPr>
-          <p:cNvPr id="114" name="Google Shape;114;p16"/>
+          <p:cNvPr id="152" name="Google Shape;152;p19"/>
+          <p:cNvSpPr txBox="1"/>
+          <p:nvPr/>
+        </p:nvSpPr>
+        <p:spPr>
+          <a:xfrm>
+            <a:off x="5904862" y="535300"/>
+            <a:ext cx="6788168" cy="1354089"/>
+          </a:xfrm>
+          <a:prstGeom prst="rect">
+            <a:avLst/>
+          </a:prstGeom>
+          <a:noFill/>
+          <a:ln>
+            <a:noFill/>
+          </a:ln>
+        </p:spPr>
+        <p:txBody>
+          <a:bodyPr spcFirstLastPara="1" wrap="square" lIns="0" tIns="0" rIns="0" bIns="0" anchor="t" anchorCtr="0">
+            <a:spAutoFit/>
+          </a:bodyPr>
+          <a:lstStyle/>
+          <a:p>
+            <a:pPr marL="0" marR="0" lvl="0" indent="0" algn="ctr" rtl="0">
+              <a:lnSpc>
+                <a:spcPct val="110001"/>
+              </a:lnSpc>
+              <a:spcBef>
+                <a:spcPts val="0"/>
+              </a:spcBef>
+              <a:spcAft>
+                <a:spcPts val="0"/>
+              </a:spcAft>
+              <a:buNone/>
+            </a:pPr>
+            <a:r>
+              <a:rPr lang="en-US" sz="7999" b="1" i="0" u="none" strike="noStrike" cap="none" dirty="0" err="1">
+                <a:solidFill>
+                  <a:srgbClr val="FFFFFF"/>
+                </a:solidFill>
+                <a:latin typeface="Poppins"/>
+                <a:ea typeface="Poppins"/>
+                <a:cs typeface="Poppins"/>
+                <a:sym typeface="Poppins"/>
+              </a:rPr>
+              <a:t>Resultados</a:t>
+            </a:r>
+            <a:endParaRPr dirty="0"/>
+          </a:p>
+        </p:txBody>
+      </p:sp>
+      <p:sp>
+        <p:nvSpPr>
+          <p:cNvPr id="153" name="Google Shape;153;p19"/>
+          <p:cNvSpPr txBox="1"/>
+          <p:nvPr/>
+        </p:nvSpPr>
+        <p:spPr>
+          <a:xfrm>
+            <a:off x="1243227" y="2420624"/>
+            <a:ext cx="16712263" cy="5170646"/>
+          </a:xfrm>
+          <a:prstGeom prst="rect">
+            <a:avLst/>
+          </a:prstGeom>
+          <a:noFill/>
+          <a:ln>
+            <a:noFill/>
+          </a:ln>
+        </p:spPr>
+        <p:txBody>
+          <a:bodyPr spcFirstLastPara="1" wrap="square" lIns="0" tIns="0" rIns="0" bIns="0" anchor="t" anchorCtr="0">
+            <a:spAutoFit/>
+          </a:bodyPr>
+          <a:lstStyle/>
+          <a:p>
+            <a:r>
+              <a:rPr lang="es-ES" sz="4800" dirty="0"/>
+              <a:t>-</a:t>
+            </a:r>
+            <a:r>
+              <a:rPr lang="es-ES" sz="4800" dirty="0" err="1"/>
+              <a:t>Login</a:t>
+            </a:r>
+            <a:r>
+              <a:rPr lang="es-ES" sz="4800" dirty="0"/>
+              <a:t> y Autenticación al 80 %</a:t>
+            </a:r>
+          </a:p>
+          <a:p>
+            <a:r>
+              <a:rPr lang="es-ES" sz="4800" dirty="0"/>
+              <a:t>-Módulo de Cálculo al 95 %</a:t>
+            </a:r>
+          </a:p>
+          <a:p>
+            <a:r>
+              <a:rPr lang="es-ES" sz="4800" dirty="0"/>
+              <a:t>-Módulo de Usuario al 80%</a:t>
+            </a:r>
+          </a:p>
+          <a:p>
+            <a:r>
+              <a:rPr lang="es-ES" sz="4800" dirty="0"/>
+              <a:t>-Módulo de trazas al 95 %</a:t>
+            </a:r>
+          </a:p>
+          <a:p>
+            <a:r>
+              <a:rPr lang="es-ES" sz="4800" dirty="0"/>
+              <a:t>-Reportes y Búsqueda al 10 %</a:t>
+            </a:r>
+          </a:p>
+          <a:p>
+            <a:pPr marL="685800" indent="-685800">
+              <a:buFontTx/>
+              <a:buChar char="-"/>
+            </a:pPr>
+            <a:r>
+              <a:rPr lang="es-ES" sz="4800" dirty="0"/>
+              <a:t>Microservicios al 0%</a:t>
+            </a:r>
+          </a:p>
+          <a:p>
+            <a:pPr marL="685800" indent="-685800">
+              <a:buFontTx/>
+              <a:buChar char="-"/>
+            </a:pPr>
+            <a:r>
+              <a:rPr lang="es-ES" sz="4800" dirty="0"/>
+              <a:t>Inicio al 0%</a:t>
+            </a:r>
+          </a:p>
+        </p:txBody>
+      </p:sp>
+    </p:spTree>
+    <p:extLst>
+      <p:ext uri="{BB962C8B-B14F-4D97-AF65-F5344CB8AC3E}">
+        <p14:creationId xmlns:p14="http://schemas.microsoft.com/office/powerpoint/2010/main" val="1544977281"/>
+      </p:ext>
+    </p:extLst>
+  </p:cSld>
+  <p:clrMapOvr>
+    <a:masterClrMapping/>
+  </p:clrMapOvr>
+</p:sld>
+</file>
+
+<file path=ppt/slides/slide3.xml><?xml version="1.0" encoding="utf-8"?>
+<p:sld xmlns:a="http://schemas.openxmlformats.org/drawingml/2006/main" xmlns:r="http://schemas.openxmlformats.org/officeDocument/2006/relationships" xmlns:p="http://schemas.openxmlformats.org/presentationml/2006/main">
+  <p:cSld>
+    <p:spTree>
+      <p:nvGrpSpPr>
+        <p:cNvPr id="1" name="Shape 149"/>
+        <p:cNvGrpSpPr/>
+        <p:nvPr/>
+      </p:nvGrpSpPr>
+      <p:grpSpPr>
+        <a:xfrm>
+          <a:off x="0" y="0"/>
+          <a:ext cx="0" cy="0"/>
+          <a:chOff x="0" y="0"/>
+          <a:chExt cx="0" cy="0"/>
+        </a:xfrm>
+      </p:grpSpPr>
+      <p:sp>
+        <p:nvSpPr>
+          <p:cNvPr id="150" name="Google Shape;150;p19"/>
           <p:cNvSpPr/>
           <p:nvPr/>
         </p:nvSpPr>
         <p:spPr>
           <a:xfrm>
             <a:off x="0" y="0"/>
-            <a:ext cx="4688381" cy="10287000"/>
+            <a:ext cx="1028700" cy="10287000"/>
           </a:xfrm>
           <a:prstGeom prst="rect">
             <a:avLst/>
@@ -8109,111 +5576,14 @@
       </p:sp>
       <p:sp>
         <p:nvSpPr>
-          <p:cNvPr id="115" name="Google Shape;115;p16"/>
-          <p:cNvSpPr txBox="1"/>
-          <p:nvPr/>
-        </p:nvSpPr>
-        <p:spPr>
-          <a:xfrm>
-            <a:off x="10381397" y="733762"/>
-            <a:ext cx="7141444" cy="1354089"/>
-          </a:xfrm>
-          <a:prstGeom prst="rect">
-            <a:avLst/>
-          </a:prstGeom>
-          <a:noFill/>
-          <a:ln>
-            <a:noFill/>
-          </a:ln>
-        </p:spPr>
-        <p:txBody>
-          <a:bodyPr spcFirstLastPara="1" wrap="square" lIns="0" tIns="0" rIns="0" bIns="0" anchor="t" anchorCtr="0">
-            <a:spAutoFit/>
-          </a:bodyPr>
-          <a:lstStyle/>
-          <a:p>
-            <a:pPr marL="0" marR="0" lvl="0" indent="0" algn="l" rtl="0">
-              <a:lnSpc>
-                <a:spcPct val="110001"/>
-              </a:lnSpc>
-              <a:spcBef>
-                <a:spcPts val="0"/>
-              </a:spcBef>
-              <a:spcAft>
-                <a:spcPts val="0"/>
-              </a:spcAft>
-              <a:buNone/>
-            </a:pPr>
-            <a:r>
-              <a:rPr lang="en-US" sz="7999" b="1" i="0" u="none" strike="noStrike" cap="none" dirty="0" err="1">
-                <a:solidFill>
-                  <a:schemeClr val="bg1"/>
-                </a:solidFill>
-                <a:latin typeface="Poppins"/>
-                <a:ea typeface="Poppins"/>
-                <a:cs typeface="Poppins"/>
-                <a:sym typeface="Poppins"/>
-              </a:rPr>
-              <a:t>Problema</a:t>
-            </a:r>
-            <a:endParaRPr dirty="0">
-              <a:solidFill>
-                <a:schemeClr val="bg1"/>
-              </a:solidFill>
-            </a:endParaRPr>
-          </a:p>
-        </p:txBody>
-      </p:sp>
-      <p:sp>
-        <p:nvSpPr>
-          <p:cNvPr id="116" name="Google Shape;116;p16"/>
-          <p:cNvSpPr txBox="1"/>
-          <p:nvPr/>
-        </p:nvSpPr>
-        <p:spPr>
-          <a:xfrm>
-            <a:off x="10118840" y="2340385"/>
-            <a:ext cx="7141500" cy="7386638"/>
-          </a:xfrm>
-          <a:prstGeom prst="rect">
-            <a:avLst/>
-          </a:prstGeom>
-          <a:noFill/>
-          <a:ln>
-            <a:noFill/>
-          </a:ln>
-        </p:spPr>
-        <p:txBody>
-          <a:bodyPr spcFirstLastPara="1" wrap="square" lIns="0" tIns="0" rIns="0" bIns="0" anchor="t" anchorCtr="0">
-            <a:spAutoFit/>
-          </a:bodyPr>
-          <a:lstStyle/>
-          <a:p>
-            <a:r>
-              <a:rPr lang="es-ES" sz="4000" dirty="0"/>
-              <a:t>Esta empresa realiza diversos estudios e investigaciones entre ellas el transporte de los sedimentos  pero estas ecuaciones se calculan con  métodos tradicionales (</a:t>
-            </a:r>
-            <a:r>
-              <a:rPr lang="es-ES" sz="4000" dirty="0" err="1"/>
-              <a:t>e.d</a:t>
-            </a:r>
-            <a:r>
-              <a:rPr lang="es-ES" sz="4000" dirty="0"/>
-              <a:t>., escribiendo los datos en papel u otro recurso físico), los cuales pueden tener un deterioro en el tiempo, errores en los cálculos y morosidad en la búsqueda de información.</a:t>
-            </a:r>
-          </a:p>
-        </p:txBody>
-      </p:sp>
-      <p:sp>
-        <p:nvSpPr>
-          <p:cNvPr id="117" name="Google Shape;117;p16"/>
+          <p:cNvPr id="151" name="Google Shape;151;p19"/>
           <p:cNvSpPr/>
           <p:nvPr/>
         </p:nvSpPr>
         <p:spPr>
           <a:xfrm>
-            <a:off x="18002250" y="0"/>
-            <a:ext cx="285750" cy="10287000"/>
+            <a:off x="5463783" y="0"/>
+            <a:ext cx="7670326" cy="2424691"/>
           </a:xfrm>
           <a:prstGeom prst="rect">
             <a:avLst/>
@@ -8252,37 +5622,391 @@
           </a:p>
         </p:txBody>
       </p:sp>
-      <p:pic>
-        <p:nvPicPr>
-          <p:cNvPr id="4" name="Imagen 3"/>
-          <p:cNvPicPr>
-            <a:picLocks noChangeAspect="1"/>
-          </p:cNvPicPr>
+      <p:sp>
+        <p:nvSpPr>
+          <p:cNvPr id="152" name="Google Shape;152;p19"/>
+          <p:cNvSpPr txBox="1"/>
           <p:nvPr/>
-        </p:nvPicPr>
-        <p:blipFill>
-          <a:blip r:embed="rId3">
-            <a:extLst>
-              <a:ext uri="{28A0092B-C50C-407E-A947-70E740481C1C}">
-                <a14:useLocalDpi xmlns:a14="http://schemas.microsoft.com/office/drawing/2010/main" val="0"/>
-              </a:ext>
-            </a:extLst>
-          </a:blip>
-          <a:stretch>
-            <a:fillRect/>
-          </a:stretch>
-        </p:blipFill>
+        </p:nvSpPr>
         <p:spPr>
           <a:xfrm>
-            <a:off x="106106" y="1576444"/>
-            <a:ext cx="9640303" cy="6426869"/>
+            <a:off x="5904862" y="535300"/>
+            <a:ext cx="6788168" cy="1354089"/>
           </a:xfrm>
           <a:prstGeom prst="rect">
             <a:avLst/>
           </a:prstGeom>
+          <a:noFill/>
+          <a:ln>
+            <a:noFill/>
+          </a:ln>
         </p:spPr>
-      </p:pic>
+        <p:txBody>
+          <a:bodyPr spcFirstLastPara="1" wrap="square" lIns="0" tIns="0" rIns="0" bIns="0" anchor="t" anchorCtr="0">
+            <a:spAutoFit/>
+          </a:bodyPr>
+          <a:lstStyle/>
+          <a:p>
+            <a:pPr marL="0" marR="0" lvl="0" indent="0" algn="ctr" rtl="0">
+              <a:lnSpc>
+                <a:spcPct val="110001"/>
+              </a:lnSpc>
+              <a:spcBef>
+                <a:spcPts val="0"/>
+              </a:spcBef>
+              <a:spcAft>
+                <a:spcPts val="0"/>
+              </a:spcAft>
+              <a:buNone/>
+            </a:pPr>
+            <a:r>
+              <a:rPr lang="en-US" sz="7999" b="1" dirty="0">
+                <a:solidFill>
+                  <a:srgbClr val="FFFFFF"/>
+                </a:solidFill>
+                <a:latin typeface="Poppins"/>
+                <a:ea typeface="Poppins"/>
+                <a:cs typeface="Poppins"/>
+                <a:sym typeface="Poppins"/>
+              </a:rPr>
+              <a:t>¿</a:t>
+            </a:r>
+            <a:r>
+              <a:rPr lang="en-US" sz="7999" b="1" i="0" u="none" strike="noStrike" cap="none" dirty="0" err="1">
+                <a:solidFill>
+                  <a:srgbClr val="FFFFFF"/>
+                </a:solidFill>
+                <a:latin typeface="Poppins"/>
+                <a:ea typeface="Poppins"/>
+                <a:cs typeface="Poppins"/>
+                <a:sym typeface="Poppins"/>
+              </a:rPr>
+              <a:t>Qué</a:t>
+            </a:r>
+            <a:r>
+              <a:rPr lang="en-US" sz="7999" b="1" i="0" u="none" strike="noStrike" cap="none" dirty="0">
+                <a:solidFill>
+                  <a:srgbClr val="FFFFFF"/>
+                </a:solidFill>
+                <a:latin typeface="Poppins"/>
+                <a:ea typeface="Poppins"/>
+                <a:cs typeface="Poppins"/>
+                <a:sym typeface="Poppins"/>
+              </a:rPr>
+              <a:t> Falta ?</a:t>
+            </a:r>
+            <a:endParaRPr dirty="0"/>
+          </a:p>
+        </p:txBody>
+      </p:sp>
+      <p:sp>
+        <p:nvSpPr>
+          <p:cNvPr id="153" name="Google Shape;153;p19"/>
+          <p:cNvSpPr txBox="1"/>
+          <p:nvPr/>
+        </p:nvSpPr>
+        <p:spPr>
+          <a:xfrm>
+            <a:off x="1243227" y="2420624"/>
+            <a:ext cx="16712263" cy="7386638"/>
+          </a:xfrm>
+          <a:prstGeom prst="rect">
+            <a:avLst/>
+          </a:prstGeom>
+          <a:noFill/>
+          <a:ln>
+            <a:noFill/>
+          </a:ln>
+        </p:spPr>
+        <p:txBody>
+          <a:bodyPr spcFirstLastPara="1" wrap="square" lIns="0" tIns="0" rIns="0" bIns="0" anchor="t" anchorCtr="0">
+            <a:spAutoFit/>
+          </a:bodyPr>
+          <a:lstStyle/>
+          <a:p>
+            <a:r>
+              <a:rPr lang="es-ES" sz="4800" dirty="0"/>
+              <a:t>-Implementación en la seguridad para que el usuario se autentique según su rol (Administrador o Trabajador)</a:t>
+            </a:r>
+          </a:p>
+          <a:p>
+            <a:r>
+              <a:rPr lang="es-ES" sz="4800" dirty="0"/>
+              <a:t>-En la Gestión de Ubicación mejora en la interfaz para que se muestren la lista de áreas, los cálculos asociados a esa área, la eliminación y edición del área trazada</a:t>
+            </a:r>
+          </a:p>
+          <a:p>
+            <a:r>
+              <a:rPr lang="es-ES" sz="4800" dirty="0"/>
+              <a:t>- En los reportes estadísticos que se muestren gráficos y se pueden exportar(Excel o PDF). Además de poder exportar los datos según el módulo y la búsqueda a  través de filtros</a:t>
+            </a:r>
+          </a:p>
+          <a:p>
+            <a:pPr marL="685800" indent="-685800">
+              <a:buFontTx/>
+              <a:buChar char="-"/>
+            </a:pPr>
+            <a:r>
+              <a:rPr lang="es-ES" sz="4800" dirty="0"/>
+              <a:t>Que el sistema haga copias de seguridad </a:t>
+            </a:r>
+          </a:p>
+          <a:p>
+            <a:pPr marL="685800" indent="-685800">
+              <a:buFontTx/>
+              <a:buChar char="-"/>
+            </a:pPr>
+            <a:r>
+              <a:rPr lang="es-ES" sz="4800" dirty="0"/>
+              <a:t>Microservicios.</a:t>
+            </a:r>
+          </a:p>
+        </p:txBody>
+      </p:sp>
     </p:spTree>
+    <p:extLst>
+      <p:ext uri="{BB962C8B-B14F-4D97-AF65-F5344CB8AC3E}">
+        <p14:creationId xmlns:p14="http://schemas.microsoft.com/office/powerpoint/2010/main" val="2323805693"/>
+      </p:ext>
+    </p:extLst>
+  </p:cSld>
+  <p:clrMapOvr>
+    <a:masterClrMapping/>
+  </p:clrMapOvr>
+</p:sld>
+</file>
+
+<file path=ppt/slides/slide4.xml><?xml version="1.0" encoding="utf-8"?>
+<p:sld xmlns:a="http://schemas.openxmlformats.org/drawingml/2006/main" xmlns:r="http://schemas.openxmlformats.org/officeDocument/2006/relationships" xmlns:p="http://schemas.openxmlformats.org/presentationml/2006/main">
+  <p:cSld>
+    <p:spTree>
+      <p:nvGrpSpPr>
+        <p:cNvPr id="1" name="Shape 149"/>
+        <p:cNvGrpSpPr/>
+        <p:nvPr/>
+      </p:nvGrpSpPr>
+      <p:grpSpPr>
+        <a:xfrm>
+          <a:off x="0" y="0"/>
+          <a:ext cx="0" cy="0"/>
+          <a:chOff x="0" y="0"/>
+          <a:chExt cx="0" cy="0"/>
+        </a:xfrm>
+      </p:grpSpPr>
+      <p:sp>
+        <p:nvSpPr>
+          <p:cNvPr id="150" name="Google Shape;150;p19"/>
+          <p:cNvSpPr/>
+          <p:nvPr/>
+        </p:nvSpPr>
+        <p:spPr>
+          <a:xfrm>
+            <a:off x="0" y="0"/>
+            <a:ext cx="1028700" cy="10287000"/>
+          </a:xfrm>
+          <a:prstGeom prst="rect">
+            <a:avLst/>
+          </a:prstGeom>
+          <a:gradFill>
+            <a:gsLst>
+              <a:gs pos="0">
+                <a:srgbClr val="14C5C3"/>
+              </a:gs>
+              <a:gs pos="100000">
+                <a:srgbClr val="4E7AD9"/>
+              </a:gs>
+            </a:gsLst>
+            <a:lin ang="2700000" scaled="0"/>
+          </a:gradFill>
+          <a:ln>
+            <a:noFill/>
+          </a:ln>
+        </p:spPr>
+        <p:txBody>
+          <a:bodyPr spcFirstLastPara="1" wrap="square" lIns="91425" tIns="91425" rIns="91425" bIns="91425" anchor="ctr" anchorCtr="0">
+            <a:noAutofit/>
+          </a:bodyPr>
+          <a:lstStyle/>
+          <a:p>
+            <a:pPr marL="0" lvl="0" indent="0" algn="l" rtl="0">
+              <a:spcBef>
+                <a:spcPts val="0"/>
+              </a:spcBef>
+              <a:spcAft>
+                <a:spcPts val="0"/>
+              </a:spcAft>
+              <a:buNone/>
+            </a:pPr>
+            <a:endParaRPr/>
+          </a:p>
+        </p:txBody>
+      </p:sp>
+      <p:sp>
+        <p:nvSpPr>
+          <p:cNvPr id="151" name="Google Shape;151;p19"/>
+          <p:cNvSpPr/>
+          <p:nvPr/>
+        </p:nvSpPr>
+        <p:spPr>
+          <a:xfrm>
+            <a:off x="5463783" y="0"/>
+            <a:ext cx="7670326" cy="2424691"/>
+          </a:xfrm>
+          <a:prstGeom prst="rect">
+            <a:avLst/>
+          </a:prstGeom>
+          <a:gradFill>
+            <a:gsLst>
+              <a:gs pos="0">
+                <a:srgbClr val="14C5C3"/>
+              </a:gs>
+              <a:gs pos="100000">
+                <a:srgbClr val="4E7AD9"/>
+              </a:gs>
+            </a:gsLst>
+            <a:lin ang="2700000" scaled="0"/>
+          </a:gradFill>
+          <a:ln>
+            <a:noFill/>
+          </a:ln>
+        </p:spPr>
+        <p:txBody>
+          <a:bodyPr spcFirstLastPara="1" wrap="square" lIns="91425" tIns="91425" rIns="91425" bIns="91425" anchor="ctr" anchorCtr="0">
+            <a:noAutofit/>
+          </a:bodyPr>
+          <a:lstStyle/>
+          <a:p>
+            <a:pPr marL="0" lvl="0" indent="0" algn="l" rtl="0">
+              <a:spcBef>
+                <a:spcPts val="0"/>
+              </a:spcBef>
+              <a:spcAft>
+                <a:spcPts val="0"/>
+              </a:spcAft>
+              <a:buNone/>
+            </a:pPr>
+            <a:endParaRPr/>
+          </a:p>
+        </p:txBody>
+      </p:sp>
+      <p:sp>
+        <p:nvSpPr>
+          <p:cNvPr id="152" name="Google Shape;152;p19"/>
+          <p:cNvSpPr txBox="1"/>
+          <p:nvPr/>
+        </p:nvSpPr>
+        <p:spPr>
+          <a:xfrm>
+            <a:off x="5904862" y="535300"/>
+            <a:ext cx="6788168" cy="1354089"/>
+          </a:xfrm>
+          <a:prstGeom prst="rect">
+            <a:avLst/>
+          </a:prstGeom>
+          <a:noFill/>
+          <a:ln>
+            <a:noFill/>
+          </a:ln>
+        </p:spPr>
+        <p:txBody>
+          <a:bodyPr spcFirstLastPara="1" wrap="square" lIns="0" tIns="0" rIns="0" bIns="0" anchor="t" anchorCtr="0">
+            <a:spAutoFit/>
+          </a:bodyPr>
+          <a:lstStyle/>
+          <a:p>
+            <a:pPr marL="0" marR="0" lvl="0" indent="0" algn="ctr" rtl="0">
+              <a:lnSpc>
+                <a:spcPct val="110001"/>
+              </a:lnSpc>
+              <a:spcBef>
+                <a:spcPts val="0"/>
+              </a:spcBef>
+              <a:spcAft>
+                <a:spcPts val="0"/>
+              </a:spcAft>
+              <a:buNone/>
+            </a:pPr>
+            <a:r>
+              <a:rPr lang="en-US" sz="7999" b="1" dirty="0">
+                <a:solidFill>
+                  <a:srgbClr val="FFFFFF"/>
+                </a:solidFill>
+                <a:latin typeface="Poppins"/>
+                <a:ea typeface="Poppins"/>
+                <a:cs typeface="Poppins"/>
+                <a:sym typeface="Poppins"/>
+              </a:rPr>
+              <a:t>¿</a:t>
+            </a:r>
+            <a:r>
+              <a:rPr lang="en-US" sz="7999" b="1" i="0" u="none" strike="noStrike" cap="none" dirty="0" err="1">
+                <a:solidFill>
+                  <a:srgbClr val="FFFFFF"/>
+                </a:solidFill>
+                <a:latin typeface="Poppins"/>
+                <a:ea typeface="Poppins"/>
+                <a:cs typeface="Poppins"/>
+                <a:sym typeface="Poppins"/>
+              </a:rPr>
+              <a:t>Qué</a:t>
+            </a:r>
+            <a:r>
+              <a:rPr lang="en-US" sz="7999" b="1" i="0" u="none" strike="noStrike" cap="none" dirty="0">
+                <a:solidFill>
+                  <a:srgbClr val="FFFFFF"/>
+                </a:solidFill>
+                <a:latin typeface="Poppins"/>
+                <a:ea typeface="Poppins"/>
+                <a:cs typeface="Poppins"/>
+                <a:sym typeface="Poppins"/>
+              </a:rPr>
+              <a:t> Falta ?</a:t>
+            </a:r>
+            <a:endParaRPr dirty="0"/>
+          </a:p>
+        </p:txBody>
+      </p:sp>
+      <p:sp>
+        <p:nvSpPr>
+          <p:cNvPr id="153" name="Google Shape;153;p19"/>
+          <p:cNvSpPr txBox="1"/>
+          <p:nvPr/>
+        </p:nvSpPr>
+        <p:spPr>
+          <a:xfrm>
+            <a:off x="1243227" y="2420624"/>
+            <a:ext cx="16712263" cy="1477328"/>
+          </a:xfrm>
+          <a:prstGeom prst="rect">
+            <a:avLst/>
+          </a:prstGeom>
+          <a:noFill/>
+          <a:ln>
+            <a:noFill/>
+          </a:ln>
+        </p:spPr>
+        <p:txBody>
+          <a:bodyPr spcFirstLastPara="1" wrap="square" lIns="0" tIns="0" rIns="0" bIns="0" anchor="t" anchorCtr="0">
+            <a:spAutoFit/>
+          </a:bodyPr>
+          <a:lstStyle/>
+          <a:p>
+            <a:r>
+              <a:rPr lang="es-ES" sz="4800" dirty="0"/>
+              <a:t>-Inicio. ¿Qué información va brindar el sistema?</a:t>
+            </a:r>
+          </a:p>
+          <a:p>
+            <a:endParaRPr lang="es-ES" sz="4800" dirty="0"/>
+          </a:p>
+        </p:txBody>
+      </p:sp>
+    </p:spTree>
+    <p:extLst>
+      <p:ext uri="{BB962C8B-B14F-4D97-AF65-F5344CB8AC3E}">
+        <p14:creationId xmlns:p14="http://schemas.microsoft.com/office/powerpoint/2010/main" val="3728125434"/>
+      </p:ext>
+    </p:extLst>
   </p:cSld>
   <p:clrMapOvr>
     <a:masterClrMapping/>
@@ -8441,16 +6165,15 @@
               <a:buNone/>
             </a:pPr>
             <a:r>
-              <a:rPr lang="en-US" sz="7999" b="1" i="0" u="none" strike="noStrike" cap="none" dirty="0" err="1">
+              <a:rPr lang="en-US" sz="7999" b="1" dirty="0" err="1">
                 <a:solidFill>
                   <a:srgbClr val="FFFFFF"/>
                 </a:solidFill>
                 <a:latin typeface="Poppins"/>
-                <a:ea typeface="Poppins"/>
                 <a:cs typeface="Poppins"/>
                 <a:sym typeface="Poppins"/>
               </a:rPr>
-              <a:t>Resultados</a:t>
+              <a:t>Validaciones</a:t>
             </a:r>
             <a:endParaRPr dirty="0"/>
           </a:p>
@@ -8464,8 +6187,8 @@
         </p:nvSpPr>
         <p:spPr>
           <a:xfrm>
-            <a:off x="1243227" y="2420624"/>
-            <a:ext cx="16712263" cy="2462213"/>
+            <a:off x="1087363" y="2424691"/>
+            <a:ext cx="16712263" cy="7940635"/>
           </a:xfrm>
           <a:prstGeom prst="rect">
             <a:avLst/>
@@ -8481,52 +6204,730 @@
           </a:bodyPr>
           <a:lstStyle/>
           <a:p>
-            <a:pPr marL="571500" indent="-571500">
-              <a:buFontTx/>
-              <a:buChar char="-"/>
-            </a:pPr>
-            <a:r>
-              <a:rPr lang="es-ES" sz="4000" dirty="0"/>
-              <a:t>Modelación de las interfaces y presentación al cliente</a:t>
-            </a:r>
-          </a:p>
-          <a:p>
-            <a:pPr marL="685800" indent="-685800">
-              <a:buFontTx/>
-              <a:buChar char="-"/>
-            </a:pPr>
-            <a:r>
-              <a:rPr lang="es-ES" sz="4000" dirty="0"/>
-              <a:t>Desarrollo del </a:t>
-            </a:r>
-            <a:r>
-              <a:rPr lang="es-ES" sz="4000" dirty="0" err="1"/>
-              <a:t>backend</a:t>
-            </a:r>
-            <a:r>
-              <a:rPr lang="es-ES" sz="4000" dirty="0"/>
-              <a:t> y su compatibilidad con la plantilla</a:t>
-            </a:r>
-          </a:p>
-          <a:p>
-            <a:pPr marL="685800" indent="-685800">
-              <a:buFontTx/>
-              <a:buChar char="-"/>
-            </a:pPr>
-            <a:r>
-              <a:rPr lang="es-ES" sz="4000" dirty="0"/>
-              <a:t>Dominio de la plantilla y sus componentes</a:t>
-            </a:r>
-          </a:p>
-          <a:p>
-            <a:pPr marL="685800" indent="-685800">
-              <a:buFontTx/>
-              <a:buChar char="-"/>
-            </a:pPr>
-            <a:r>
-              <a:rPr lang="es-ES" sz="4000" dirty="0"/>
-              <a:t>Se a desarrollado la historia de usuario a un 50% </a:t>
-            </a:r>
+            <a:r>
+              <a:rPr lang="es-ES" sz="3600" b="0" dirty="0">
+                <a:solidFill>
+                  <a:schemeClr val="tx1"/>
+                </a:solidFill>
+                <a:effectLst/>
+                <a:latin typeface="+mj-lt"/>
+              </a:rPr>
+              <a:t>{ </a:t>
+            </a:r>
+            <a:r>
+              <a:rPr lang="es-ES" sz="3600" b="0" dirty="0" err="1">
+                <a:solidFill>
+                  <a:schemeClr val="tx1"/>
+                </a:solidFill>
+                <a:effectLst/>
+                <a:latin typeface="+mj-lt"/>
+              </a:rPr>
+              <a:t>label</a:t>
+            </a:r>
+            <a:r>
+              <a:rPr lang="es-ES" sz="3600" b="0" dirty="0">
+                <a:solidFill>
+                  <a:schemeClr val="tx1"/>
+                </a:solidFill>
+                <a:effectLst/>
+                <a:latin typeface="+mj-lt"/>
+              </a:rPr>
+              <a:t>: "Densidad del sedimento (</a:t>
+            </a:r>
+            <a:r>
+              <a:rPr lang="el-GR" sz="3600" b="0" dirty="0">
+                <a:solidFill>
+                  <a:schemeClr val="tx1"/>
+                </a:solidFill>
+                <a:effectLst/>
+                <a:latin typeface="+mj-lt"/>
+              </a:rPr>
+              <a:t>ρ</a:t>
+            </a:r>
+            <a:r>
+              <a:rPr lang="es-ES" sz="3600" b="0" dirty="0">
+                <a:solidFill>
+                  <a:schemeClr val="tx1"/>
+                </a:solidFill>
+                <a:effectLst/>
+                <a:latin typeface="+mj-lt"/>
+              </a:rPr>
+              <a:t>s) [kg/m³]", </a:t>
+            </a:r>
+            <a:r>
+              <a:rPr lang="es-ES" sz="3600" b="0" dirty="0" err="1">
+                <a:solidFill>
+                  <a:schemeClr val="tx1"/>
+                </a:solidFill>
+                <a:effectLst/>
+                <a:latin typeface="+mj-lt"/>
+              </a:rPr>
+              <a:t>name</a:t>
+            </a:r>
+            <a:r>
+              <a:rPr lang="es-ES" sz="3600" b="0" dirty="0">
+                <a:solidFill>
+                  <a:schemeClr val="tx1"/>
+                </a:solidFill>
+                <a:effectLst/>
+                <a:latin typeface="+mj-lt"/>
+              </a:rPr>
+              <a:t>: "</a:t>
+            </a:r>
+            <a:r>
+              <a:rPr lang="es-ES" sz="3600" b="0" dirty="0" err="1">
+                <a:solidFill>
+                  <a:schemeClr val="tx1"/>
+                </a:solidFill>
+                <a:effectLst/>
+                <a:latin typeface="+mj-lt"/>
+              </a:rPr>
+              <a:t>densidad_a</a:t>
+            </a:r>
+            <a:r>
+              <a:rPr lang="es-ES" sz="3600" b="0" dirty="0">
+                <a:solidFill>
+                  <a:schemeClr val="tx1"/>
+                </a:solidFill>
+                <a:effectLst/>
+                <a:latin typeface="+mj-lt"/>
+              </a:rPr>
+              <a:t>", min: 1000, </a:t>
+            </a:r>
+            <a:r>
+              <a:rPr lang="es-ES" sz="3600" b="0" dirty="0" err="1">
+                <a:solidFill>
+                  <a:schemeClr val="tx1"/>
+                </a:solidFill>
+                <a:effectLst/>
+                <a:latin typeface="+mj-lt"/>
+              </a:rPr>
+              <a:t>max</a:t>
+            </a:r>
+            <a:r>
+              <a:rPr lang="es-ES" sz="3600" b="0" dirty="0">
+                <a:solidFill>
+                  <a:schemeClr val="tx1"/>
+                </a:solidFill>
+                <a:effectLst/>
+                <a:latin typeface="+mj-lt"/>
+              </a:rPr>
+              <a:t>: 3000 },</a:t>
+            </a:r>
+          </a:p>
+          <a:p>
+            <a:r>
+              <a:rPr lang="es-ES" sz="3600" b="0" dirty="0">
+                <a:solidFill>
+                  <a:schemeClr val="tx1"/>
+                </a:solidFill>
+                <a:effectLst/>
+                <a:latin typeface="+mj-lt"/>
+              </a:rPr>
+              <a:t>            { </a:t>
+            </a:r>
+            <a:r>
+              <a:rPr lang="es-ES" sz="3600" b="0" dirty="0" err="1">
+                <a:solidFill>
+                  <a:schemeClr val="tx1"/>
+                </a:solidFill>
+                <a:effectLst/>
+                <a:latin typeface="+mj-lt"/>
+              </a:rPr>
+              <a:t>label</a:t>
+            </a:r>
+            <a:r>
+              <a:rPr lang="es-ES" sz="3600" b="0" dirty="0">
+                <a:solidFill>
+                  <a:schemeClr val="tx1"/>
+                </a:solidFill>
+                <a:effectLst/>
+                <a:latin typeface="+mj-lt"/>
+              </a:rPr>
+              <a:t>: "Densidad del Mar (</a:t>
+            </a:r>
+            <a:r>
+              <a:rPr lang="el-GR" sz="3600" b="0" dirty="0">
+                <a:solidFill>
+                  <a:schemeClr val="tx1"/>
+                </a:solidFill>
+                <a:effectLst/>
+                <a:latin typeface="+mj-lt"/>
+              </a:rPr>
+              <a:t>ρ) [</a:t>
+            </a:r>
+            <a:r>
+              <a:rPr lang="es-ES" sz="3600" b="0" dirty="0">
+                <a:solidFill>
+                  <a:schemeClr val="tx1"/>
+                </a:solidFill>
+                <a:effectLst/>
+                <a:latin typeface="+mj-lt"/>
+              </a:rPr>
+              <a:t>kg/m³]", </a:t>
+            </a:r>
+            <a:r>
+              <a:rPr lang="es-ES" sz="3600" b="0" dirty="0" err="1">
+                <a:solidFill>
+                  <a:schemeClr val="tx1"/>
+                </a:solidFill>
+                <a:effectLst/>
+                <a:latin typeface="+mj-lt"/>
+              </a:rPr>
+              <a:t>name</a:t>
+            </a:r>
+            <a:r>
+              <a:rPr lang="es-ES" sz="3600" b="0" dirty="0">
+                <a:solidFill>
+                  <a:schemeClr val="tx1"/>
+                </a:solidFill>
+                <a:effectLst/>
+                <a:latin typeface="+mj-lt"/>
+              </a:rPr>
+              <a:t>: "</a:t>
+            </a:r>
+            <a:r>
+              <a:rPr lang="es-ES" sz="3600" b="0" dirty="0" err="1">
+                <a:solidFill>
+                  <a:schemeClr val="tx1"/>
+                </a:solidFill>
+                <a:effectLst/>
+                <a:latin typeface="+mj-lt"/>
+              </a:rPr>
+              <a:t>densidad_m</a:t>
+            </a:r>
+            <a:r>
+              <a:rPr lang="es-ES" sz="3600" b="0" dirty="0">
+                <a:solidFill>
+                  <a:schemeClr val="tx1"/>
+                </a:solidFill>
+                <a:effectLst/>
+                <a:latin typeface="+mj-lt"/>
+              </a:rPr>
+              <a:t>", min: 9</a:t>
+            </a:r>
+            <a:r>
+              <a:rPr lang="es-ES" sz="3600" dirty="0">
+                <a:solidFill>
+                  <a:schemeClr val="tx1"/>
+                </a:solidFill>
+                <a:latin typeface="+mj-lt"/>
+              </a:rPr>
+              <a:t>00</a:t>
+            </a:r>
+            <a:r>
+              <a:rPr lang="es-ES" sz="3600" b="0" dirty="0">
+                <a:solidFill>
+                  <a:schemeClr val="tx1"/>
+                </a:solidFill>
+                <a:effectLst/>
+                <a:latin typeface="+mj-lt"/>
+              </a:rPr>
+              <a:t>, </a:t>
+            </a:r>
+            <a:r>
+              <a:rPr lang="es-ES" sz="3600" b="0" dirty="0" err="1">
+                <a:solidFill>
+                  <a:schemeClr val="tx1"/>
+                </a:solidFill>
+                <a:effectLst/>
+                <a:latin typeface="+mj-lt"/>
+              </a:rPr>
+              <a:t>max</a:t>
+            </a:r>
+            <a:r>
+              <a:rPr lang="es-ES" sz="3600" b="0" dirty="0">
+                <a:solidFill>
+                  <a:schemeClr val="tx1"/>
+                </a:solidFill>
+                <a:effectLst/>
+                <a:latin typeface="+mj-lt"/>
+              </a:rPr>
+              <a:t>: 1500 },</a:t>
+            </a:r>
+          </a:p>
+          <a:p>
+            <a:r>
+              <a:rPr lang="es-ES" sz="3600" b="0" dirty="0">
+                <a:solidFill>
+                  <a:schemeClr val="tx1"/>
+                </a:solidFill>
+                <a:effectLst/>
+                <a:latin typeface="+mj-lt"/>
+              </a:rPr>
+              <a:t>            { </a:t>
+            </a:r>
+            <a:r>
+              <a:rPr lang="es-ES" sz="3600" b="0" dirty="0" err="1">
+                <a:solidFill>
+                  <a:schemeClr val="tx1"/>
+                </a:solidFill>
+                <a:effectLst/>
+                <a:latin typeface="+mj-lt"/>
+              </a:rPr>
+              <a:t>label</a:t>
+            </a:r>
+            <a:r>
+              <a:rPr lang="es-ES" sz="3600" b="0" dirty="0">
+                <a:solidFill>
+                  <a:schemeClr val="tx1"/>
+                </a:solidFill>
+                <a:effectLst/>
+                <a:latin typeface="+mj-lt"/>
+              </a:rPr>
+              <a:t>: "Coeficiente de Porosidad (n) ", </a:t>
+            </a:r>
+            <a:r>
+              <a:rPr lang="es-ES" sz="3600" b="0" dirty="0" err="1">
+                <a:solidFill>
+                  <a:schemeClr val="tx1"/>
+                </a:solidFill>
+                <a:effectLst/>
+                <a:latin typeface="+mj-lt"/>
+              </a:rPr>
+              <a:t>name</a:t>
+            </a:r>
+            <a:r>
+              <a:rPr lang="es-ES" sz="3600" b="0" dirty="0">
+                <a:solidFill>
+                  <a:schemeClr val="tx1"/>
+                </a:solidFill>
+                <a:effectLst/>
+                <a:latin typeface="+mj-lt"/>
+              </a:rPr>
+              <a:t>: "coeficiente", min: 0, </a:t>
+            </a:r>
+            <a:r>
+              <a:rPr lang="es-ES" sz="3600" b="0" dirty="0" err="1">
+                <a:solidFill>
+                  <a:schemeClr val="tx1"/>
+                </a:solidFill>
+                <a:effectLst/>
+                <a:latin typeface="+mj-lt"/>
+              </a:rPr>
+              <a:t>max</a:t>
+            </a:r>
+            <a:r>
+              <a:rPr lang="es-ES" sz="3600" b="0" dirty="0">
+                <a:solidFill>
+                  <a:schemeClr val="tx1"/>
+                </a:solidFill>
+                <a:effectLst/>
+                <a:latin typeface="+mj-lt"/>
+              </a:rPr>
+              <a:t>: 1, step: 0.01 },</a:t>
+            </a:r>
+          </a:p>
+          <a:p>
+            <a:r>
+              <a:rPr lang="es-ES" sz="3600" b="0" dirty="0">
+                <a:solidFill>
+                  <a:schemeClr val="tx1"/>
+                </a:solidFill>
+                <a:effectLst/>
+                <a:latin typeface="+mj-lt"/>
+              </a:rPr>
+              <a:t>            { </a:t>
+            </a:r>
+            <a:r>
+              <a:rPr lang="es-ES" sz="3600" b="0" dirty="0" err="1">
+                <a:solidFill>
+                  <a:schemeClr val="tx1"/>
+                </a:solidFill>
+                <a:effectLst/>
+                <a:latin typeface="+mj-lt"/>
+              </a:rPr>
+              <a:t>label</a:t>
+            </a:r>
+            <a:r>
+              <a:rPr lang="es-ES" sz="3600" b="0" dirty="0">
+                <a:solidFill>
+                  <a:schemeClr val="tx1"/>
+                </a:solidFill>
+                <a:effectLst/>
+                <a:latin typeface="+mj-lt"/>
+              </a:rPr>
+              <a:t>: "Índice de Rompiente (k) ", </a:t>
+            </a:r>
+            <a:r>
+              <a:rPr lang="es-ES" sz="3600" b="0" dirty="0" err="1">
+                <a:solidFill>
+                  <a:schemeClr val="tx1"/>
+                </a:solidFill>
+                <a:effectLst/>
+                <a:latin typeface="+mj-lt"/>
+              </a:rPr>
+              <a:t>name</a:t>
+            </a:r>
+            <a:r>
+              <a:rPr lang="es-ES" sz="3600" b="0" dirty="0">
+                <a:solidFill>
+                  <a:schemeClr val="tx1"/>
+                </a:solidFill>
+                <a:effectLst/>
+                <a:latin typeface="+mj-lt"/>
+              </a:rPr>
+              <a:t>: "</a:t>
+            </a:r>
+            <a:r>
+              <a:rPr lang="es-ES" sz="3600" b="0" dirty="0" err="1">
+                <a:solidFill>
+                  <a:schemeClr val="tx1"/>
+                </a:solidFill>
+                <a:effectLst/>
+                <a:latin typeface="+mj-lt"/>
+              </a:rPr>
+              <a:t>indice</a:t>
+            </a:r>
+            <a:r>
+              <a:rPr lang="es-ES" sz="3600" b="0" dirty="0">
+                <a:solidFill>
+                  <a:schemeClr val="tx1"/>
+                </a:solidFill>
+                <a:effectLst/>
+                <a:latin typeface="+mj-lt"/>
+              </a:rPr>
+              <a:t>", min: 0, max:2, step: 0.01 },</a:t>
+            </a:r>
+          </a:p>
+          <a:p>
+            <a:r>
+              <a:rPr lang="es-ES" sz="3600" b="0" dirty="0">
+                <a:solidFill>
+                  <a:schemeClr val="tx1"/>
+                </a:solidFill>
+                <a:effectLst/>
+                <a:latin typeface="+mj-lt"/>
+              </a:rPr>
+              <a:t>            { </a:t>
+            </a:r>
+            <a:r>
+              <a:rPr lang="es-ES" sz="3600" b="0" dirty="0" err="1">
+                <a:solidFill>
+                  <a:schemeClr val="tx1"/>
+                </a:solidFill>
+                <a:effectLst/>
+                <a:latin typeface="+mj-lt"/>
+              </a:rPr>
+              <a:t>label</a:t>
+            </a:r>
+            <a:r>
+              <a:rPr lang="es-ES" sz="3600" b="0" dirty="0">
+                <a:solidFill>
+                  <a:schemeClr val="tx1"/>
+                </a:solidFill>
+                <a:effectLst/>
+                <a:latin typeface="+mj-lt"/>
+              </a:rPr>
+              <a:t>: "Altura (Hb) [m]", </a:t>
+            </a:r>
+            <a:r>
+              <a:rPr lang="es-ES" sz="3600" b="0" dirty="0" err="1">
+                <a:solidFill>
+                  <a:schemeClr val="tx1"/>
+                </a:solidFill>
+                <a:effectLst/>
+                <a:latin typeface="+mj-lt"/>
+              </a:rPr>
+              <a:t>name</a:t>
+            </a:r>
+            <a:r>
+              <a:rPr lang="es-ES" sz="3600" b="0" dirty="0">
+                <a:solidFill>
+                  <a:schemeClr val="tx1"/>
+                </a:solidFill>
+                <a:effectLst/>
+                <a:latin typeface="+mj-lt"/>
+              </a:rPr>
+              <a:t>: "altura", min: 0.1 </a:t>
+            </a:r>
+            <a:r>
+              <a:rPr lang="es-ES" sz="3600" b="0" dirty="0" err="1">
+                <a:solidFill>
+                  <a:schemeClr val="tx1"/>
+                </a:solidFill>
+                <a:effectLst/>
+                <a:latin typeface="+mj-lt"/>
+              </a:rPr>
+              <a:t>max</a:t>
+            </a:r>
+            <a:r>
+              <a:rPr lang="es-ES" sz="3600" b="0" dirty="0">
+                <a:solidFill>
+                  <a:schemeClr val="tx1"/>
+                </a:solidFill>
+                <a:effectLst/>
+                <a:latin typeface="+mj-lt"/>
+              </a:rPr>
+              <a:t> 20 },</a:t>
+            </a:r>
+          </a:p>
+          <a:p>
+            <a:r>
+              <a:rPr lang="es-ES" sz="3600" b="0" dirty="0">
+                <a:solidFill>
+                  <a:schemeClr val="tx1"/>
+                </a:solidFill>
+                <a:effectLst/>
+                <a:latin typeface="+mj-lt"/>
+              </a:rPr>
+              <a:t>            { </a:t>
+            </a:r>
+            <a:r>
+              <a:rPr lang="es-ES" sz="3600" b="0" dirty="0" err="1">
+                <a:solidFill>
+                  <a:schemeClr val="tx1"/>
+                </a:solidFill>
+                <a:effectLst/>
+                <a:latin typeface="+mj-lt"/>
+              </a:rPr>
+              <a:t>label</a:t>
+            </a:r>
+            <a:r>
+              <a:rPr lang="es-ES" sz="3600" b="0" dirty="0">
+                <a:solidFill>
+                  <a:schemeClr val="tx1"/>
+                </a:solidFill>
+                <a:effectLst/>
+                <a:latin typeface="+mj-lt"/>
+              </a:rPr>
+              <a:t>: "Ángulo (</a:t>
+            </a:r>
+            <a:r>
+              <a:rPr lang="el-GR" sz="3600" b="0" dirty="0">
+                <a:solidFill>
+                  <a:schemeClr val="tx1"/>
+                </a:solidFill>
+                <a:effectLst/>
+                <a:latin typeface="+mj-lt"/>
+              </a:rPr>
+              <a:t>α) [°]", </a:t>
+            </a:r>
+            <a:r>
+              <a:rPr lang="es-ES" sz="3600" b="0" dirty="0" err="1">
+                <a:solidFill>
+                  <a:schemeClr val="tx1"/>
+                </a:solidFill>
+                <a:effectLst/>
+                <a:latin typeface="+mj-lt"/>
+              </a:rPr>
+              <a:t>name</a:t>
+            </a:r>
+            <a:r>
+              <a:rPr lang="es-ES" sz="3600" b="0" dirty="0">
+                <a:solidFill>
+                  <a:schemeClr val="tx1"/>
+                </a:solidFill>
+                <a:effectLst/>
+                <a:latin typeface="+mj-lt"/>
+              </a:rPr>
+              <a:t>: "</a:t>
+            </a:r>
+            <a:r>
+              <a:rPr lang="es-ES" sz="3600" b="0" dirty="0" err="1">
+                <a:solidFill>
+                  <a:schemeClr val="tx1"/>
+                </a:solidFill>
+                <a:effectLst/>
+                <a:latin typeface="+mj-lt"/>
+              </a:rPr>
+              <a:t>angulo</a:t>
+            </a:r>
+            <a:r>
+              <a:rPr lang="es-ES" sz="3600" b="0" dirty="0">
+                <a:solidFill>
+                  <a:schemeClr val="tx1"/>
+                </a:solidFill>
+                <a:effectLst/>
+                <a:latin typeface="+mj-lt"/>
+              </a:rPr>
+              <a:t>", min: 0, </a:t>
+            </a:r>
+            <a:r>
+              <a:rPr lang="es-ES" sz="3600" b="0" dirty="0" err="1">
+                <a:solidFill>
+                  <a:schemeClr val="tx1"/>
+                </a:solidFill>
+                <a:effectLst/>
+                <a:latin typeface="+mj-lt"/>
+              </a:rPr>
+              <a:t>max</a:t>
+            </a:r>
+            <a:r>
+              <a:rPr lang="es-ES" sz="3600" b="0" dirty="0">
+                <a:solidFill>
+                  <a:schemeClr val="tx1"/>
+                </a:solidFill>
+                <a:effectLst/>
+                <a:latin typeface="+mj-lt"/>
+              </a:rPr>
+              <a:t>: </a:t>
+            </a:r>
+            <a:r>
+              <a:rPr lang="es-ES" sz="3600" dirty="0">
+                <a:solidFill>
+                  <a:schemeClr val="tx1"/>
+                </a:solidFill>
+                <a:latin typeface="+mj-lt"/>
+              </a:rPr>
+              <a:t>180</a:t>
+            </a:r>
+            <a:r>
+              <a:rPr lang="es-ES" sz="3600" b="0" dirty="0">
+                <a:solidFill>
+                  <a:schemeClr val="tx1"/>
+                </a:solidFill>
+                <a:effectLst/>
+                <a:latin typeface="+mj-lt"/>
+              </a:rPr>
+              <a:t> },</a:t>
+            </a:r>
+          </a:p>
+          <a:p>
+            <a:r>
+              <a:rPr lang="es-ES" sz="3600" b="0" dirty="0">
+                <a:solidFill>
+                  <a:schemeClr val="tx1"/>
+                </a:solidFill>
+                <a:effectLst/>
+                <a:latin typeface="+mj-lt"/>
+              </a:rPr>
+              <a:t>            { </a:t>
+            </a:r>
+            <a:r>
+              <a:rPr lang="es-ES" sz="3600" b="0" dirty="0" err="1">
+                <a:solidFill>
+                  <a:schemeClr val="tx1"/>
+                </a:solidFill>
+                <a:effectLst/>
+                <a:latin typeface="+mj-lt"/>
+              </a:rPr>
+              <a:t>label</a:t>
+            </a:r>
+            <a:r>
+              <a:rPr lang="es-ES" sz="3600" b="0" dirty="0">
+                <a:solidFill>
+                  <a:schemeClr val="tx1"/>
+                </a:solidFill>
+                <a:effectLst/>
+                <a:latin typeface="+mj-lt"/>
+              </a:rPr>
+              <a:t>: "Aceleración de la Gravedad (g) [m/s²]", </a:t>
+            </a:r>
+            <a:r>
+              <a:rPr lang="es-ES" sz="3600" b="0" dirty="0" err="1">
+                <a:solidFill>
+                  <a:schemeClr val="tx1"/>
+                </a:solidFill>
+                <a:effectLst/>
+                <a:latin typeface="+mj-lt"/>
+              </a:rPr>
+              <a:t>name</a:t>
+            </a:r>
+            <a:r>
+              <a:rPr lang="es-ES" sz="3600" b="0" dirty="0">
+                <a:solidFill>
+                  <a:schemeClr val="tx1"/>
+                </a:solidFill>
+                <a:effectLst/>
+                <a:latin typeface="+mj-lt"/>
+              </a:rPr>
+              <a:t>: "</a:t>
+            </a:r>
+            <a:r>
+              <a:rPr lang="es-ES" sz="3600" b="0" dirty="0" err="1">
+                <a:solidFill>
+                  <a:schemeClr val="tx1"/>
+                </a:solidFill>
+                <a:effectLst/>
+                <a:latin typeface="+mj-lt"/>
+              </a:rPr>
+              <a:t>aceleracion</a:t>
+            </a:r>
+            <a:r>
+              <a:rPr lang="es-ES" sz="3600" b="0" dirty="0">
+                <a:solidFill>
+                  <a:schemeClr val="tx1"/>
+                </a:solidFill>
+                <a:effectLst/>
+                <a:latin typeface="+mj-lt"/>
+              </a:rPr>
+              <a:t>", min: 9.70, </a:t>
+            </a:r>
+            <a:r>
+              <a:rPr lang="es-ES" sz="3600" b="0" dirty="0" err="1">
+                <a:solidFill>
+                  <a:schemeClr val="tx1"/>
+                </a:solidFill>
+                <a:effectLst/>
+                <a:latin typeface="+mj-lt"/>
+              </a:rPr>
+              <a:t>max</a:t>
+            </a:r>
+            <a:r>
+              <a:rPr lang="es-ES" sz="3600" b="0" dirty="0">
+                <a:solidFill>
+                  <a:schemeClr val="tx1"/>
+                </a:solidFill>
+                <a:effectLst/>
+                <a:latin typeface="+mj-lt"/>
+              </a:rPr>
+              <a:t>: 9.90 },</a:t>
+            </a:r>
+          </a:p>
+          <a:p>
+            <a:r>
+              <a:rPr lang="es-ES" sz="3600" b="0" dirty="0">
+                <a:solidFill>
+                  <a:schemeClr val="tx1"/>
+                </a:solidFill>
+                <a:effectLst/>
+                <a:latin typeface="+mj-lt"/>
+              </a:rPr>
+              <a:t>            { </a:t>
+            </a:r>
+            <a:r>
+              <a:rPr lang="es-ES" sz="3600" b="0" dirty="0" err="1">
+                <a:solidFill>
+                  <a:schemeClr val="tx1"/>
+                </a:solidFill>
+                <a:effectLst/>
+                <a:latin typeface="+mj-lt"/>
+              </a:rPr>
+              <a:t>label</a:t>
+            </a:r>
+            <a:r>
+              <a:rPr lang="es-ES" sz="3600" b="0" dirty="0">
+                <a:solidFill>
+                  <a:schemeClr val="tx1"/>
+                </a:solidFill>
+                <a:effectLst/>
+                <a:latin typeface="+mj-lt"/>
+              </a:rPr>
+              <a:t>: "Medición Práctica (P) [m³]", </a:t>
+            </a:r>
+            <a:r>
+              <a:rPr lang="es-ES" sz="3600" b="0" dirty="0" err="1">
+                <a:solidFill>
+                  <a:schemeClr val="tx1"/>
+                </a:solidFill>
+                <a:effectLst/>
+                <a:latin typeface="+mj-lt"/>
+              </a:rPr>
+              <a:t>name</a:t>
+            </a:r>
+            <a:r>
+              <a:rPr lang="es-ES" sz="3600" b="0" dirty="0">
+                <a:solidFill>
+                  <a:schemeClr val="tx1"/>
+                </a:solidFill>
+                <a:effectLst/>
+                <a:latin typeface="+mj-lt"/>
+              </a:rPr>
+              <a:t>: "P", min: 0 },</a:t>
+            </a:r>
+          </a:p>
+          <a:p>
             <a:endParaRPr lang="es-ES" sz="4800" dirty="0"/>
           </a:p>
         </p:txBody>
@@ -8534,7 +6935,7 @@
     </p:spTree>
     <p:extLst>
       <p:ext uri="{BB962C8B-B14F-4D97-AF65-F5344CB8AC3E}">
-        <p14:creationId xmlns:p14="http://schemas.microsoft.com/office/powerpoint/2010/main" val="1544977281"/>
+        <p14:creationId xmlns:p14="http://schemas.microsoft.com/office/powerpoint/2010/main" val="3879228178"/>
       </p:ext>
     </p:extLst>
   </p:cSld>
@@ -8617,8 +7018,8 @@
         </p:nvSpPr>
         <p:spPr>
           <a:xfrm>
-            <a:off x="2057400" y="0"/>
-            <a:ext cx="15524018" cy="2424691"/>
+            <a:off x="5403273" y="1"/>
+            <a:ext cx="7730836" cy="1787236"/>
           </a:xfrm>
           <a:prstGeom prst="rect">
             <a:avLst/>
@@ -8665,8 +7066,8 @@
         </p:nvSpPr>
         <p:spPr>
           <a:xfrm>
-            <a:off x="2524991" y="535300"/>
-            <a:ext cx="14588836" cy="1354089"/>
+            <a:off x="5749916" y="27781"/>
+            <a:ext cx="6788168" cy="1354089"/>
           </a:xfrm>
           <a:prstGeom prst="rect">
             <a:avLst/>
@@ -8682,13 +7083,20 @@
           </a:bodyPr>
           <a:lstStyle/>
           <a:p>
-            <a:pPr lvl="0" algn="ctr">
+            <a:pPr marL="0" marR="0" lvl="0" indent="0" algn="ctr" rtl="0">
               <a:lnSpc>
                 <a:spcPct val="110001"/>
               </a:lnSpc>
+              <a:spcBef>
+                <a:spcPts val="0"/>
+              </a:spcBef>
+              <a:spcAft>
+                <a:spcPts val="0"/>
+              </a:spcAft>
+              <a:buNone/>
             </a:pPr>
             <a:r>
-              <a:rPr lang="en-US" sz="7999" b="1" i="0" u="none" strike="noStrike" cap="none" dirty="0">
+              <a:rPr lang="en-US" sz="7999" b="1" dirty="0" err="1">
                 <a:solidFill>
                   <a:srgbClr val="FFFFFF"/>
                 </a:solidFill>
@@ -8697,309 +7105,22 @@
                 <a:cs typeface="Poppins"/>
                 <a:sym typeface="Poppins"/>
               </a:rPr>
-              <a:t>Plan de </a:t>
-            </a:r>
-            <a:r>
-              <a:rPr lang="en-US" sz="7999" b="1" i="0" u="none" strike="noStrike" cap="none" dirty="0" err="1">
-                <a:solidFill>
-                  <a:srgbClr val="FFFFFF"/>
-                </a:solidFill>
-                <a:latin typeface="Poppins"/>
-                <a:ea typeface="Poppins"/>
-                <a:cs typeface="Poppins"/>
-                <a:sym typeface="Poppins"/>
-              </a:rPr>
-              <a:t>Tareas</a:t>
-            </a:r>
-            <a:endParaRPr lang="en-US" dirty="0"/>
+              <a:t>Ecuación</a:t>
+            </a:r>
+            <a:endParaRPr dirty="0"/>
           </a:p>
         </p:txBody>
       </p:sp>
       <p:sp>
         <p:nvSpPr>
-          <p:cNvPr id="7" name="CuadroTexto 6">
-            <a:extLst>
-              <a:ext uri="{FF2B5EF4-FFF2-40B4-BE49-F238E27FC236}">
-                <a16:creationId xmlns:a16="http://schemas.microsoft.com/office/drawing/2014/main" id="{C1159779-AFDD-4671-88BD-A628DC900C30}"/>
-              </a:ext>
-            </a:extLst>
-          </p:cNvPr>
+          <p:cNvPr id="153" name="Google Shape;153;p19"/>
           <p:cNvSpPr txBox="1"/>
           <p:nvPr/>
         </p:nvSpPr>
         <p:spPr>
           <a:xfrm>
-            <a:off x="1205345" y="2635121"/>
-            <a:ext cx="16376073" cy="3785652"/>
-          </a:xfrm>
-          <a:prstGeom prst="rect">
-            <a:avLst/>
-          </a:prstGeom>
-          <a:noFill/>
-        </p:spPr>
-        <p:txBody>
-          <a:bodyPr wrap="square">
-            <a:spAutoFit/>
-          </a:bodyPr>
-          <a:lstStyle/>
-          <a:p>
-            <a:r>
-              <a:rPr lang="es-ES" sz="4000" dirty="0"/>
-              <a:t>Orden de las Acciones y Prioridades:</a:t>
-            </a:r>
-          </a:p>
-          <a:p>
-            <a:pPr marL="571500" indent="-571500">
-              <a:buFontTx/>
-              <a:buChar char="-"/>
-            </a:pPr>
-            <a:r>
-              <a:rPr lang="es-ES" sz="4000" dirty="0"/>
-              <a:t>Desarrollar la Historia De Usuario: Calculo</a:t>
-            </a:r>
-          </a:p>
-          <a:p>
-            <a:pPr marL="571500" indent="-571500">
-              <a:buFontTx/>
-              <a:buChar char="-"/>
-            </a:pPr>
-            <a:r>
-              <a:rPr lang="es-ES" sz="4000" dirty="0"/>
-              <a:t>Desarrollar la Historia de Usuario: Usuarios</a:t>
-            </a:r>
-          </a:p>
-          <a:p>
-            <a:pPr marL="571500" indent="-571500">
-              <a:buFontTx/>
-              <a:buChar char="-"/>
-            </a:pPr>
-            <a:r>
-              <a:rPr lang="es-ES" sz="4000" dirty="0"/>
-              <a:t>Desarrollar la Historia de Usuario: Inicio y las Trazas del Sistema</a:t>
-            </a:r>
-          </a:p>
-          <a:p>
-            <a:pPr marL="571500" indent="-571500">
-              <a:buFontTx/>
-              <a:buChar char="-"/>
-            </a:pPr>
-            <a:r>
-              <a:rPr lang="es-ES" sz="4000" dirty="0"/>
-              <a:t>Desarrollar la </a:t>
-            </a:r>
-            <a:r>
-              <a:rPr lang="es-ES" sz="4000" dirty="0" err="1"/>
-              <a:t>Busqueda</a:t>
-            </a:r>
-            <a:r>
-              <a:rPr lang="es-ES" sz="4000" dirty="0"/>
-              <a:t> Avanzada y las Salvas</a:t>
-            </a:r>
-          </a:p>
-          <a:p>
-            <a:pPr marL="571500" indent="-571500">
-              <a:buFontTx/>
-              <a:buChar char="-"/>
-            </a:pPr>
-            <a:endParaRPr lang="es-ES" sz="4000" dirty="0"/>
-          </a:p>
-        </p:txBody>
-      </p:sp>
-    </p:spTree>
-    <p:extLst>
-      <p:ext uri="{BB962C8B-B14F-4D97-AF65-F5344CB8AC3E}">
-        <p14:creationId xmlns:p14="http://schemas.microsoft.com/office/powerpoint/2010/main" val="3048925536"/>
-      </p:ext>
-    </p:extLst>
-  </p:cSld>
-  <p:clrMapOvr>
-    <a:masterClrMapping/>
-  </p:clrMapOvr>
-</p:sld>
-</file>
-
-<file path=ppt/slides/slide7.xml><?xml version="1.0" encoding="utf-8"?>
-<p:sld xmlns:a="http://schemas.openxmlformats.org/drawingml/2006/main" xmlns:r="http://schemas.openxmlformats.org/officeDocument/2006/relationships" xmlns:p="http://schemas.openxmlformats.org/presentationml/2006/main">
-  <p:cSld>
-    <p:spTree>
-      <p:nvGrpSpPr>
-        <p:cNvPr id="1" name="Shape 162"/>
-        <p:cNvGrpSpPr/>
-        <p:nvPr/>
-      </p:nvGrpSpPr>
-      <p:grpSpPr>
-        <a:xfrm>
-          <a:off x="0" y="0"/>
-          <a:ext cx="0" cy="0"/>
-          <a:chOff x="0" y="0"/>
-          <a:chExt cx="0" cy="0"/>
-        </a:xfrm>
-      </p:grpSpPr>
-      <p:sp>
-        <p:nvSpPr>
-          <p:cNvPr id="163" name="Google Shape;163;p20"/>
-          <p:cNvSpPr/>
-          <p:nvPr/>
-        </p:nvSpPr>
-        <p:spPr>
-          <a:xfrm>
-            <a:off x="0" y="0"/>
-            <a:ext cx="18288000" cy="10287000"/>
-          </a:xfrm>
-          <a:prstGeom prst="rect">
-            <a:avLst/>
-          </a:prstGeom>
-          <a:gradFill>
-            <a:gsLst>
-              <a:gs pos="0">
-                <a:srgbClr val="14C5C3"/>
-              </a:gs>
-              <a:gs pos="100000">
-                <a:srgbClr val="4E7AD9"/>
-              </a:gs>
-            </a:gsLst>
-            <a:lin ang="2700000" scaled="0"/>
-          </a:gradFill>
-          <a:ln>
-            <a:noFill/>
-          </a:ln>
-        </p:spPr>
-        <p:txBody>
-          <a:bodyPr spcFirstLastPara="1" wrap="square" lIns="91425" tIns="91425" rIns="91425" bIns="91425" anchor="ctr" anchorCtr="0">
-            <a:noAutofit/>
-          </a:bodyPr>
-          <a:lstStyle/>
-          <a:p>
-            <a:pPr marL="0" lvl="0" indent="0" algn="l" rtl="0">
-              <a:spcBef>
-                <a:spcPts val="0"/>
-              </a:spcBef>
-              <a:spcAft>
-                <a:spcPts val="0"/>
-              </a:spcAft>
-              <a:buNone/>
-            </a:pPr>
-            <a:endParaRPr/>
-          </a:p>
-        </p:txBody>
-      </p:sp>
-      <p:grpSp>
-        <p:nvGrpSpPr>
-          <p:cNvPr id="164" name="Google Shape;164;p20"/>
-          <p:cNvGrpSpPr/>
-          <p:nvPr/>
-        </p:nvGrpSpPr>
-        <p:grpSpPr>
-          <a:xfrm>
-            <a:off x="4081176" y="1125097"/>
-            <a:ext cx="14206824" cy="8036802"/>
-            <a:chOff x="0" y="-38100"/>
-            <a:chExt cx="3741715" cy="2116689"/>
-          </a:xfrm>
-        </p:grpSpPr>
-        <p:sp>
-          <p:nvSpPr>
-            <p:cNvPr id="165" name="Google Shape;165;p20"/>
-            <p:cNvSpPr/>
-            <p:nvPr/>
-          </p:nvSpPr>
-          <p:spPr>
-            <a:xfrm>
-              <a:off x="0" y="0"/>
-              <a:ext cx="3741715" cy="2078589"/>
-            </a:xfrm>
-            <a:custGeom>
-              <a:avLst/>
-              <a:gdLst/>
-              <a:ahLst/>
-              <a:cxnLst/>
-              <a:rect l="l" t="t" r="r" b="b"/>
-              <a:pathLst>
-                <a:path w="3741715" h="2078589" extrusionOk="0">
-                  <a:moveTo>
-                    <a:pt x="0" y="0"/>
-                  </a:moveTo>
-                  <a:lnTo>
-                    <a:pt x="3741715" y="0"/>
-                  </a:lnTo>
-                  <a:lnTo>
-                    <a:pt x="3741715" y="2078589"/>
-                  </a:lnTo>
-                  <a:lnTo>
-                    <a:pt x="0" y="2078589"/>
-                  </a:lnTo>
-                  <a:close/>
-                </a:path>
-              </a:pathLst>
-            </a:custGeom>
-            <a:solidFill>
-              <a:srgbClr val="FFFFFF"/>
-            </a:solidFill>
-            <a:ln>
-              <a:noFill/>
-            </a:ln>
-          </p:spPr>
-        </p:sp>
-        <p:sp>
-          <p:nvSpPr>
-            <p:cNvPr id="166" name="Google Shape;166;p20"/>
-            <p:cNvSpPr txBox="1"/>
-            <p:nvPr/>
-          </p:nvSpPr>
-          <p:spPr>
-            <a:xfrm>
-              <a:off x="0" y="-38100"/>
-              <a:ext cx="3741715" cy="2116689"/>
-            </a:xfrm>
-            <a:prstGeom prst="rect">
-              <a:avLst/>
-            </a:prstGeom>
-            <a:noFill/>
-            <a:ln>
-              <a:noFill/>
-            </a:ln>
-          </p:spPr>
-          <p:txBody>
-            <a:bodyPr spcFirstLastPara="1" wrap="square" lIns="50800" tIns="50800" rIns="50800" bIns="50800" anchor="ctr" anchorCtr="0">
-              <a:noAutofit/>
-            </a:bodyPr>
-            <a:lstStyle/>
-            <a:p>
-              <a:pPr marL="0" marR="0" lvl="0" indent="0" algn="ctr" rtl="0">
-                <a:lnSpc>
-                  <a:spcPct val="147722"/>
-                </a:lnSpc>
-                <a:spcBef>
-                  <a:spcPts val="0"/>
-                </a:spcBef>
-                <a:spcAft>
-                  <a:spcPts val="0"/>
-                </a:spcAft>
-                <a:buNone/>
-              </a:pPr>
-              <a:endParaRPr sz="1800" b="0" i="0" u="none" strike="noStrike" cap="none">
-                <a:solidFill>
-                  <a:schemeClr val="dk1"/>
-                </a:solidFill>
-                <a:latin typeface="Calibri"/>
-                <a:ea typeface="Calibri"/>
-                <a:cs typeface="Calibri"/>
-                <a:sym typeface="Calibri"/>
-              </a:endParaRPr>
-            </a:p>
-          </p:txBody>
-        </p:sp>
-      </p:grpSp>
-      <p:sp>
-        <p:nvSpPr>
-          <p:cNvPr id="168" name="Google Shape;168;p20"/>
-          <p:cNvSpPr txBox="1"/>
-          <p:nvPr/>
-        </p:nvSpPr>
-        <p:spPr>
-          <a:xfrm>
-            <a:off x="8817961" y="1476038"/>
-            <a:ext cx="9971400" cy="8248412"/>
+            <a:off x="1215736" y="1517249"/>
+            <a:ext cx="17778845" cy="10287000"/>
           </a:xfrm>
           <a:prstGeom prst="rect">
             <a:avLst/>
@@ -9016,348 +7137,1001 @@
           <a:lstStyle/>
           <a:p>
             <a:r>
-              <a:rPr lang="es-ES" sz="3600" dirty="0"/>
-              <a:t>Esto en un primera etapa de proyecto </a:t>
-            </a:r>
-          </a:p>
-          <a:p>
-            <a:r>
-              <a:rPr lang="es-ES" sz="3600" dirty="0"/>
-              <a:t>porque nuestro  objetivo es desarrollar una</a:t>
-            </a:r>
-          </a:p>
-          <a:p>
-            <a:r>
-              <a:rPr lang="es-ES" sz="3600" dirty="0"/>
-              <a:t> aplicación web </a:t>
-            </a:r>
-          </a:p>
-          <a:p>
-            <a:r>
-              <a:rPr lang="es-ES" sz="3600" dirty="0"/>
-              <a:t>Si en este centro se realizaría alguna investigación sobre el transporte de sedimentos. ¿ le gustaría conocer el comportamiento de la playa Siboney </a:t>
-            </a:r>
-          </a:p>
-          <a:p>
-            <a:r>
-              <a:rPr lang="es-ES" sz="3600" dirty="0"/>
-              <a:t>o la de Varadero sin necesidad de hacer un </a:t>
-            </a:r>
-          </a:p>
-          <a:p>
-            <a:r>
-              <a:rPr lang="es-ES" sz="3600" dirty="0"/>
-              <a:t>viaje tan largo ? </a:t>
-            </a:r>
-          </a:p>
-          <a:p>
-            <a:r>
-              <a:rPr lang="es-ES" sz="3600" dirty="0"/>
-              <a:t>Desde aquí mismo sólo con entrar a dirección web. </a:t>
-            </a:r>
-          </a:p>
-          <a:p>
-            <a:r>
-              <a:rPr lang="es-ES" sz="3600" dirty="0"/>
-              <a:t>Imagine que pueda ser usado por </a:t>
-            </a:r>
-          </a:p>
-          <a:p>
-            <a:r>
-              <a:rPr lang="es-ES" sz="3600" dirty="0"/>
-              <a:t>cualquier país del mundo. </a:t>
-            </a:r>
-          </a:p>
-          <a:p>
-            <a:r>
-              <a:rPr lang="es-ES" sz="3600" dirty="0"/>
-              <a:t>Sorprendente Verdad</a:t>
-            </a:r>
-          </a:p>
-          <a:p>
-            <a:endParaRPr lang="es-ES" sz="3200" dirty="0"/>
+              <a:rPr lang="es-ES" sz="2400" b="0" dirty="0">
+                <a:solidFill>
+                  <a:schemeClr val="tx1"/>
+                </a:solidFill>
+                <a:effectLst/>
+                <a:latin typeface="+mn-lt"/>
+              </a:rPr>
+              <a:t>try {</a:t>
+            </a:r>
+          </a:p>
+          <a:p>
+            <a:r>
+              <a:rPr lang="es-ES" sz="2400" b="0" dirty="0">
+                <a:solidFill>
+                  <a:schemeClr val="tx1"/>
+                </a:solidFill>
+                <a:effectLst/>
+                <a:latin typeface="+mn-lt"/>
+              </a:rPr>
+              <a:t>      </a:t>
+            </a:r>
+            <a:r>
+              <a:rPr lang="es-ES" sz="2400" b="0" dirty="0" err="1">
+                <a:solidFill>
+                  <a:schemeClr val="tx1"/>
+                </a:solidFill>
+                <a:effectLst/>
+                <a:latin typeface="+mn-lt"/>
+              </a:rPr>
+              <a:t>const</a:t>
+            </a:r>
+            <a:r>
+              <a:rPr lang="es-ES" sz="2400" b="0" dirty="0">
+                <a:solidFill>
+                  <a:schemeClr val="tx1"/>
+                </a:solidFill>
+                <a:effectLst/>
+                <a:latin typeface="+mn-lt"/>
+              </a:rPr>
+              <a:t> N = </a:t>
+            </a:r>
+            <a:r>
+              <a:rPr lang="es-ES" sz="2400" b="0" dirty="0" err="1">
+                <a:solidFill>
+                  <a:schemeClr val="tx1"/>
+                </a:solidFill>
+                <a:effectLst/>
+                <a:latin typeface="+mn-lt"/>
+              </a:rPr>
+              <a:t>densidad_a</a:t>
+            </a:r>
+            <a:r>
+              <a:rPr lang="es-ES" sz="2400" b="0" dirty="0">
+                <a:solidFill>
+                  <a:schemeClr val="tx1"/>
+                </a:solidFill>
+                <a:effectLst/>
+                <a:latin typeface="+mn-lt"/>
+              </a:rPr>
+              <a:t> * </a:t>
+            </a:r>
+            <a:r>
+              <a:rPr lang="es-ES" sz="2400" b="0" dirty="0" err="1">
+                <a:solidFill>
+                  <a:schemeClr val="tx1"/>
+                </a:solidFill>
+                <a:effectLst/>
+                <a:latin typeface="+mn-lt"/>
+              </a:rPr>
+              <a:t>Math.sqrt</a:t>
+            </a:r>
+            <a:r>
+              <a:rPr lang="es-ES" sz="2400" b="0" dirty="0">
+                <a:solidFill>
+                  <a:schemeClr val="tx1"/>
+                </a:solidFill>
+                <a:effectLst/>
+                <a:latin typeface="+mn-lt"/>
+              </a:rPr>
+              <a:t>(</a:t>
+            </a:r>
+            <a:r>
+              <a:rPr lang="es-ES" sz="2400" b="0" dirty="0" err="1">
+                <a:solidFill>
+                  <a:schemeClr val="tx1"/>
+                </a:solidFill>
+                <a:effectLst/>
+                <a:latin typeface="+mn-lt"/>
+              </a:rPr>
+              <a:t>aceleracion</a:t>
+            </a:r>
+            <a:r>
+              <a:rPr lang="es-ES" sz="2400" b="0" dirty="0">
+                <a:solidFill>
+                  <a:schemeClr val="tx1"/>
+                </a:solidFill>
+                <a:effectLst/>
+                <a:latin typeface="+mn-lt"/>
+              </a:rPr>
+              <a:t>);</a:t>
+            </a:r>
+          </a:p>
+          <a:p>
+            <a:r>
+              <a:rPr lang="es-ES" sz="2400" b="0" dirty="0">
+                <a:solidFill>
+                  <a:schemeClr val="tx1"/>
+                </a:solidFill>
+                <a:effectLst/>
+                <a:latin typeface="+mn-lt"/>
+              </a:rPr>
+              <a:t>      </a:t>
+            </a:r>
+            <a:r>
+              <a:rPr lang="es-ES" sz="2400" b="0" dirty="0" err="1">
+                <a:solidFill>
+                  <a:schemeClr val="tx1"/>
+                </a:solidFill>
+                <a:effectLst/>
+                <a:latin typeface="+mn-lt"/>
+              </a:rPr>
+              <a:t>const</a:t>
+            </a:r>
+            <a:r>
+              <a:rPr lang="es-ES" sz="2400" b="0" dirty="0">
+                <a:solidFill>
+                  <a:schemeClr val="tx1"/>
+                </a:solidFill>
+                <a:effectLst/>
+                <a:latin typeface="+mn-lt"/>
+              </a:rPr>
+              <a:t> D = 16 * </a:t>
+            </a:r>
+            <a:r>
+              <a:rPr lang="es-ES" sz="2400" b="0" dirty="0" err="1">
+                <a:solidFill>
+                  <a:schemeClr val="tx1"/>
+                </a:solidFill>
+                <a:effectLst/>
+                <a:latin typeface="+mn-lt"/>
+              </a:rPr>
+              <a:t>Math.sqrt</a:t>
+            </a:r>
+            <a:r>
+              <a:rPr lang="es-ES" sz="2400" b="0" dirty="0">
+                <a:solidFill>
+                  <a:schemeClr val="tx1"/>
+                </a:solidFill>
+                <a:effectLst/>
+                <a:latin typeface="+mn-lt"/>
+              </a:rPr>
+              <a:t>(</a:t>
+            </a:r>
+            <a:r>
+              <a:rPr lang="es-ES" sz="2400" b="0" dirty="0" err="1">
+                <a:solidFill>
+                  <a:schemeClr val="tx1"/>
+                </a:solidFill>
+                <a:effectLst/>
+                <a:latin typeface="+mn-lt"/>
+              </a:rPr>
+              <a:t>indice</a:t>
+            </a:r>
+            <a:r>
+              <a:rPr lang="es-ES" sz="2400" b="0" dirty="0">
+                <a:solidFill>
+                  <a:schemeClr val="tx1"/>
+                </a:solidFill>
+                <a:effectLst/>
+                <a:latin typeface="+mn-lt"/>
+              </a:rPr>
+              <a:t>) * (</a:t>
+            </a:r>
+            <a:r>
+              <a:rPr lang="es-ES" sz="2400" b="0" dirty="0" err="1">
+                <a:solidFill>
+                  <a:schemeClr val="tx1"/>
+                </a:solidFill>
+                <a:effectLst/>
+                <a:latin typeface="+mn-lt"/>
+              </a:rPr>
+              <a:t>densidad_a</a:t>
+            </a:r>
+            <a:r>
+              <a:rPr lang="es-ES" sz="2400" b="0" dirty="0">
+                <a:solidFill>
+                  <a:schemeClr val="tx1"/>
+                </a:solidFill>
+                <a:effectLst/>
+                <a:latin typeface="+mn-lt"/>
+              </a:rPr>
+              <a:t> - </a:t>
+            </a:r>
+            <a:r>
+              <a:rPr lang="es-ES" sz="2400" b="0" dirty="0" err="1">
+                <a:solidFill>
+                  <a:schemeClr val="tx1"/>
+                </a:solidFill>
+                <a:effectLst/>
+                <a:latin typeface="+mn-lt"/>
+              </a:rPr>
+              <a:t>densidad_m</a:t>
+            </a:r>
+            <a:r>
+              <a:rPr lang="es-ES" sz="2400" b="0" dirty="0">
+                <a:solidFill>
+                  <a:schemeClr val="tx1"/>
+                </a:solidFill>
+                <a:effectLst/>
+                <a:latin typeface="+mn-lt"/>
+              </a:rPr>
+              <a:t>) * (1 - coeficiente);</a:t>
+            </a:r>
+          </a:p>
+          <a:p>
+            <a:br>
+              <a:rPr lang="es-ES" sz="2400" b="0" dirty="0">
+                <a:solidFill>
+                  <a:schemeClr val="tx1"/>
+                </a:solidFill>
+                <a:effectLst/>
+                <a:latin typeface="+mn-lt"/>
+              </a:rPr>
+            </a:br>
+            <a:r>
+              <a:rPr lang="es-ES" sz="2400" b="0" dirty="0">
+                <a:solidFill>
+                  <a:schemeClr val="tx1"/>
+                </a:solidFill>
+                <a:effectLst/>
+                <a:latin typeface="+mn-lt"/>
+              </a:rPr>
+              <a:t>      </a:t>
+            </a:r>
+            <a:r>
+              <a:rPr lang="es-ES" sz="2400" b="0" dirty="0" err="1">
+                <a:solidFill>
+                  <a:schemeClr val="tx1"/>
+                </a:solidFill>
+                <a:effectLst/>
+                <a:latin typeface="+mn-lt"/>
+              </a:rPr>
+              <a:t>if</a:t>
+            </a:r>
+            <a:r>
+              <a:rPr lang="es-ES" sz="2400" b="0" dirty="0">
+                <a:solidFill>
+                  <a:schemeClr val="tx1"/>
+                </a:solidFill>
+                <a:effectLst/>
+                <a:latin typeface="+mn-lt"/>
+              </a:rPr>
+              <a:t> (D === 0) {</a:t>
+            </a:r>
+          </a:p>
+          <a:p>
+            <a:r>
+              <a:rPr lang="es-ES" sz="2400" b="0" dirty="0">
+                <a:solidFill>
+                  <a:schemeClr val="tx1"/>
+                </a:solidFill>
+                <a:effectLst/>
+                <a:latin typeface="+mn-lt"/>
+              </a:rPr>
+              <a:t>        </a:t>
+            </a:r>
+            <a:r>
+              <a:rPr lang="es-ES" sz="2400" b="0" dirty="0" err="1">
+                <a:solidFill>
+                  <a:schemeClr val="tx1"/>
+                </a:solidFill>
+                <a:effectLst/>
+                <a:latin typeface="+mn-lt"/>
+              </a:rPr>
+              <a:t>throw</a:t>
+            </a:r>
+            <a:r>
+              <a:rPr lang="es-ES" sz="2400" b="0" dirty="0">
+                <a:solidFill>
+                  <a:schemeClr val="tx1"/>
+                </a:solidFill>
+                <a:effectLst/>
+                <a:latin typeface="+mn-lt"/>
+              </a:rPr>
+              <a:t> new </a:t>
+            </a:r>
+            <a:r>
+              <a:rPr lang="es-ES" sz="2400" b="0" dirty="0" err="1">
+                <a:solidFill>
+                  <a:schemeClr val="tx1"/>
+                </a:solidFill>
+                <a:effectLst/>
+                <a:latin typeface="+mn-lt"/>
+              </a:rPr>
+              <a:t>HttpException</a:t>
+            </a:r>
+            <a:r>
+              <a:rPr lang="es-ES" sz="2400" b="0" dirty="0">
+                <a:solidFill>
+                  <a:schemeClr val="tx1"/>
+                </a:solidFill>
+                <a:effectLst/>
+                <a:latin typeface="+mn-lt"/>
+              </a:rPr>
+              <a:t>('División por cero no permitida', </a:t>
+            </a:r>
+            <a:r>
+              <a:rPr lang="es-ES" sz="2400" b="0" dirty="0" err="1">
+                <a:solidFill>
+                  <a:schemeClr val="tx1"/>
+                </a:solidFill>
+                <a:effectLst/>
+                <a:latin typeface="+mn-lt"/>
+              </a:rPr>
+              <a:t>HttpStatus.BAD_REQUEST</a:t>
+            </a:r>
+            <a:r>
+              <a:rPr lang="es-ES" sz="2400" b="0" dirty="0">
+                <a:solidFill>
+                  <a:schemeClr val="tx1"/>
+                </a:solidFill>
+                <a:effectLst/>
+                <a:latin typeface="+mn-lt"/>
+              </a:rPr>
+              <a:t>);</a:t>
+            </a:r>
+          </a:p>
+          <a:p>
+            <a:r>
+              <a:rPr lang="es-ES" sz="2400" b="0" dirty="0">
+                <a:solidFill>
+                  <a:schemeClr val="tx1"/>
+                </a:solidFill>
+                <a:effectLst/>
+                <a:latin typeface="+mn-lt"/>
+              </a:rPr>
+              <a:t>      }</a:t>
+            </a:r>
+          </a:p>
+          <a:p>
+            <a:br>
+              <a:rPr lang="es-ES" sz="2400" b="0" dirty="0">
+                <a:solidFill>
+                  <a:schemeClr val="tx1"/>
+                </a:solidFill>
+                <a:effectLst/>
+                <a:latin typeface="+mn-lt"/>
+              </a:rPr>
+            </a:br>
+            <a:r>
+              <a:rPr lang="es-ES" sz="2400" b="0" dirty="0">
+                <a:solidFill>
+                  <a:schemeClr val="tx1"/>
+                </a:solidFill>
+                <a:effectLst/>
+                <a:latin typeface="+mn-lt"/>
+              </a:rPr>
+              <a:t>      </a:t>
+            </a:r>
+            <a:r>
+              <a:rPr lang="es-ES" sz="2400" b="0" dirty="0" err="1">
+                <a:solidFill>
+                  <a:schemeClr val="tx1"/>
+                </a:solidFill>
+                <a:effectLst/>
+                <a:latin typeface="+mn-lt"/>
+              </a:rPr>
+              <a:t>const</a:t>
+            </a:r>
+            <a:r>
+              <a:rPr lang="es-ES" sz="2400" b="0" dirty="0">
+                <a:solidFill>
+                  <a:schemeClr val="tx1"/>
+                </a:solidFill>
+                <a:effectLst/>
+                <a:latin typeface="+mn-lt"/>
+              </a:rPr>
+              <a:t> </a:t>
+            </a:r>
+            <a:r>
+              <a:rPr lang="es-ES" sz="2400" b="0" dirty="0" err="1">
+                <a:solidFill>
+                  <a:schemeClr val="tx1"/>
+                </a:solidFill>
+                <a:effectLst/>
+                <a:latin typeface="+mn-lt"/>
+              </a:rPr>
+              <a:t>alturaPotencia</a:t>
+            </a:r>
+            <a:r>
+              <a:rPr lang="es-ES" sz="2400" b="0" dirty="0">
+                <a:solidFill>
+                  <a:schemeClr val="tx1"/>
+                </a:solidFill>
+                <a:effectLst/>
+                <a:latin typeface="+mn-lt"/>
+              </a:rPr>
+              <a:t> = </a:t>
+            </a:r>
+            <a:r>
+              <a:rPr lang="es-ES" sz="2400" b="0" dirty="0" err="1">
+                <a:solidFill>
+                  <a:schemeClr val="tx1"/>
+                </a:solidFill>
+                <a:effectLst/>
+                <a:latin typeface="+mn-lt"/>
+              </a:rPr>
+              <a:t>Math.pow</a:t>
+            </a:r>
+            <a:r>
+              <a:rPr lang="es-ES" sz="2400" b="0" dirty="0">
+                <a:solidFill>
+                  <a:schemeClr val="tx1"/>
+                </a:solidFill>
+                <a:effectLst/>
+                <a:latin typeface="+mn-lt"/>
+              </a:rPr>
+              <a:t>(altura, 5);</a:t>
+            </a:r>
+          </a:p>
+          <a:p>
+            <a:r>
+              <a:rPr lang="es-ES" sz="2400" b="0" dirty="0">
+                <a:solidFill>
+                  <a:schemeClr val="tx1"/>
+                </a:solidFill>
+                <a:effectLst/>
+                <a:latin typeface="+mn-lt"/>
+              </a:rPr>
+              <a:t>      </a:t>
+            </a:r>
+            <a:r>
+              <a:rPr lang="es-ES" sz="2400" b="0" dirty="0" err="1">
+                <a:solidFill>
+                  <a:schemeClr val="tx1"/>
+                </a:solidFill>
+                <a:effectLst/>
+                <a:latin typeface="+mn-lt"/>
+              </a:rPr>
+              <a:t>const</a:t>
+            </a:r>
+            <a:r>
+              <a:rPr lang="es-ES" sz="2400" b="0" dirty="0">
+                <a:solidFill>
+                  <a:schemeClr val="tx1"/>
+                </a:solidFill>
+                <a:effectLst/>
+                <a:latin typeface="+mn-lt"/>
+              </a:rPr>
+              <a:t> seno = </a:t>
+            </a:r>
+            <a:r>
+              <a:rPr lang="es-ES" sz="2400" b="0" dirty="0" err="1">
+                <a:solidFill>
+                  <a:schemeClr val="tx1"/>
+                </a:solidFill>
+                <a:effectLst/>
+                <a:latin typeface="+mn-lt"/>
+              </a:rPr>
+              <a:t>Math.sin</a:t>
+            </a:r>
+            <a:r>
+              <a:rPr lang="es-ES" sz="2400" b="0" dirty="0">
+                <a:solidFill>
+                  <a:schemeClr val="tx1"/>
+                </a:solidFill>
+                <a:effectLst/>
+                <a:latin typeface="+mn-lt"/>
+              </a:rPr>
+              <a:t>(2 * </a:t>
+            </a:r>
+            <a:r>
+              <a:rPr lang="es-ES" sz="2400" b="0" dirty="0" err="1">
+                <a:solidFill>
+                  <a:schemeClr val="tx1"/>
+                </a:solidFill>
+                <a:effectLst/>
+                <a:latin typeface="+mn-lt"/>
+              </a:rPr>
+              <a:t>angulo</a:t>
+            </a:r>
+            <a:r>
+              <a:rPr lang="es-ES" sz="2400" b="0" dirty="0">
+                <a:solidFill>
+                  <a:schemeClr val="tx1"/>
+                </a:solidFill>
+                <a:effectLst/>
+                <a:latin typeface="+mn-lt"/>
+              </a:rPr>
+              <a:t>);</a:t>
+            </a:r>
+          </a:p>
+          <a:p>
+            <a:br>
+              <a:rPr lang="es-ES" sz="2400" b="0" dirty="0">
+                <a:solidFill>
+                  <a:schemeClr val="tx1"/>
+                </a:solidFill>
+                <a:effectLst/>
+                <a:latin typeface="+mn-lt"/>
+              </a:rPr>
+            </a:br>
+            <a:r>
+              <a:rPr lang="es-ES" sz="2400" b="0" dirty="0">
+                <a:solidFill>
+                  <a:schemeClr val="tx1"/>
+                </a:solidFill>
+                <a:effectLst/>
+                <a:latin typeface="+mn-lt"/>
+              </a:rPr>
+              <a:t>      </a:t>
+            </a:r>
+            <a:r>
+              <a:rPr lang="es-ES" sz="2400" b="0" dirty="0" err="1">
+                <a:solidFill>
+                  <a:schemeClr val="tx1"/>
+                </a:solidFill>
+                <a:effectLst/>
+                <a:latin typeface="+mn-lt"/>
+              </a:rPr>
+              <a:t>const</a:t>
+            </a:r>
+            <a:r>
+              <a:rPr lang="es-ES" sz="2400" b="0" dirty="0">
+                <a:solidFill>
+                  <a:schemeClr val="tx1"/>
+                </a:solidFill>
+                <a:effectLst/>
+                <a:latin typeface="+mn-lt"/>
+              </a:rPr>
+              <a:t> Q = (N / D) * </a:t>
+            </a:r>
+            <a:r>
+              <a:rPr lang="es-ES" sz="2400" b="0" dirty="0" err="1">
+                <a:solidFill>
+                  <a:schemeClr val="tx1"/>
+                </a:solidFill>
+                <a:effectLst/>
+                <a:latin typeface="+mn-lt"/>
+              </a:rPr>
+              <a:t>Math.sqrt</a:t>
+            </a:r>
+            <a:r>
+              <a:rPr lang="es-ES" sz="2400" b="0" dirty="0">
+                <a:solidFill>
+                  <a:schemeClr val="tx1"/>
+                </a:solidFill>
+                <a:effectLst/>
+                <a:latin typeface="+mn-lt"/>
+              </a:rPr>
+              <a:t>(</a:t>
+            </a:r>
+            <a:r>
+              <a:rPr lang="es-ES" sz="2400" b="0" dirty="0" err="1">
+                <a:solidFill>
+                  <a:schemeClr val="tx1"/>
+                </a:solidFill>
+                <a:effectLst/>
+                <a:latin typeface="+mn-lt"/>
+              </a:rPr>
+              <a:t>alturaPotencia</a:t>
+            </a:r>
+            <a:r>
+              <a:rPr lang="es-ES" sz="2400" b="0" dirty="0">
+                <a:solidFill>
+                  <a:schemeClr val="tx1"/>
+                </a:solidFill>
+                <a:effectLst/>
+                <a:latin typeface="+mn-lt"/>
+              </a:rPr>
+              <a:t>) * seno;</a:t>
+            </a:r>
+          </a:p>
+          <a:p>
+            <a:r>
+              <a:rPr lang="es-ES" sz="2400" b="0" dirty="0">
+                <a:solidFill>
+                  <a:schemeClr val="tx1"/>
+                </a:solidFill>
+                <a:effectLst/>
+                <a:latin typeface="+mn-lt"/>
+              </a:rPr>
+              <a:t>      </a:t>
+            </a:r>
+          </a:p>
+          <a:p>
+            <a:r>
+              <a:rPr lang="es-ES" sz="2400" b="0" dirty="0">
+                <a:solidFill>
+                  <a:schemeClr val="tx1"/>
+                </a:solidFill>
+                <a:effectLst/>
+                <a:latin typeface="+mn-lt"/>
+              </a:rPr>
+              <a:t>      </a:t>
+            </a:r>
+            <a:r>
+              <a:rPr lang="es-ES" sz="2400" b="0" dirty="0" err="1">
+                <a:solidFill>
+                  <a:schemeClr val="tx1"/>
+                </a:solidFill>
+                <a:effectLst/>
+                <a:latin typeface="+mn-lt"/>
+              </a:rPr>
+              <a:t>if</a:t>
+            </a:r>
+            <a:r>
+              <a:rPr lang="es-ES" sz="2400" b="0" dirty="0">
+                <a:solidFill>
+                  <a:schemeClr val="tx1"/>
+                </a:solidFill>
+                <a:effectLst/>
+                <a:latin typeface="+mn-lt"/>
+              </a:rPr>
+              <a:t> (</a:t>
+            </a:r>
+            <a:r>
+              <a:rPr lang="es-ES" sz="2400" b="0" dirty="0" err="1">
+                <a:solidFill>
+                  <a:schemeClr val="tx1"/>
+                </a:solidFill>
+                <a:effectLst/>
+                <a:latin typeface="+mn-lt"/>
+              </a:rPr>
+              <a:t>isNaN</a:t>
+            </a:r>
+            <a:r>
+              <a:rPr lang="es-ES" sz="2400" b="0" dirty="0">
+                <a:solidFill>
+                  <a:schemeClr val="tx1"/>
+                </a:solidFill>
+                <a:effectLst/>
+                <a:latin typeface="+mn-lt"/>
+              </a:rPr>
+              <a:t>(Q)) {</a:t>
+            </a:r>
+          </a:p>
+          <a:p>
+            <a:r>
+              <a:rPr lang="es-ES" sz="2400" b="0" dirty="0">
+                <a:solidFill>
+                  <a:schemeClr val="tx1"/>
+                </a:solidFill>
+                <a:effectLst/>
+                <a:latin typeface="+mn-lt"/>
+              </a:rPr>
+              <a:t>            </a:t>
+            </a:r>
+            <a:r>
+              <a:rPr lang="es-ES" sz="2400" b="0" dirty="0" err="1">
+                <a:solidFill>
+                  <a:schemeClr val="tx1"/>
+                </a:solidFill>
+                <a:effectLst/>
+                <a:latin typeface="+mn-lt"/>
+              </a:rPr>
+              <a:t>throw</a:t>
+            </a:r>
+            <a:r>
+              <a:rPr lang="es-ES" sz="2400" b="0" dirty="0">
+                <a:solidFill>
+                  <a:schemeClr val="tx1"/>
+                </a:solidFill>
+                <a:effectLst/>
+                <a:latin typeface="+mn-lt"/>
+              </a:rPr>
+              <a:t> new </a:t>
+            </a:r>
+            <a:r>
+              <a:rPr lang="es-ES" sz="2400" b="0" dirty="0" err="1">
+                <a:solidFill>
+                  <a:schemeClr val="tx1"/>
+                </a:solidFill>
+                <a:effectLst/>
+                <a:latin typeface="+mn-lt"/>
+              </a:rPr>
+              <a:t>HttpException</a:t>
+            </a:r>
+            <a:r>
+              <a:rPr lang="es-ES" sz="2400" b="0" dirty="0">
+                <a:solidFill>
+                  <a:schemeClr val="tx1"/>
+                </a:solidFill>
+                <a:effectLst/>
+                <a:latin typeface="+mn-lt"/>
+              </a:rPr>
+              <a:t>('Resultado no es un número válido', </a:t>
+            </a:r>
+            <a:r>
+              <a:rPr lang="es-ES" sz="2400" b="0" dirty="0" err="1">
+                <a:solidFill>
+                  <a:schemeClr val="tx1"/>
+                </a:solidFill>
+                <a:effectLst/>
+                <a:latin typeface="+mn-lt"/>
+              </a:rPr>
+              <a:t>HttpStatus.BAD_REQUEST</a:t>
+            </a:r>
+            <a:r>
+              <a:rPr lang="es-ES" sz="2400" b="0" dirty="0">
+                <a:solidFill>
+                  <a:schemeClr val="tx1"/>
+                </a:solidFill>
+                <a:effectLst/>
+                <a:latin typeface="+mn-lt"/>
+              </a:rPr>
+              <a:t>);</a:t>
+            </a:r>
+          </a:p>
+          <a:p>
+            <a:r>
+              <a:rPr lang="es-ES" sz="2400" b="0" dirty="0">
+                <a:solidFill>
+                  <a:schemeClr val="tx1"/>
+                </a:solidFill>
+                <a:effectLst/>
+                <a:latin typeface="+mn-lt"/>
+              </a:rPr>
+              <a:t>          }</a:t>
+            </a:r>
+          </a:p>
+          <a:p>
+            <a:br>
+              <a:rPr lang="es-ES" sz="2400" b="0" dirty="0">
+                <a:solidFill>
+                  <a:schemeClr val="tx1"/>
+                </a:solidFill>
+                <a:effectLst/>
+                <a:latin typeface="+mn-lt"/>
+              </a:rPr>
+            </a:br>
+            <a:r>
+              <a:rPr lang="es-ES" sz="2400" b="0" dirty="0">
+                <a:solidFill>
+                  <a:schemeClr val="tx1"/>
+                </a:solidFill>
+                <a:effectLst/>
+                <a:latin typeface="+mn-lt"/>
+              </a:rPr>
+              <a:t>          </a:t>
+            </a:r>
+            <a:r>
+              <a:rPr lang="es-ES" sz="2400" b="0" dirty="0" err="1">
+                <a:solidFill>
+                  <a:schemeClr val="tx1"/>
+                </a:solidFill>
+                <a:effectLst/>
+                <a:latin typeface="+mn-lt"/>
+              </a:rPr>
+              <a:t>return</a:t>
+            </a:r>
+            <a:r>
+              <a:rPr lang="es-ES" sz="2400" b="0" dirty="0">
+                <a:solidFill>
+                  <a:schemeClr val="tx1"/>
+                </a:solidFill>
+                <a:effectLst/>
+                <a:latin typeface="+mn-lt"/>
+              </a:rPr>
+              <a:t> Q;</a:t>
+            </a:r>
+          </a:p>
+          <a:p>
+            <a:r>
+              <a:rPr lang="es-ES" sz="2400" b="0" dirty="0">
+                <a:solidFill>
+                  <a:schemeClr val="tx1"/>
+                </a:solidFill>
+                <a:effectLst/>
+                <a:latin typeface="+mn-lt"/>
+              </a:rPr>
+              <a:t>        } catch (error) {</a:t>
+            </a:r>
+          </a:p>
+          <a:p>
+            <a:r>
+              <a:rPr lang="es-ES" sz="2400" b="0" dirty="0">
+                <a:solidFill>
+                  <a:schemeClr val="tx1"/>
+                </a:solidFill>
+                <a:effectLst/>
+                <a:latin typeface="+mn-lt"/>
+              </a:rPr>
+              <a:t>          </a:t>
+            </a:r>
+            <a:r>
+              <a:rPr lang="es-ES" sz="2400" b="0" dirty="0" err="1">
+                <a:solidFill>
+                  <a:schemeClr val="tx1"/>
+                </a:solidFill>
+                <a:effectLst/>
+                <a:latin typeface="+mn-lt"/>
+              </a:rPr>
+              <a:t>if</a:t>
+            </a:r>
+            <a:r>
+              <a:rPr lang="es-ES" sz="2400" b="0" dirty="0">
+                <a:solidFill>
+                  <a:schemeClr val="tx1"/>
+                </a:solidFill>
+                <a:effectLst/>
+                <a:latin typeface="+mn-lt"/>
+              </a:rPr>
+              <a:t> (error </a:t>
+            </a:r>
+            <a:r>
+              <a:rPr lang="es-ES" sz="2400" b="0" dirty="0" err="1">
+                <a:solidFill>
+                  <a:schemeClr val="tx1"/>
+                </a:solidFill>
+                <a:effectLst/>
+                <a:latin typeface="+mn-lt"/>
+              </a:rPr>
+              <a:t>instanceof</a:t>
+            </a:r>
+            <a:r>
+              <a:rPr lang="es-ES" sz="2400" b="0" dirty="0">
+                <a:solidFill>
+                  <a:schemeClr val="tx1"/>
+                </a:solidFill>
+                <a:effectLst/>
+                <a:latin typeface="+mn-lt"/>
+              </a:rPr>
+              <a:t> </a:t>
+            </a:r>
+            <a:r>
+              <a:rPr lang="es-ES" sz="2400" b="0" dirty="0" err="1">
+                <a:solidFill>
+                  <a:schemeClr val="tx1"/>
+                </a:solidFill>
+                <a:effectLst/>
+                <a:latin typeface="+mn-lt"/>
+              </a:rPr>
+              <a:t>HttpException</a:t>
+            </a:r>
+            <a:r>
+              <a:rPr lang="es-ES" sz="2400" b="0" dirty="0">
+                <a:solidFill>
+                  <a:schemeClr val="tx1"/>
+                </a:solidFill>
+                <a:effectLst/>
+                <a:latin typeface="+mn-lt"/>
+              </a:rPr>
+              <a:t>) {</a:t>
+            </a:r>
+          </a:p>
+          <a:p>
+            <a:r>
+              <a:rPr lang="es-ES" sz="2400" b="0" dirty="0">
+                <a:solidFill>
+                  <a:schemeClr val="tx1"/>
+                </a:solidFill>
+                <a:effectLst/>
+                <a:latin typeface="+mn-lt"/>
+              </a:rPr>
+              <a:t>            </a:t>
+            </a:r>
+            <a:r>
+              <a:rPr lang="es-ES" sz="2400" b="0" dirty="0" err="1">
+                <a:solidFill>
+                  <a:schemeClr val="tx1"/>
+                </a:solidFill>
+                <a:effectLst/>
+                <a:latin typeface="+mn-lt"/>
+              </a:rPr>
+              <a:t>throw</a:t>
+            </a:r>
+            <a:r>
+              <a:rPr lang="es-ES" sz="2400" b="0" dirty="0">
+                <a:solidFill>
+                  <a:schemeClr val="tx1"/>
+                </a:solidFill>
+                <a:effectLst/>
+                <a:latin typeface="+mn-lt"/>
+              </a:rPr>
+              <a:t> error;</a:t>
+            </a:r>
+          </a:p>
+          <a:p>
+            <a:r>
+              <a:rPr lang="es-ES" sz="2400" b="0" dirty="0">
+                <a:solidFill>
+                  <a:schemeClr val="tx1"/>
+                </a:solidFill>
+                <a:effectLst/>
+                <a:latin typeface="+mn-lt"/>
+              </a:rPr>
+              <a:t>          }</a:t>
+            </a:r>
+          </a:p>
+          <a:p>
+            <a:r>
+              <a:rPr lang="es-ES" sz="2400" b="0" dirty="0">
+                <a:solidFill>
+                  <a:schemeClr val="tx1"/>
+                </a:solidFill>
+                <a:effectLst/>
+                <a:latin typeface="+mn-lt"/>
+              </a:rPr>
+              <a:t>          </a:t>
+            </a:r>
+            <a:r>
+              <a:rPr lang="es-ES" sz="2400" b="0" dirty="0" err="1">
+                <a:solidFill>
+                  <a:schemeClr val="tx1"/>
+                </a:solidFill>
+                <a:effectLst/>
+                <a:latin typeface="+mn-lt"/>
+              </a:rPr>
+              <a:t>throw</a:t>
+            </a:r>
+            <a:r>
+              <a:rPr lang="es-ES" sz="2400" b="0" dirty="0">
+                <a:solidFill>
+                  <a:schemeClr val="tx1"/>
+                </a:solidFill>
+                <a:effectLst/>
+                <a:latin typeface="+mn-lt"/>
+              </a:rPr>
+              <a:t> new </a:t>
+            </a:r>
+            <a:r>
+              <a:rPr lang="es-ES" sz="2400" b="0" dirty="0" err="1">
+                <a:solidFill>
+                  <a:schemeClr val="tx1"/>
+                </a:solidFill>
+                <a:effectLst/>
+                <a:latin typeface="+mn-lt"/>
+              </a:rPr>
+              <a:t>HttpException</a:t>
+            </a:r>
+            <a:r>
+              <a:rPr lang="es-ES" sz="2400" b="0" dirty="0">
+                <a:solidFill>
+                  <a:schemeClr val="tx1"/>
+                </a:solidFill>
+                <a:effectLst/>
+                <a:latin typeface="+mn-lt"/>
+              </a:rPr>
+              <a:t>('Error en el cálculo', </a:t>
+            </a:r>
+            <a:r>
+              <a:rPr lang="es-ES" sz="2400" b="0" dirty="0" err="1">
+                <a:solidFill>
+                  <a:schemeClr val="tx1"/>
+                </a:solidFill>
+                <a:effectLst/>
+                <a:latin typeface="+mn-lt"/>
+              </a:rPr>
+              <a:t>HttpStatus.INTERNAL_SERVER_ERROR</a:t>
+            </a:r>
+            <a:r>
+              <a:rPr lang="es-ES" sz="2400" b="0" dirty="0">
+                <a:solidFill>
+                  <a:schemeClr val="tx1"/>
+                </a:solidFill>
+                <a:effectLst/>
+                <a:latin typeface="+mn-lt"/>
+              </a:rPr>
+              <a:t>);</a:t>
+            </a:r>
+          </a:p>
+          <a:p>
+            <a:r>
+              <a:rPr lang="es-ES" sz="2400" b="0" dirty="0">
+                <a:solidFill>
+                  <a:schemeClr val="tx1"/>
+                </a:solidFill>
+                <a:effectLst/>
+                <a:latin typeface="+mn-lt"/>
+              </a:rPr>
+              <a:t>        }</a:t>
+            </a:r>
+          </a:p>
+          <a:p>
+            <a:r>
+              <a:rPr lang="es-ES" sz="2400" b="0" dirty="0">
+                <a:solidFill>
+                  <a:srgbClr val="CCCCCC"/>
+                </a:solidFill>
+                <a:effectLst/>
+                <a:latin typeface="Consolas" panose="020B0609020204030204" pitchFamily="49" charset="0"/>
+              </a:rPr>
+              <a:t>  }</a:t>
+            </a:r>
+          </a:p>
+          <a:p>
+            <a:endParaRPr lang="es-ES" sz="4800" dirty="0"/>
           </a:p>
         </p:txBody>
       </p:sp>
-      <p:pic>
-        <p:nvPicPr>
-          <p:cNvPr id="3" name="Imagen 2"/>
-          <p:cNvPicPr>
-            <a:picLocks noChangeAspect="1"/>
-          </p:cNvPicPr>
-          <p:nvPr/>
-        </p:nvPicPr>
-        <p:blipFill>
-          <a:blip r:embed="rId3">
-            <a:extLst>
-              <a:ext uri="{28A0092B-C50C-407E-A947-70E740481C1C}">
-                <a14:useLocalDpi xmlns:a14="http://schemas.microsoft.com/office/drawing/2010/main" val="0"/>
-              </a:ext>
-            </a:extLst>
-          </a:blip>
-          <a:stretch>
-            <a:fillRect/>
-          </a:stretch>
-        </p:blipFill>
-        <p:spPr>
-          <a:xfrm>
-            <a:off x="44239" y="1726938"/>
-            <a:ext cx="8586048" cy="6833121"/>
-          </a:xfrm>
-          <a:prstGeom prst="rect">
-            <a:avLst/>
-          </a:prstGeom>
-        </p:spPr>
-      </p:pic>
-    </p:spTree>
-  </p:cSld>
-  <p:clrMapOvr>
-    <a:masterClrMapping/>
-  </p:clrMapOvr>
-</p:sld>
-</file>
-
-<file path=ppt/slides/slide8.xml><?xml version="1.0" encoding="utf-8"?>
-<p:sld xmlns:a="http://schemas.openxmlformats.org/drawingml/2006/main" xmlns:r="http://schemas.openxmlformats.org/officeDocument/2006/relationships" xmlns:p="http://schemas.openxmlformats.org/presentationml/2006/main">
-  <p:cSld>
-    <p:spTree>
-      <p:nvGrpSpPr>
-        <p:cNvPr id="1" name="Shape 162"/>
-        <p:cNvGrpSpPr/>
-        <p:nvPr/>
-      </p:nvGrpSpPr>
-      <p:grpSpPr>
-        <a:xfrm>
-          <a:off x="0" y="0"/>
-          <a:ext cx="0" cy="0"/>
-          <a:chOff x="0" y="0"/>
-          <a:chExt cx="0" cy="0"/>
-        </a:xfrm>
-      </p:grpSpPr>
-      <p:sp>
-        <p:nvSpPr>
-          <p:cNvPr id="163" name="Google Shape;163;p20"/>
-          <p:cNvSpPr/>
-          <p:nvPr/>
-        </p:nvSpPr>
-        <p:spPr>
-          <a:xfrm>
-            <a:off x="0" y="0"/>
-            <a:ext cx="18288000" cy="10287000"/>
-          </a:xfrm>
-          <a:prstGeom prst="rect">
-            <a:avLst/>
-          </a:prstGeom>
-          <a:gradFill>
-            <a:gsLst>
-              <a:gs pos="0">
-                <a:srgbClr val="14C5C3"/>
-              </a:gs>
-              <a:gs pos="100000">
-                <a:srgbClr val="4E7AD9"/>
-              </a:gs>
-            </a:gsLst>
-            <a:lin ang="2700000" scaled="0"/>
-          </a:gradFill>
-          <a:ln>
-            <a:noFill/>
-          </a:ln>
-        </p:spPr>
-        <p:txBody>
-          <a:bodyPr spcFirstLastPara="1" wrap="square" lIns="91425" tIns="91425" rIns="91425" bIns="91425" anchor="ctr" anchorCtr="0">
-            <a:noAutofit/>
-          </a:bodyPr>
-          <a:lstStyle/>
-          <a:p>
-            <a:pPr marL="0" lvl="0" indent="0" algn="l" rtl="0">
-              <a:spcBef>
-                <a:spcPts val="0"/>
-              </a:spcBef>
-              <a:spcAft>
-                <a:spcPts val="0"/>
-              </a:spcAft>
-              <a:buNone/>
-            </a:pPr>
-            <a:endParaRPr/>
-          </a:p>
-        </p:txBody>
-      </p:sp>
-      <p:grpSp>
-        <p:nvGrpSpPr>
-          <p:cNvPr id="164" name="Google Shape;164;p20"/>
-          <p:cNvGrpSpPr/>
-          <p:nvPr/>
-        </p:nvGrpSpPr>
-        <p:grpSpPr>
-          <a:xfrm>
-            <a:off x="4081176" y="1125097"/>
-            <a:ext cx="14206824" cy="8036802"/>
-            <a:chOff x="0" y="-38100"/>
-            <a:chExt cx="3741715" cy="2116689"/>
-          </a:xfrm>
-        </p:grpSpPr>
-        <p:sp>
-          <p:nvSpPr>
-            <p:cNvPr id="165" name="Google Shape;165;p20"/>
-            <p:cNvSpPr/>
-            <p:nvPr/>
-          </p:nvSpPr>
-          <p:spPr>
-            <a:xfrm>
-              <a:off x="0" y="0"/>
-              <a:ext cx="3741715" cy="2078589"/>
-            </a:xfrm>
-            <a:custGeom>
-              <a:avLst/>
-              <a:gdLst/>
-              <a:ahLst/>
-              <a:cxnLst/>
-              <a:rect l="l" t="t" r="r" b="b"/>
-              <a:pathLst>
-                <a:path w="3741715" h="2078589" extrusionOk="0">
-                  <a:moveTo>
-                    <a:pt x="0" y="0"/>
-                  </a:moveTo>
-                  <a:lnTo>
-                    <a:pt x="3741715" y="0"/>
-                  </a:lnTo>
-                  <a:lnTo>
-                    <a:pt x="3741715" y="2078589"/>
-                  </a:lnTo>
-                  <a:lnTo>
-                    <a:pt x="0" y="2078589"/>
-                  </a:lnTo>
-                  <a:close/>
-                </a:path>
-              </a:pathLst>
-            </a:custGeom>
-            <a:solidFill>
-              <a:srgbClr val="FFFFFF"/>
-            </a:solidFill>
-            <a:ln>
-              <a:noFill/>
-            </a:ln>
-          </p:spPr>
-        </p:sp>
-        <p:sp>
-          <p:nvSpPr>
-            <p:cNvPr id="166" name="Google Shape;166;p20"/>
-            <p:cNvSpPr txBox="1"/>
-            <p:nvPr/>
-          </p:nvSpPr>
-          <p:spPr>
-            <a:xfrm>
-              <a:off x="0" y="-38100"/>
-              <a:ext cx="3741715" cy="2116689"/>
-            </a:xfrm>
-            <a:prstGeom prst="rect">
-              <a:avLst/>
-            </a:prstGeom>
-            <a:noFill/>
-            <a:ln>
-              <a:noFill/>
-            </a:ln>
-          </p:spPr>
-          <p:txBody>
-            <a:bodyPr spcFirstLastPara="1" wrap="square" lIns="50800" tIns="50800" rIns="50800" bIns="50800" anchor="ctr" anchorCtr="0">
-              <a:noAutofit/>
-            </a:bodyPr>
-            <a:lstStyle/>
-            <a:p>
-              <a:pPr marL="0" marR="0" lvl="0" indent="0" algn="ctr" rtl="0">
-                <a:lnSpc>
-                  <a:spcPct val="147722"/>
-                </a:lnSpc>
-                <a:spcBef>
-                  <a:spcPts val="0"/>
-                </a:spcBef>
-                <a:spcAft>
-                  <a:spcPts val="0"/>
-                </a:spcAft>
-                <a:buNone/>
-              </a:pPr>
-              <a:endParaRPr sz="1800" b="0" i="0" u="none" strike="noStrike" cap="none">
-                <a:solidFill>
-                  <a:schemeClr val="dk1"/>
-                </a:solidFill>
-                <a:latin typeface="Calibri"/>
-                <a:ea typeface="Calibri"/>
-                <a:cs typeface="Calibri"/>
-                <a:sym typeface="Calibri"/>
-              </a:endParaRPr>
-            </a:p>
-          </p:txBody>
-        </p:sp>
-      </p:grpSp>
-      <p:sp>
-        <p:nvSpPr>
-          <p:cNvPr id="168" name="Google Shape;168;p20"/>
-          <p:cNvSpPr txBox="1"/>
-          <p:nvPr/>
-        </p:nvSpPr>
-        <p:spPr>
-          <a:xfrm>
-            <a:off x="8817960" y="1476038"/>
-            <a:ext cx="9470039" cy="6586418"/>
-          </a:xfrm>
-          <a:prstGeom prst="rect">
-            <a:avLst/>
-          </a:prstGeom>
-          <a:noFill/>
-          <a:ln>
-            <a:noFill/>
-          </a:ln>
-        </p:spPr>
-        <p:txBody>
-          <a:bodyPr spcFirstLastPara="1" wrap="square" lIns="0" tIns="0" rIns="0" bIns="0" anchor="t" anchorCtr="0">
-            <a:spAutoFit/>
-          </a:bodyPr>
-          <a:lstStyle/>
-          <a:p>
-            <a:r>
-              <a:rPr lang="es-ES" sz="3600" dirty="0"/>
-              <a:t>En la actualidad existen muchas plataformas que permiten la gestión de este proceso pero las mediciones se realizan con equipos y sensores que no contamos en nuestra nación, muchos de esta plataformas no podemos acceder y son con pagos de licencia.  El desarrollo de esta herramienta web permitirá soberanía nacional y se adaptará a las condiciones que existen en el país, ya que los modelos de cálculo son del siglo pasado y hoy el comportamiento de las costas es variable </a:t>
-            </a:r>
-          </a:p>
-          <a:p>
-            <a:endParaRPr lang="es-ES" sz="3200" dirty="0"/>
-          </a:p>
-        </p:txBody>
-      </p:sp>
-      <p:pic>
-        <p:nvPicPr>
-          <p:cNvPr id="2" name="Imagen 1"/>
-          <p:cNvPicPr>
-            <a:picLocks noChangeAspect="1"/>
-          </p:cNvPicPr>
-          <p:nvPr/>
-        </p:nvPicPr>
-        <p:blipFill>
-          <a:blip r:embed="rId3">
-            <a:extLst>
-              <a:ext uri="{28A0092B-C50C-407E-A947-70E740481C1C}">
-                <a14:useLocalDpi xmlns:a14="http://schemas.microsoft.com/office/drawing/2010/main" val="0"/>
-              </a:ext>
-            </a:extLst>
-          </a:blip>
-          <a:stretch>
-            <a:fillRect/>
-          </a:stretch>
-        </p:blipFill>
-        <p:spPr>
-          <a:xfrm>
-            <a:off x="34202" y="1276188"/>
-            <a:ext cx="8387653" cy="7885711"/>
-          </a:xfrm>
-          <a:prstGeom prst="rect">
-            <a:avLst/>
-          </a:prstGeom>
-        </p:spPr>
-      </p:pic>
     </p:spTree>
     <p:extLst>
       <p:ext uri="{BB962C8B-B14F-4D97-AF65-F5344CB8AC3E}">
-        <p14:creationId xmlns:p14="http://schemas.microsoft.com/office/powerpoint/2010/main" val="220410271"/>
+        <p14:creationId xmlns:p14="http://schemas.microsoft.com/office/powerpoint/2010/main" val="1694556529"/>
       </p:ext>
     </p:extLst>
   </p:cSld>
@@ -9367,7 +8141,7 @@
 </p:sld>
 </file>
 
-<file path=ppt/slides/slide9.xml><?xml version="1.0" encoding="utf-8"?>
+<file path=ppt/slides/slide7.xml><?xml version="1.0" encoding="utf-8"?>
 <p:sld xmlns:a="http://schemas.openxmlformats.org/drawingml/2006/main" xmlns:r="http://schemas.openxmlformats.org/officeDocument/2006/relationships" xmlns:p="http://schemas.openxmlformats.org/presentationml/2006/main">
   <p:cSld>
     <p:spTree>
